--- a/reference/QCATC777-Survival Curve.pptx
+++ b/reference/QCATC777-Survival Curve.pptx
@@ -2250,9 +2250,9 @@
         <p:grpSpPr>
           <a:xfrm>
             <a:off x="914400" y="914400"/>
-            <a:ext cx="5486400" cy="3657600"/>
+            <a:ext cx="5303520" cy="4206240"/>
             <a:chOff x="914400" y="914400"/>
-            <a:chExt cx="5486400" cy="3657600"/>
+            <a:chExt cx="5303520" cy="4206240"/>
           </a:xfrm>
         </p:grpSpPr>
         <p:sp>
@@ -2264,7 +2264,7 @@
           <p:spPr>
             <a:xfrm>
               <a:off x="914400" y="914400"/>
-              <a:ext cx="5486400" cy="3657600"/>
+              <a:ext cx="5303520" cy="4206240"/>
             </a:xfrm>
             <a:prstGeom prst="rect">
               <a:avLst/>
@@ -2299,7 +2299,7 @@
           <p:spPr>
             <a:xfrm>
               <a:off x="914400" y="914400"/>
-              <a:ext cx="5486400" cy="3657600"/>
+              <a:ext cx="5303519" cy="4206239"/>
             </a:xfrm>
             <a:prstGeom prst="rect">
               <a:avLst/>
@@ -2324,17 +2324,13 @@
           </p:nvSpPr>
           <p:spPr>
             <a:xfrm>
-              <a:off x="1738169" y="1315914"/>
-              <a:ext cx="1844167" cy="1171063"/>
+              <a:off x="1743918" y="1315770"/>
+              <a:ext cx="1758244" cy="1447380"/>
             </a:xfrm>
             <a:prstGeom prst="rect">
               <a:avLst/>
             </a:prstGeom>
-            <a:solidFill>
-              <a:srgbClr val="FFFFFF">
-                <a:alpha val="100000"/>
-              </a:srgbClr>
-            </a:solidFill>
+            <a:noFill/>
           </p:spPr>
           <p:txBody>
             <a:bodyPr/>
@@ -2350,135 +2346,135 @@
           </p:nvSpPr>
           <p:spPr>
             <a:xfrm>
-              <a:off x="1738169" y="1350023"/>
-              <a:ext cx="1810637" cy="397934"/>
+              <a:off x="1743918" y="1330101"/>
+              <a:ext cx="1726276" cy="501567"/>
             </a:xfrm>
             <a:custGeom>
               <a:avLst/>
               <a:pathLst>
-                <a:path w="1810637" h="397934">
+                <a:path w="1726276" h="501567">
                   <a:moveTo>
                     <a:pt x="0" y="0"/>
                   </a:moveTo>
                   <a:lnTo>
-                    <a:pt x="905318" y="0"/>
-                  </a:lnTo>
-                  <a:lnTo>
-                    <a:pt x="905318" y="11369"/>
-                  </a:lnTo>
-                  <a:lnTo>
-                    <a:pt x="1005909" y="11369"/>
-                  </a:lnTo>
-                  <a:lnTo>
-                    <a:pt x="1005909" y="22739"/>
-                  </a:lnTo>
-                  <a:lnTo>
-                    <a:pt x="1039439" y="22739"/>
-                  </a:lnTo>
-                  <a:lnTo>
-                    <a:pt x="1039439" y="34108"/>
-                  </a:lnTo>
-                  <a:lnTo>
-                    <a:pt x="1072970" y="34108"/>
-                  </a:lnTo>
-                  <a:lnTo>
-                    <a:pt x="1072970" y="45478"/>
-                  </a:lnTo>
-                  <a:lnTo>
-                    <a:pt x="1106500" y="45478"/>
-                  </a:lnTo>
-                  <a:lnTo>
-                    <a:pt x="1106500" y="56847"/>
-                  </a:lnTo>
-                  <a:lnTo>
-                    <a:pt x="1140030" y="56847"/>
-                  </a:lnTo>
-                  <a:lnTo>
-                    <a:pt x="1140030" y="68217"/>
-                  </a:lnTo>
-                  <a:lnTo>
-                    <a:pt x="1173561" y="68217"/>
-                  </a:lnTo>
-                  <a:lnTo>
-                    <a:pt x="1173561" y="79586"/>
-                  </a:lnTo>
-                  <a:lnTo>
-                    <a:pt x="1207091" y="79586"/>
-                  </a:lnTo>
-                  <a:lnTo>
-                    <a:pt x="1207091" y="125065"/>
-                  </a:lnTo>
-                  <a:lnTo>
-                    <a:pt x="1240621" y="125065"/>
-                  </a:lnTo>
-                  <a:lnTo>
-                    <a:pt x="1240621" y="170543"/>
-                  </a:lnTo>
-                  <a:lnTo>
-                    <a:pt x="1274152" y="170543"/>
-                  </a:lnTo>
-                  <a:lnTo>
-                    <a:pt x="1274152" y="193282"/>
-                  </a:lnTo>
-                  <a:lnTo>
-                    <a:pt x="1307682" y="193282"/>
-                  </a:lnTo>
-                  <a:lnTo>
-                    <a:pt x="1307682" y="227390"/>
-                  </a:lnTo>
-                  <a:lnTo>
-                    <a:pt x="1341212" y="227390"/>
-                  </a:lnTo>
-                  <a:lnTo>
-                    <a:pt x="1341212" y="250130"/>
-                  </a:lnTo>
-                  <a:lnTo>
-                    <a:pt x="1374742" y="250130"/>
-                  </a:lnTo>
-                  <a:lnTo>
-                    <a:pt x="1374742" y="272869"/>
-                  </a:lnTo>
-                  <a:lnTo>
-                    <a:pt x="1441803" y="272869"/>
-                  </a:lnTo>
-                  <a:lnTo>
-                    <a:pt x="1441803" y="284238"/>
-                  </a:lnTo>
-                  <a:lnTo>
-                    <a:pt x="1508864" y="284238"/>
-                  </a:lnTo>
-                  <a:lnTo>
-                    <a:pt x="1508864" y="318347"/>
-                  </a:lnTo>
-                  <a:lnTo>
-                    <a:pt x="1575924" y="318347"/>
-                  </a:lnTo>
-                  <a:lnTo>
-                    <a:pt x="1575924" y="352455"/>
-                  </a:lnTo>
-                  <a:lnTo>
-                    <a:pt x="1609455" y="352455"/>
-                  </a:lnTo>
-                  <a:lnTo>
-                    <a:pt x="1609455" y="375195"/>
-                  </a:lnTo>
-                  <a:lnTo>
-                    <a:pt x="1642985" y="375195"/>
-                  </a:lnTo>
-                  <a:lnTo>
-                    <a:pt x="1642985" y="386564"/>
-                  </a:lnTo>
-                  <a:lnTo>
-                    <a:pt x="1676515" y="386564"/>
-                  </a:lnTo>
-                  <a:lnTo>
-                    <a:pt x="1676515" y="397934"/>
-                  </a:lnTo>
-                  <a:lnTo>
-                    <a:pt x="1810637" y="397934"/>
-                  </a:lnTo>
-                  <a:lnTo>
-                    <a:pt x="1810637" y="397934"/>
+                    <a:pt x="863138" y="0"/>
+                  </a:lnTo>
+                  <a:lnTo>
+                    <a:pt x="863138" y="14330"/>
+                  </a:lnTo>
+                  <a:lnTo>
+                    <a:pt x="959042" y="14330"/>
+                  </a:lnTo>
+                  <a:lnTo>
+                    <a:pt x="959042" y="28661"/>
+                  </a:lnTo>
+                  <a:lnTo>
+                    <a:pt x="991010" y="28661"/>
+                  </a:lnTo>
+                  <a:lnTo>
+                    <a:pt x="991010" y="42991"/>
+                  </a:lnTo>
+                  <a:lnTo>
+                    <a:pt x="1022978" y="42991"/>
+                  </a:lnTo>
+                  <a:lnTo>
+                    <a:pt x="1022978" y="57322"/>
+                  </a:lnTo>
+                  <a:lnTo>
+                    <a:pt x="1054946" y="57322"/>
+                  </a:lnTo>
+                  <a:lnTo>
+                    <a:pt x="1054946" y="71652"/>
+                  </a:lnTo>
+                  <a:lnTo>
+                    <a:pt x="1086914" y="71652"/>
+                  </a:lnTo>
+                  <a:lnTo>
+                    <a:pt x="1086914" y="85983"/>
+                  </a:lnTo>
+                  <a:lnTo>
+                    <a:pt x="1118882" y="85983"/>
+                  </a:lnTo>
+                  <a:lnTo>
+                    <a:pt x="1118882" y="100313"/>
+                  </a:lnTo>
+                  <a:lnTo>
+                    <a:pt x="1150850" y="100313"/>
+                  </a:lnTo>
+                  <a:lnTo>
+                    <a:pt x="1150850" y="157635"/>
+                  </a:lnTo>
+                  <a:lnTo>
+                    <a:pt x="1182818" y="157635"/>
+                  </a:lnTo>
+                  <a:lnTo>
+                    <a:pt x="1182818" y="214957"/>
+                  </a:lnTo>
+                  <a:lnTo>
+                    <a:pt x="1214787" y="214957"/>
+                  </a:lnTo>
+                  <a:lnTo>
+                    <a:pt x="1214787" y="243618"/>
+                  </a:lnTo>
+                  <a:lnTo>
+                    <a:pt x="1246755" y="243618"/>
+                  </a:lnTo>
+                  <a:lnTo>
+                    <a:pt x="1246755" y="286610"/>
+                  </a:lnTo>
+                  <a:lnTo>
+                    <a:pt x="1278723" y="286610"/>
+                  </a:lnTo>
+                  <a:lnTo>
+                    <a:pt x="1278723" y="315271"/>
+                  </a:lnTo>
+                  <a:lnTo>
+                    <a:pt x="1310691" y="315271"/>
+                  </a:lnTo>
+                  <a:lnTo>
+                    <a:pt x="1310691" y="343932"/>
+                  </a:lnTo>
+                  <a:lnTo>
+                    <a:pt x="1374627" y="343932"/>
+                  </a:lnTo>
+                  <a:lnTo>
+                    <a:pt x="1374627" y="358262"/>
+                  </a:lnTo>
+                  <a:lnTo>
+                    <a:pt x="1438563" y="358262"/>
+                  </a:lnTo>
+                  <a:lnTo>
+                    <a:pt x="1438563" y="401254"/>
+                  </a:lnTo>
+                  <a:lnTo>
+                    <a:pt x="1502499" y="401254"/>
+                  </a:lnTo>
+                  <a:lnTo>
+                    <a:pt x="1502499" y="444245"/>
+                  </a:lnTo>
+                  <a:lnTo>
+                    <a:pt x="1534467" y="444245"/>
+                  </a:lnTo>
+                  <a:lnTo>
+                    <a:pt x="1534467" y="472906"/>
+                  </a:lnTo>
+                  <a:lnTo>
+                    <a:pt x="1566435" y="472906"/>
+                  </a:lnTo>
+                  <a:lnTo>
+                    <a:pt x="1566435" y="487237"/>
+                  </a:lnTo>
+                  <a:lnTo>
+                    <a:pt x="1598403" y="487237"/>
+                  </a:lnTo>
+                  <a:lnTo>
+                    <a:pt x="1598403" y="501567"/>
+                  </a:lnTo>
+                  <a:lnTo>
+                    <a:pt x="1726276" y="501567"/>
+                  </a:lnTo>
+                  <a:lnTo>
+                    <a:pt x="1726276" y="501567"/>
                   </a:lnTo>
                 </a:path>
               </a:pathLst>
@@ -2507,111 +2503,111 @@
           </p:nvSpPr>
           <p:spPr>
             <a:xfrm>
-              <a:off x="1738169" y="1350023"/>
-              <a:ext cx="1810637" cy="443412"/>
+              <a:off x="1743918" y="1330101"/>
+              <a:ext cx="1726276" cy="558889"/>
             </a:xfrm>
             <a:custGeom>
               <a:avLst/>
               <a:pathLst>
-                <a:path w="1810637" h="443412">
+                <a:path w="1726276" h="558889">
                   <a:moveTo>
                     <a:pt x="0" y="0"/>
                   </a:moveTo>
                   <a:lnTo>
-                    <a:pt x="871788" y="0"/>
-                  </a:lnTo>
-                  <a:lnTo>
-                    <a:pt x="871788" y="11369"/>
-                  </a:lnTo>
-                  <a:lnTo>
-                    <a:pt x="905318" y="11369"/>
-                  </a:lnTo>
-                  <a:lnTo>
-                    <a:pt x="905318" y="34108"/>
-                  </a:lnTo>
-                  <a:lnTo>
-                    <a:pt x="1005909" y="34108"/>
-                  </a:lnTo>
-                  <a:lnTo>
-                    <a:pt x="1005909" y="56847"/>
-                  </a:lnTo>
-                  <a:lnTo>
-                    <a:pt x="1039439" y="56847"/>
-                  </a:lnTo>
-                  <a:lnTo>
-                    <a:pt x="1039439" y="79586"/>
-                  </a:lnTo>
-                  <a:lnTo>
-                    <a:pt x="1072970" y="79586"/>
-                  </a:lnTo>
-                  <a:lnTo>
-                    <a:pt x="1072970" y="147804"/>
-                  </a:lnTo>
-                  <a:lnTo>
-                    <a:pt x="1106500" y="147804"/>
-                  </a:lnTo>
-                  <a:lnTo>
-                    <a:pt x="1106500" y="193282"/>
-                  </a:lnTo>
-                  <a:lnTo>
-                    <a:pt x="1140030" y="193282"/>
-                  </a:lnTo>
-                  <a:lnTo>
-                    <a:pt x="1140030" y="227390"/>
-                  </a:lnTo>
-                  <a:lnTo>
-                    <a:pt x="1173561" y="227390"/>
-                  </a:lnTo>
-                  <a:lnTo>
-                    <a:pt x="1173561" y="284238"/>
-                  </a:lnTo>
-                  <a:lnTo>
-                    <a:pt x="1207091" y="284238"/>
-                  </a:lnTo>
-                  <a:lnTo>
-                    <a:pt x="1207091" y="341086"/>
-                  </a:lnTo>
-                  <a:lnTo>
-                    <a:pt x="1240621" y="341086"/>
-                  </a:lnTo>
-                  <a:lnTo>
-                    <a:pt x="1240621" y="363825"/>
-                  </a:lnTo>
-                  <a:lnTo>
-                    <a:pt x="1274152" y="363825"/>
-                  </a:lnTo>
-                  <a:lnTo>
-                    <a:pt x="1274152" y="375195"/>
-                  </a:lnTo>
-                  <a:lnTo>
-                    <a:pt x="1307682" y="375195"/>
-                  </a:lnTo>
-                  <a:lnTo>
-                    <a:pt x="1307682" y="386564"/>
-                  </a:lnTo>
-                  <a:lnTo>
-                    <a:pt x="1341212" y="386564"/>
-                  </a:lnTo>
-                  <a:lnTo>
-                    <a:pt x="1341212" y="409303"/>
-                  </a:lnTo>
-                  <a:lnTo>
-                    <a:pt x="1575924" y="409303"/>
-                  </a:lnTo>
-                  <a:lnTo>
-                    <a:pt x="1575924" y="420673"/>
-                  </a:lnTo>
-                  <a:lnTo>
-                    <a:pt x="1609455" y="420673"/>
-                  </a:lnTo>
-                  <a:lnTo>
-                    <a:pt x="1609455" y="432042"/>
-                  </a:lnTo>
-                  <a:lnTo>
-                    <a:pt x="1810637" y="432042"/>
-                  </a:lnTo>
-                  <a:lnTo>
-                    <a:pt x="1810637" y="443412"/>
+                    <a:pt x="831170" y="0"/>
+                  </a:lnTo>
+                  <a:lnTo>
+                    <a:pt x="831170" y="14330"/>
+                  </a:lnTo>
+                  <a:lnTo>
+                    <a:pt x="863138" y="14330"/>
+                  </a:lnTo>
+                  <a:lnTo>
+                    <a:pt x="863138" y="42991"/>
+                  </a:lnTo>
+                  <a:lnTo>
+                    <a:pt x="959042" y="42991"/>
+                  </a:lnTo>
+                  <a:lnTo>
+                    <a:pt x="959042" y="71652"/>
+                  </a:lnTo>
+                  <a:lnTo>
+                    <a:pt x="991010" y="71652"/>
+                  </a:lnTo>
+                  <a:lnTo>
+                    <a:pt x="991010" y="100313"/>
+                  </a:lnTo>
+                  <a:lnTo>
+                    <a:pt x="1022978" y="100313"/>
+                  </a:lnTo>
+                  <a:lnTo>
+                    <a:pt x="1022978" y="186296"/>
+                  </a:lnTo>
+                  <a:lnTo>
+                    <a:pt x="1054946" y="186296"/>
+                  </a:lnTo>
+                  <a:lnTo>
+                    <a:pt x="1054946" y="243618"/>
+                  </a:lnTo>
+                  <a:lnTo>
+                    <a:pt x="1086914" y="243618"/>
+                  </a:lnTo>
+                  <a:lnTo>
+                    <a:pt x="1086914" y="286610"/>
+                  </a:lnTo>
+                  <a:lnTo>
+                    <a:pt x="1118882" y="286610"/>
+                  </a:lnTo>
+                  <a:lnTo>
+                    <a:pt x="1118882" y="358262"/>
+                  </a:lnTo>
+                  <a:lnTo>
+                    <a:pt x="1150850" y="358262"/>
+                  </a:lnTo>
+                  <a:lnTo>
+                    <a:pt x="1150850" y="429915"/>
+                  </a:lnTo>
+                  <a:lnTo>
+                    <a:pt x="1182818" y="429915"/>
+                  </a:lnTo>
+                  <a:lnTo>
+                    <a:pt x="1182818" y="458576"/>
+                  </a:lnTo>
+                  <a:lnTo>
+                    <a:pt x="1214787" y="458576"/>
+                  </a:lnTo>
+                  <a:lnTo>
+                    <a:pt x="1214787" y="472906"/>
+                  </a:lnTo>
+                  <a:lnTo>
+                    <a:pt x="1246755" y="472906"/>
+                  </a:lnTo>
+                  <a:lnTo>
+                    <a:pt x="1246755" y="487237"/>
+                  </a:lnTo>
+                  <a:lnTo>
+                    <a:pt x="1278723" y="487237"/>
+                  </a:lnTo>
+                  <a:lnTo>
+                    <a:pt x="1278723" y="515898"/>
+                  </a:lnTo>
+                  <a:lnTo>
+                    <a:pt x="1502499" y="515898"/>
+                  </a:lnTo>
+                  <a:lnTo>
+                    <a:pt x="1502499" y="530228"/>
+                  </a:lnTo>
+                  <a:lnTo>
+                    <a:pt x="1534467" y="530228"/>
+                  </a:lnTo>
+                  <a:lnTo>
+                    <a:pt x="1534467" y="544559"/>
+                  </a:lnTo>
+                  <a:lnTo>
+                    <a:pt x="1726276" y="544559"/>
+                  </a:lnTo>
+                  <a:lnTo>
+                    <a:pt x="1726276" y="558889"/>
                   </a:lnTo>
                 </a:path>
               </a:pathLst>
@@ -2640,135 +2636,135 @@
           </p:nvSpPr>
           <p:spPr>
             <a:xfrm>
-              <a:off x="1738169" y="1350023"/>
-              <a:ext cx="1810637" cy="375195"/>
+              <a:off x="1743918" y="1330101"/>
+              <a:ext cx="1726276" cy="472906"/>
             </a:xfrm>
             <a:custGeom>
               <a:avLst/>
               <a:pathLst>
-                <a:path w="1810637" h="375195">
+                <a:path w="1726276" h="472906">
                   <a:moveTo>
                     <a:pt x="0" y="0"/>
                   </a:moveTo>
                   <a:lnTo>
-                    <a:pt x="771197" y="0"/>
-                  </a:lnTo>
-                  <a:lnTo>
-                    <a:pt x="771197" y="11369"/>
-                  </a:lnTo>
-                  <a:lnTo>
-                    <a:pt x="871788" y="11369"/>
-                  </a:lnTo>
-                  <a:lnTo>
-                    <a:pt x="871788" y="56847"/>
-                  </a:lnTo>
-                  <a:lnTo>
-                    <a:pt x="905318" y="56847"/>
-                  </a:lnTo>
-                  <a:lnTo>
-                    <a:pt x="905318" y="68217"/>
-                  </a:lnTo>
-                  <a:lnTo>
-                    <a:pt x="972379" y="68217"/>
-                  </a:lnTo>
-                  <a:lnTo>
-                    <a:pt x="972379" y="79586"/>
-                  </a:lnTo>
-                  <a:lnTo>
-                    <a:pt x="1039439" y="79586"/>
-                  </a:lnTo>
-                  <a:lnTo>
-                    <a:pt x="1039439" y="90956"/>
-                  </a:lnTo>
-                  <a:lnTo>
-                    <a:pt x="1072970" y="90956"/>
-                  </a:lnTo>
-                  <a:lnTo>
-                    <a:pt x="1072970" y="102325"/>
-                  </a:lnTo>
-                  <a:lnTo>
-                    <a:pt x="1106500" y="102325"/>
-                  </a:lnTo>
-                  <a:lnTo>
-                    <a:pt x="1106500" y="113695"/>
-                  </a:lnTo>
-                  <a:lnTo>
-                    <a:pt x="1140030" y="113695"/>
-                  </a:lnTo>
-                  <a:lnTo>
-                    <a:pt x="1140030" y="136434"/>
-                  </a:lnTo>
-                  <a:lnTo>
-                    <a:pt x="1173561" y="136434"/>
-                  </a:lnTo>
-                  <a:lnTo>
-                    <a:pt x="1173561" y="159173"/>
-                  </a:lnTo>
-                  <a:lnTo>
-                    <a:pt x="1207091" y="159173"/>
-                  </a:lnTo>
-                  <a:lnTo>
-                    <a:pt x="1207091" y="181912"/>
-                  </a:lnTo>
-                  <a:lnTo>
-                    <a:pt x="1240621" y="181912"/>
-                  </a:lnTo>
-                  <a:lnTo>
-                    <a:pt x="1240621" y="204651"/>
-                  </a:lnTo>
-                  <a:lnTo>
-                    <a:pt x="1341212" y="204651"/>
-                  </a:lnTo>
-                  <a:lnTo>
-                    <a:pt x="1341212" y="227390"/>
-                  </a:lnTo>
-                  <a:lnTo>
-                    <a:pt x="1441803" y="227390"/>
-                  </a:lnTo>
-                  <a:lnTo>
-                    <a:pt x="1441803" y="238760"/>
-                  </a:lnTo>
-                  <a:lnTo>
-                    <a:pt x="1475333" y="238760"/>
-                  </a:lnTo>
-                  <a:lnTo>
-                    <a:pt x="1475333" y="261499"/>
-                  </a:lnTo>
-                  <a:lnTo>
-                    <a:pt x="1508864" y="261499"/>
-                  </a:lnTo>
-                  <a:lnTo>
-                    <a:pt x="1508864" y="295608"/>
-                  </a:lnTo>
-                  <a:lnTo>
-                    <a:pt x="1542394" y="295608"/>
-                  </a:lnTo>
-                  <a:lnTo>
-                    <a:pt x="1542394" y="306977"/>
-                  </a:lnTo>
-                  <a:lnTo>
-                    <a:pt x="1609455" y="306977"/>
-                  </a:lnTo>
-                  <a:lnTo>
-                    <a:pt x="1609455" y="341086"/>
-                  </a:lnTo>
-                  <a:lnTo>
-                    <a:pt x="1642985" y="341086"/>
-                  </a:lnTo>
-                  <a:lnTo>
-                    <a:pt x="1642985" y="363825"/>
-                  </a:lnTo>
-                  <a:lnTo>
-                    <a:pt x="1676515" y="363825"/>
-                  </a:lnTo>
-                  <a:lnTo>
-                    <a:pt x="1676515" y="375195"/>
-                  </a:lnTo>
-                  <a:lnTo>
-                    <a:pt x="1810637" y="375195"/>
-                  </a:lnTo>
-                  <a:lnTo>
-                    <a:pt x="1810637" y="375195"/>
+                    <a:pt x="735265" y="0"/>
+                  </a:lnTo>
+                  <a:lnTo>
+                    <a:pt x="735265" y="14330"/>
+                  </a:lnTo>
+                  <a:lnTo>
+                    <a:pt x="831170" y="14330"/>
+                  </a:lnTo>
+                  <a:lnTo>
+                    <a:pt x="831170" y="71652"/>
+                  </a:lnTo>
+                  <a:lnTo>
+                    <a:pt x="863138" y="71652"/>
+                  </a:lnTo>
+                  <a:lnTo>
+                    <a:pt x="863138" y="85983"/>
+                  </a:lnTo>
+                  <a:lnTo>
+                    <a:pt x="927074" y="85983"/>
+                  </a:lnTo>
+                  <a:lnTo>
+                    <a:pt x="927074" y="100313"/>
+                  </a:lnTo>
+                  <a:lnTo>
+                    <a:pt x="991010" y="100313"/>
+                  </a:lnTo>
+                  <a:lnTo>
+                    <a:pt x="991010" y="114644"/>
+                  </a:lnTo>
+                  <a:lnTo>
+                    <a:pt x="1022978" y="114644"/>
+                  </a:lnTo>
+                  <a:lnTo>
+                    <a:pt x="1022978" y="128974"/>
+                  </a:lnTo>
+                  <a:lnTo>
+                    <a:pt x="1054946" y="128974"/>
+                  </a:lnTo>
+                  <a:lnTo>
+                    <a:pt x="1054946" y="143305"/>
+                  </a:lnTo>
+                  <a:lnTo>
+                    <a:pt x="1086914" y="143305"/>
+                  </a:lnTo>
+                  <a:lnTo>
+                    <a:pt x="1086914" y="171966"/>
+                  </a:lnTo>
+                  <a:lnTo>
+                    <a:pt x="1118882" y="171966"/>
+                  </a:lnTo>
+                  <a:lnTo>
+                    <a:pt x="1118882" y="200627"/>
+                  </a:lnTo>
+                  <a:lnTo>
+                    <a:pt x="1150850" y="200627"/>
+                  </a:lnTo>
+                  <a:lnTo>
+                    <a:pt x="1150850" y="229288"/>
+                  </a:lnTo>
+                  <a:lnTo>
+                    <a:pt x="1182818" y="229288"/>
+                  </a:lnTo>
+                  <a:lnTo>
+                    <a:pt x="1182818" y="257949"/>
+                  </a:lnTo>
+                  <a:lnTo>
+                    <a:pt x="1278723" y="257949"/>
+                  </a:lnTo>
+                  <a:lnTo>
+                    <a:pt x="1278723" y="286610"/>
+                  </a:lnTo>
+                  <a:lnTo>
+                    <a:pt x="1374627" y="286610"/>
+                  </a:lnTo>
+                  <a:lnTo>
+                    <a:pt x="1374627" y="300940"/>
+                  </a:lnTo>
+                  <a:lnTo>
+                    <a:pt x="1406595" y="300940"/>
+                  </a:lnTo>
+                  <a:lnTo>
+                    <a:pt x="1406595" y="329601"/>
+                  </a:lnTo>
+                  <a:lnTo>
+                    <a:pt x="1438563" y="329601"/>
+                  </a:lnTo>
+                  <a:lnTo>
+                    <a:pt x="1438563" y="372593"/>
+                  </a:lnTo>
+                  <a:lnTo>
+                    <a:pt x="1470531" y="372593"/>
+                  </a:lnTo>
+                  <a:lnTo>
+                    <a:pt x="1470531" y="386923"/>
+                  </a:lnTo>
+                  <a:lnTo>
+                    <a:pt x="1534467" y="386923"/>
+                  </a:lnTo>
+                  <a:lnTo>
+                    <a:pt x="1534467" y="429915"/>
+                  </a:lnTo>
+                  <a:lnTo>
+                    <a:pt x="1566435" y="429915"/>
+                  </a:lnTo>
+                  <a:lnTo>
+                    <a:pt x="1566435" y="458576"/>
+                  </a:lnTo>
+                  <a:lnTo>
+                    <a:pt x="1598403" y="458576"/>
+                  </a:lnTo>
+                  <a:lnTo>
+                    <a:pt x="1598403" y="472906"/>
+                  </a:lnTo>
+                  <a:lnTo>
+                    <a:pt x="1726276" y="472906"/>
+                  </a:lnTo>
+                  <a:lnTo>
+                    <a:pt x="1726276" y="472906"/>
                   </a:lnTo>
                 </a:path>
               </a:pathLst>
@@ -2797,8 +2793,8 @@
           </p:nvSpPr>
           <p:spPr>
             <a:xfrm>
-              <a:off x="3475655" y="1693222"/>
-              <a:ext cx="146301" cy="109470"/>
+              <a:off x="3395717" y="1757831"/>
+              <a:ext cx="148955" cy="129570"/>
             </a:xfrm>
             <a:prstGeom prst="rect">
               <a:avLst/>
@@ -2810,9 +2806,6 @@
             <a:lstStyle/>
             <a:p>
               <a:pPr algn="l" marL="0" marR="0" indent="0">
-                <a:lnSpc>
-                  <a:spcPts val="1374"/>
-                </a:lnSpc>
                 <a:spcBef>
                   <a:spcPts val="0"/>
                 </a:spcBef>
@@ -2821,7 +2814,7 @@
                 </a:spcAft>
               </a:pPr>
               <a:r>
-                <a:rPr sz="1374">
+                <a:rPr sz="1400" i="0" b="0">
                   <a:solidFill>
                     <a:srgbClr val="7CAE00">
                       <a:alpha val="100000"/>
@@ -2843,8 +2836,8 @@
           </p:nvSpPr>
           <p:spPr>
             <a:xfrm>
-              <a:off x="3475655" y="1738700"/>
-              <a:ext cx="146301" cy="109470"/>
+              <a:off x="3395717" y="1815153"/>
+              <a:ext cx="148955" cy="129570"/>
             </a:xfrm>
             <a:prstGeom prst="rect">
               <a:avLst/>
@@ -2856,9 +2849,6 @@
             <a:lstStyle/>
             <a:p>
               <a:pPr algn="l" marL="0" marR="0" indent="0">
-                <a:lnSpc>
-                  <a:spcPts val="1374"/>
-                </a:lnSpc>
                 <a:spcBef>
                   <a:spcPts val="0"/>
                 </a:spcBef>
@@ -2867,7 +2857,7 @@
                 </a:spcAft>
               </a:pPr>
               <a:r>
-                <a:rPr sz="1374">
+                <a:rPr sz="1400" i="0" b="0">
                   <a:solidFill>
                     <a:srgbClr val="00C08B">
                       <a:alpha val="100000"/>
@@ -2889,8 +2879,8 @@
           </p:nvSpPr>
           <p:spPr>
             <a:xfrm>
-              <a:off x="3475655" y="1670482"/>
-              <a:ext cx="146301" cy="109470"/>
+              <a:off x="3395717" y="1729170"/>
+              <a:ext cx="148955" cy="129570"/>
             </a:xfrm>
             <a:prstGeom prst="rect">
               <a:avLst/>
@@ -2902,9 +2892,6 @@
             <a:lstStyle/>
             <a:p>
               <a:pPr algn="l" marL="0" marR="0" indent="0">
-                <a:lnSpc>
-                  <a:spcPts val="1374"/>
-                </a:lnSpc>
                 <a:spcBef>
                   <a:spcPts val="0"/>
                 </a:spcBef>
@@ -2913,7 +2900,7 @@
                 </a:spcAft>
               </a:pPr>
               <a:r>
-                <a:rPr sz="1374">
+                <a:rPr sz="1400" i="0" b="0">
                   <a:solidFill>
                     <a:srgbClr val="FF64B0">
                       <a:alpha val="100000"/>
@@ -2935,12 +2922,13 @@
           </p:nvSpPr>
           <p:spPr>
             <a:xfrm>
-              <a:off x="1738169" y="1315914"/>
-              <a:ext cx="1844167" cy="1171063"/>
+              <a:off x="1743918" y="1315770"/>
+              <a:ext cx="1758244" cy="1447380"/>
             </a:xfrm>
             <a:prstGeom prst="rect">
               <a:avLst/>
             </a:prstGeom>
+            <a:noFill/>
           </p:spPr>
           <p:txBody>
             <a:bodyPr/>
@@ -2956,17 +2944,13 @@
           </p:nvSpPr>
           <p:spPr>
             <a:xfrm>
-              <a:off x="1738169" y="2850534"/>
-              <a:ext cx="1844167" cy="1171063"/>
+              <a:off x="1743918" y="3126564"/>
+              <a:ext cx="1758244" cy="1447380"/>
             </a:xfrm>
             <a:prstGeom prst="rect">
               <a:avLst/>
             </a:prstGeom>
-            <a:solidFill>
-              <a:srgbClr val="FFFFFF">
-                <a:alpha val="100000"/>
-              </a:srgbClr>
-            </a:solidFill>
+            <a:noFill/>
           </p:spPr>
           <p:txBody>
             <a:bodyPr/>
@@ -2982,111 +2966,111 @@
           </p:nvSpPr>
           <p:spPr>
             <a:xfrm>
-              <a:off x="1738169" y="2884643"/>
-              <a:ext cx="1810637" cy="306977"/>
+              <a:off x="1743918" y="3140895"/>
+              <a:ext cx="1726276" cy="386923"/>
             </a:xfrm>
             <a:custGeom>
               <a:avLst/>
               <a:pathLst>
-                <a:path w="1810637" h="306977">
+                <a:path w="1726276" h="386923">
                   <a:moveTo>
                     <a:pt x="0" y="0"/>
                   </a:moveTo>
                   <a:lnTo>
-                    <a:pt x="670606" y="0"/>
-                  </a:lnTo>
-                  <a:lnTo>
-                    <a:pt x="670606" y="11369"/>
-                  </a:lnTo>
-                  <a:lnTo>
-                    <a:pt x="871788" y="11369"/>
-                  </a:lnTo>
-                  <a:lnTo>
-                    <a:pt x="871788" y="22739"/>
-                  </a:lnTo>
-                  <a:lnTo>
-                    <a:pt x="938848" y="22739"/>
-                  </a:lnTo>
-                  <a:lnTo>
-                    <a:pt x="938848" y="34108"/>
-                  </a:lnTo>
-                  <a:lnTo>
-                    <a:pt x="972379" y="34108"/>
-                  </a:lnTo>
-                  <a:lnTo>
-                    <a:pt x="972379" y="45478"/>
-                  </a:lnTo>
-                  <a:lnTo>
-                    <a:pt x="1005909" y="45478"/>
-                  </a:lnTo>
-                  <a:lnTo>
-                    <a:pt x="1005909" y="79586"/>
-                  </a:lnTo>
-                  <a:lnTo>
-                    <a:pt x="1039439" y="79586"/>
-                  </a:lnTo>
-                  <a:lnTo>
-                    <a:pt x="1039439" y="113695"/>
-                  </a:lnTo>
-                  <a:lnTo>
-                    <a:pt x="1072970" y="113695"/>
-                  </a:lnTo>
-                  <a:lnTo>
-                    <a:pt x="1072970" y="125065"/>
-                  </a:lnTo>
-                  <a:lnTo>
-                    <a:pt x="1106500" y="125065"/>
-                  </a:lnTo>
-                  <a:lnTo>
-                    <a:pt x="1106500" y="170543"/>
-                  </a:lnTo>
-                  <a:lnTo>
-                    <a:pt x="1140030" y="170543"/>
-                  </a:lnTo>
-                  <a:lnTo>
-                    <a:pt x="1140030" y="193282"/>
-                  </a:lnTo>
-                  <a:lnTo>
-                    <a:pt x="1173561" y="193282"/>
-                  </a:lnTo>
-                  <a:lnTo>
-                    <a:pt x="1173561" y="216021"/>
-                  </a:lnTo>
-                  <a:lnTo>
-                    <a:pt x="1207091" y="216021"/>
-                  </a:lnTo>
-                  <a:lnTo>
-                    <a:pt x="1207091" y="238760"/>
-                  </a:lnTo>
-                  <a:lnTo>
-                    <a:pt x="1240621" y="238760"/>
-                  </a:lnTo>
-                  <a:lnTo>
-                    <a:pt x="1240621" y="261499"/>
-                  </a:lnTo>
-                  <a:lnTo>
-                    <a:pt x="1307682" y="261499"/>
-                  </a:lnTo>
-                  <a:lnTo>
-                    <a:pt x="1307682" y="272869"/>
-                  </a:lnTo>
-                  <a:lnTo>
-                    <a:pt x="1374742" y="272869"/>
-                  </a:lnTo>
-                  <a:lnTo>
-                    <a:pt x="1374742" y="295608"/>
-                  </a:lnTo>
-                  <a:lnTo>
-                    <a:pt x="1475333" y="295608"/>
-                  </a:lnTo>
-                  <a:lnTo>
-                    <a:pt x="1475333" y="306977"/>
-                  </a:lnTo>
-                  <a:lnTo>
-                    <a:pt x="1810637" y="306977"/>
-                  </a:lnTo>
-                  <a:lnTo>
-                    <a:pt x="1810637" y="306977"/>
+                    <a:pt x="639361" y="0"/>
+                  </a:lnTo>
+                  <a:lnTo>
+                    <a:pt x="639361" y="14330"/>
+                  </a:lnTo>
+                  <a:lnTo>
+                    <a:pt x="831170" y="14330"/>
+                  </a:lnTo>
+                  <a:lnTo>
+                    <a:pt x="831170" y="28661"/>
+                  </a:lnTo>
+                  <a:lnTo>
+                    <a:pt x="895106" y="28661"/>
+                  </a:lnTo>
+                  <a:lnTo>
+                    <a:pt x="895106" y="42991"/>
+                  </a:lnTo>
+                  <a:lnTo>
+                    <a:pt x="927074" y="42991"/>
+                  </a:lnTo>
+                  <a:lnTo>
+                    <a:pt x="927074" y="57322"/>
+                  </a:lnTo>
+                  <a:lnTo>
+                    <a:pt x="959042" y="57322"/>
+                  </a:lnTo>
+                  <a:lnTo>
+                    <a:pt x="959042" y="100313"/>
+                  </a:lnTo>
+                  <a:lnTo>
+                    <a:pt x="991010" y="100313"/>
+                  </a:lnTo>
+                  <a:lnTo>
+                    <a:pt x="991010" y="143305"/>
+                  </a:lnTo>
+                  <a:lnTo>
+                    <a:pt x="1022978" y="143305"/>
+                  </a:lnTo>
+                  <a:lnTo>
+                    <a:pt x="1022978" y="157635"/>
+                  </a:lnTo>
+                  <a:lnTo>
+                    <a:pt x="1054946" y="157635"/>
+                  </a:lnTo>
+                  <a:lnTo>
+                    <a:pt x="1054946" y="214957"/>
+                  </a:lnTo>
+                  <a:lnTo>
+                    <a:pt x="1086914" y="214957"/>
+                  </a:lnTo>
+                  <a:lnTo>
+                    <a:pt x="1086914" y="243618"/>
+                  </a:lnTo>
+                  <a:lnTo>
+                    <a:pt x="1118882" y="243618"/>
+                  </a:lnTo>
+                  <a:lnTo>
+                    <a:pt x="1118882" y="272279"/>
+                  </a:lnTo>
+                  <a:lnTo>
+                    <a:pt x="1150850" y="272279"/>
+                  </a:lnTo>
+                  <a:lnTo>
+                    <a:pt x="1150850" y="300940"/>
+                  </a:lnTo>
+                  <a:lnTo>
+                    <a:pt x="1182818" y="300940"/>
+                  </a:lnTo>
+                  <a:lnTo>
+                    <a:pt x="1182818" y="329601"/>
+                  </a:lnTo>
+                  <a:lnTo>
+                    <a:pt x="1246755" y="329601"/>
+                  </a:lnTo>
+                  <a:lnTo>
+                    <a:pt x="1246755" y="343932"/>
+                  </a:lnTo>
+                  <a:lnTo>
+                    <a:pt x="1310691" y="343932"/>
+                  </a:lnTo>
+                  <a:lnTo>
+                    <a:pt x="1310691" y="372593"/>
+                  </a:lnTo>
+                  <a:lnTo>
+                    <a:pt x="1406595" y="372593"/>
+                  </a:lnTo>
+                  <a:lnTo>
+                    <a:pt x="1406595" y="386923"/>
+                  </a:lnTo>
+                  <a:lnTo>
+                    <a:pt x="1726276" y="386923"/>
+                  </a:lnTo>
+                  <a:lnTo>
+                    <a:pt x="1726276" y="386923"/>
                   </a:lnTo>
                 </a:path>
               </a:pathLst>
@@ -3115,129 +3099,129 @@
           </p:nvSpPr>
           <p:spPr>
             <a:xfrm>
-              <a:off x="1738169" y="2884643"/>
-              <a:ext cx="1810637" cy="341086"/>
+              <a:off x="1743918" y="3140895"/>
+              <a:ext cx="1726276" cy="429915"/>
             </a:xfrm>
             <a:custGeom>
               <a:avLst/>
               <a:pathLst>
-                <a:path w="1810637" h="341086">
+                <a:path w="1726276" h="429915">
                   <a:moveTo>
                     <a:pt x="0" y="0"/>
                   </a:moveTo>
                   <a:lnTo>
-                    <a:pt x="905318" y="0"/>
-                  </a:lnTo>
-                  <a:lnTo>
-                    <a:pt x="905318" y="11369"/>
-                  </a:lnTo>
-                  <a:lnTo>
-                    <a:pt x="938848" y="11369"/>
-                  </a:lnTo>
-                  <a:lnTo>
-                    <a:pt x="938848" y="22739"/>
-                  </a:lnTo>
-                  <a:lnTo>
-                    <a:pt x="972379" y="22739"/>
-                  </a:lnTo>
-                  <a:lnTo>
-                    <a:pt x="972379" y="34108"/>
-                  </a:lnTo>
-                  <a:lnTo>
-                    <a:pt x="1005909" y="34108"/>
-                  </a:lnTo>
-                  <a:lnTo>
-                    <a:pt x="1005909" y="45478"/>
-                  </a:lnTo>
-                  <a:lnTo>
-                    <a:pt x="1039439" y="45478"/>
-                  </a:lnTo>
-                  <a:lnTo>
-                    <a:pt x="1039439" y="56847"/>
-                  </a:lnTo>
-                  <a:lnTo>
-                    <a:pt x="1106500" y="56847"/>
-                  </a:lnTo>
-                  <a:lnTo>
-                    <a:pt x="1106500" y="79586"/>
-                  </a:lnTo>
-                  <a:lnTo>
-                    <a:pt x="1140030" y="79586"/>
-                  </a:lnTo>
-                  <a:lnTo>
-                    <a:pt x="1140030" y="90956"/>
-                  </a:lnTo>
-                  <a:lnTo>
-                    <a:pt x="1173561" y="90956"/>
-                  </a:lnTo>
-                  <a:lnTo>
-                    <a:pt x="1173561" y="147804"/>
-                  </a:lnTo>
-                  <a:lnTo>
-                    <a:pt x="1207091" y="147804"/>
-                  </a:lnTo>
-                  <a:lnTo>
-                    <a:pt x="1207091" y="170543"/>
-                  </a:lnTo>
-                  <a:lnTo>
-                    <a:pt x="1240621" y="170543"/>
-                  </a:lnTo>
-                  <a:lnTo>
-                    <a:pt x="1240621" y="193282"/>
-                  </a:lnTo>
-                  <a:lnTo>
-                    <a:pt x="1274152" y="193282"/>
-                  </a:lnTo>
-                  <a:lnTo>
-                    <a:pt x="1274152" y="227390"/>
-                  </a:lnTo>
-                  <a:lnTo>
-                    <a:pt x="1307682" y="227390"/>
-                  </a:lnTo>
-                  <a:lnTo>
-                    <a:pt x="1307682" y="238760"/>
-                  </a:lnTo>
-                  <a:lnTo>
-                    <a:pt x="1341212" y="238760"/>
-                  </a:lnTo>
-                  <a:lnTo>
-                    <a:pt x="1341212" y="250130"/>
-                  </a:lnTo>
-                  <a:lnTo>
-                    <a:pt x="1374742" y="250130"/>
-                  </a:lnTo>
-                  <a:lnTo>
-                    <a:pt x="1374742" y="261499"/>
-                  </a:lnTo>
-                  <a:lnTo>
-                    <a:pt x="1441803" y="261499"/>
-                  </a:lnTo>
-                  <a:lnTo>
-                    <a:pt x="1441803" y="272869"/>
-                  </a:lnTo>
-                  <a:lnTo>
-                    <a:pt x="1508864" y="272869"/>
-                  </a:lnTo>
-                  <a:lnTo>
-                    <a:pt x="1508864" y="306977"/>
-                  </a:lnTo>
-                  <a:lnTo>
-                    <a:pt x="1609455" y="306977"/>
-                  </a:lnTo>
-                  <a:lnTo>
-                    <a:pt x="1609455" y="318347"/>
-                  </a:lnTo>
-                  <a:lnTo>
-                    <a:pt x="1642985" y="318347"/>
-                  </a:lnTo>
-                  <a:lnTo>
-                    <a:pt x="1642985" y="341086"/>
-                  </a:lnTo>
-                  <a:lnTo>
-                    <a:pt x="1810637" y="341086"/>
-                  </a:lnTo>
-                  <a:lnTo>
-                    <a:pt x="1810637" y="341086"/>
+                    <a:pt x="863138" y="0"/>
+                  </a:lnTo>
+                  <a:lnTo>
+                    <a:pt x="863138" y="14330"/>
+                  </a:lnTo>
+                  <a:lnTo>
+                    <a:pt x="895106" y="14330"/>
+                  </a:lnTo>
+                  <a:lnTo>
+                    <a:pt x="895106" y="28661"/>
+                  </a:lnTo>
+                  <a:lnTo>
+                    <a:pt x="927074" y="28661"/>
+                  </a:lnTo>
+                  <a:lnTo>
+                    <a:pt x="927074" y="42991"/>
+                  </a:lnTo>
+                  <a:lnTo>
+                    <a:pt x="959042" y="42991"/>
+                  </a:lnTo>
+                  <a:lnTo>
+                    <a:pt x="959042" y="57322"/>
+                  </a:lnTo>
+                  <a:lnTo>
+                    <a:pt x="991010" y="57322"/>
+                  </a:lnTo>
+                  <a:lnTo>
+                    <a:pt x="991010" y="71652"/>
+                  </a:lnTo>
+                  <a:lnTo>
+                    <a:pt x="1054946" y="71652"/>
+                  </a:lnTo>
+                  <a:lnTo>
+                    <a:pt x="1054946" y="100313"/>
+                  </a:lnTo>
+                  <a:lnTo>
+                    <a:pt x="1086914" y="100313"/>
+                  </a:lnTo>
+                  <a:lnTo>
+                    <a:pt x="1086914" y="114644"/>
+                  </a:lnTo>
+                  <a:lnTo>
+                    <a:pt x="1118882" y="114644"/>
+                  </a:lnTo>
+                  <a:lnTo>
+                    <a:pt x="1118882" y="186296"/>
+                  </a:lnTo>
+                  <a:lnTo>
+                    <a:pt x="1150850" y="186296"/>
+                  </a:lnTo>
+                  <a:lnTo>
+                    <a:pt x="1150850" y="214957"/>
+                  </a:lnTo>
+                  <a:lnTo>
+                    <a:pt x="1182818" y="214957"/>
+                  </a:lnTo>
+                  <a:lnTo>
+                    <a:pt x="1182818" y="243618"/>
+                  </a:lnTo>
+                  <a:lnTo>
+                    <a:pt x="1214787" y="243618"/>
+                  </a:lnTo>
+                  <a:lnTo>
+                    <a:pt x="1214787" y="286610"/>
+                  </a:lnTo>
+                  <a:lnTo>
+                    <a:pt x="1246755" y="286610"/>
+                  </a:lnTo>
+                  <a:lnTo>
+                    <a:pt x="1246755" y="300940"/>
+                  </a:lnTo>
+                  <a:lnTo>
+                    <a:pt x="1278723" y="300940"/>
+                  </a:lnTo>
+                  <a:lnTo>
+                    <a:pt x="1278723" y="315271"/>
+                  </a:lnTo>
+                  <a:lnTo>
+                    <a:pt x="1310691" y="315271"/>
+                  </a:lnTo>
+                  <a:lnTo>
+                    <a:pt x="1310691" y="329601"/>
+                  </a:lnTo>
+                  <a:lnTo>
+                    <a:pt x="1374627" y="329601"/>
+                  </a:lnTo>
+                  <a:lnTo>
+                    <a:pt x="1374627" y="343932"/>
+                  </a:lnTo>
+                  <a:lnTo>
+                    <a:pt x="1438563" y="343932"/>
+                  </a:lnTo>
+                  <a:lnTo>
+                    <a:pt x="1438563" y="386923"/>
+                  </a:lnTo>
+                  <a:lnTo>
+                    <a:pt x="1534467" y="386923"/>
+                  </a:lnTo>
+                  <a:lnTo>
+                    <a:pt x="1534467" y="401254"/>
+                  </a:lnTo>
+                  <a:lnTo>
+                    <a:pt x="1566435" y="401254"/>
+                  </a:lnTo>
+                  <a:lnTo>
+                    <a:pt x="1566435" y="429915"/>
+                  </a:lnTo>
+                  <a:lnTo>
+                    <a:pt x="1726276" y="429915"/>
+                  </a:lnTo>
+                  <a:lnTo>
+                    <a:pt x="1726276" y="429915"/>
                   </a:lnTo>
                 </a:path>
               </a:pathLst>
@@ -3266,117 +3250,117 @@
           </p:nvSpPr>
           <p:spPr>
             <a:xfrm>
-              <a:off x="1738169" y="2884643"/>
-              <a:ext cx="1810637" cy="352455"/>
+              <a:off x="1743918" y="3140895"/>
+              <a:ext cx="1726276" cy="444245"/>
             </a:xfrm>
             <a:custGeom>
               <a:avLst/>
               <a:pathLst>
-                <a:path w="1810637" h="352455">
+                <a:path w="1726276" h="444245">
                   <a:moveTo>
                     <a:pt x="0" y="0"/>
                   </a:moveTo>
                   <a:lnTo>
-                    <a:pt x="737666" y="0"/>
-                  </a:lnTo>
-                  <a:lnTo>
-                    <a:pt x="737666" y="11369"/>
-                  </a:lnTo>
-                  <a:lnTo>
-                    <a:pt x="804727" y="11369"/>
-                  </a:lnTo>
-                  <a:lnTo>
-                    <a:pt x="804727" y="22739"/>
-                  </a:lnTo>
-                  <a:lnTo>
-                    <a:pt x="871788" y="22739"/>
-                  </a:lnTo>
-                  <a:lnTo>
-                    <a:pt x="871788" y="34108"/>
-                  </a:lnTo>
-                  <a:lnTo>
-                    <a:pt x="905318" y="34108"/>
-                  </a:lnTo>
-                  <a:lnTo>
-                    <a:pt x="905318" y="56847"/>
-                  </a:lnTo>
-                  <a:lnTo>
-                    <a:pt x="938848" y="56847"/>
-                  </a:lnTo>
-                  <a:lnTo>
-                    <a:pt x="938848" y="68217"/>
-                  </a:lnTo>
-                  <a:lnTo>
-                    <a:pt x="1005909" y="68217"/>
-                  </a:lnTo>
-                  <a:lnTo>
-                    <a:pt x="1005909" y="79586"/>
-                  </a:lnTo>
-                  <a:lnTo>
-                    <a:pt x="1039439" y="79586"/>
-                  </a:lnTo>
-                  <a:lnTo>
-                    <a:pt x="1039439" y="113695"/>
-                  </a:lnTo>
-                  <a:lnTo>
-                    <a:pt x="1072970" y="113695"/>
-                  </a:lnTo>
-                  <a:lnTo>
-                    <a:pt x="1072970" y="125065"/>
-                  </a:lnTo>
-                  <a:lnTo>
-                    <a:pt x="1106500" y="125065"/>
-                  </a:lnTo>
-                  <a:lnTo>
-                    <a:pt x="1106500" y="181912"/>
-                  </a:lnTo>
-                  <a:lnTo>
-                    <a:pt x="1140030" y="181912"/>
-                  </a:lnTo>
-                  <a:lnTo>
-                    <a:pt x="1140030" y="238760"/>
-                  </a:lnTo>
-                  <a:lnTo>
-                    <a:pt x="1173561" y="238760"/>
-                  </a:lnTo>
-                  <a:lnTo>
-                    <a:pt x="1173561" y="272869"/>
-                  </a:lnTo>
-                  <a:lnTo>
-                    <a:pt x="1207091" y="272869"/>
-                  </a:lnTo>
-                  <a:lnTo>
-                    <a:pt x="1207091" y="295608"/>
-                  </a:lnTo>
-                  <a:lnTo>
-                    <a:pt x="1240621" y="295608"/>
-                  </a:lnTo>
-                  <a:lnTo>
-                    <a:pt x="1240621" y="318347"/>
-                  </a:lnTo>
-                  <a:lnTo>
-                    <a:pt x="1274152" y="318347"/>
-                  </a:lnTo>
-                  <a:lnTo>
-                    <a:pt x="1274152" y="329716"/>
-                  </a:lnTo>
-                  <a:lnTo>
-                    <a:pt x="1307682" y="329716"/>
-                  </a:lnTo>
-                  <a:lnTo>
-                    <a:pt x="1307682" y="341086"/>
-                  </a:lnTo>
-                  <a:lnTo>
-                    <a:pt x="1710046" y="341086"/>
-                  </a:lnTo>
-                  <a:lnTo>
-                    <a:pt x="1710046" y="352455"/>
-                  </a:lnTo>
-                  <a:lnTo>
-                    <a:pt x="1810637" y="352455"/>
-                  </a:lnTo>
-                  <a:lnTo>
-                    <a:pt x="1810637" y="352455"/>
+                    <a:pt x="703297" y="0"/>
+                  </a:lnTo>
+                  <a:lnTo>
+                    <a:pt x="703297" y="14330"/>
+                  </a:lnTo>
+                  <a:lnTo>
+                    <a:pt x="767233" y="14330"/>
+                  </a:lnTo>
+                  <a:lnTo>
+                    <a:pt x="767233" y="28661"/>
+                  </a:lnTo>
+                  <a:lnTo>
+                    <a:pt x="831170" y="28661"/>
+                  </a:lnTo>
+                  <a:lnTo>
+                    <a:pt x="831170" y="42991"/>
+                  </a:lnTo>
+                  <a:lnTo>
+                    <a:pt x="863138" y="42991"/>
+                  </a:lnTo>
+                  <a:lnTo>
+                    <a:pt x="863138" y="71652"/>
+                  </a:lnTo>
+                  <a:lnTo>
+                    <a:pt x="895106" y="71652"/>
+                  </a:lnTo>
+                  <a:lnTo>
+                    <a:pt x="895106" y="85983"/>
+                  </a:lnTo>
+                  <a:lnTo>
+                    <a:pt x="959042" y="85983"/>
+                  </a:lnTo>
+                  <a:lnTo>
+                    <a:pt x="959042" y="100313"/>
+                  </a:lnTo>
+                  <a:lnTo>
+                    <a:pt x="991010" y="100313"/>
+                  </a:lnTo>
+                  <a:lnTo>
+                    <a:pt x="991010" y="143305"/>
+                  </a:lnTo>
+                  <a:lnTo>
+                    <a:pt x="1022978" y="143305"/>
+                  </a:lnTo>
+                  <a:lnTo>
+                    <a:pt x="1022978" y="157635"/>
+                  </a:lnTo>
+                  <a:lnTo>
+                    <a:pt x="1054946" y="157635"/>
+                  </a:lnTo>
+                  <a:lnTo>
+                    <a:pt x="1054946" y="229288"/>
+                  </a:lnTo>
+                  <a:lnTo>
+                    <a:pt x="1086914" y="229288"/>
+                  </a:lnTo>
+                  <a:lnTo>
+                    <a:pt x="1086914" y="300940"/>
+                  </a:lnTo>
+                  <a:lnTo>
+                    <a:pt x="1118882" y="300940"/>
+                  </a:lnTo>
+                  <a:lnTo>
+                    <a:pt x="1118882" y="343932"/>
+                  </a:lnTo>
+                  <a:lnTo>
+                    <a:pt x="1150850" y="343932"/>
+                  </a:lnTo>
+                  <a:lnTo>
+                    <a:pt x="1150850" y="372593"/>
+                  </a:lnTo>
+                  <a:lnTo>
+                    <a:pt x="1182818" y="372593"/>
+                  </a:lnTo>
+                  <a:lnTo>
+                    <a:pt x="1182818" y="401254"/>
+                  </a:lnTo>
+                  <a:lnTo>
+                    <a:pt x="1214787" y="401254"/>
+                  </a:lnTo>
+                  <a:lnTo>
+                    <a:pt x="1214787" y="415584"/>
+                  </a:lnTo>
+                  <a:lnTo>
+                    <a:pt x="1246755" y="415584"/>
+                  </a:lnTo>
+                  <a:lnTo>
+                    <a:pt x="1246755" y="429915"/>
+                  </a:lnTo>
+                  <a:lnTo>
+                    <a:pt x="1630372" y="429915"/>
+                  </a:lnTo>
+                  <a:lnTo>
+                    <a:pt x="1630372" y="444245"/>
+                  </a:lnTo>
+                  <a:lnTo>
+                    <a:pt x="1726276" y="444245"/>
+                  </a:lnTo>
+                  <a:lnTo>
+                    <a:pt x="1726276" y="444245"/>
                   </a:lnTo>
                 </a:path>
               </a:pathLst>
@@ -3405,8 +3389,8 @@
           </p:nvSpPr>
           <p:spPr>
             <a:xfrm>
-              <a:off x="3475655" y="3136885"/>
-              <a:ext cx="146301" cy="109470"/>
+              <a:off x="3395717" y="3453980"/>
+              <a:ext cx="148955" cy="129570"/>
             </a:xfrm>
             <a:prstGeom prst="rect">
               <a:avLst/>
@@ -3418,9 +3402,6 @@
             <a:lstStyle/>
             <a:p>
               <a:pPr algn="l" marL="0" marR="0" indent="0">
-                <a:lnSpc>
-                  <a:spcPts val="1374"/>
-                </a:lnSpc>
                 <a:spcBef>
                   <a:spcPts val="0"/>
                 </a:spcBef>
@@ -3429,7 +3410,7 @@
                 </a:spcAft>
               </a:pPr>
               <a:r>
-                <a:rPr sz="1374">
+                <a:rPr sz="1400" i="0" b="0">
                   <a:solidFill>
                     <a:srgbClr val="B79F00">
                       <a:alpha val="100000"/>
@@ -3451,8 +3432,8 @@
           </p:nvSpPr>
           <p:spPr>
             <a:xfrm>
-              <a:off x="3475655" y="3170994"/>
-              <a:ext cx="146301" cy="109470"/>
+              <a:off x="3395717" y="3496972"/>
+              <a:ext cx="148955" cy="129570"/>
             </a:xfrm>
             <a:prstGeom prst="rect">
               <a:avLst/>
@@ -3464,9 +3445,6 @@
             <a:lstStyle/>
             <a:p>
               <a:pPr algn="l" marL="0" marR="0" indent="0">
-                <a:lnSpc>
-                  <a:spcPts val="1374"/>
-                </a:lnSpc>
                 <a:spcBef>
                   <a:spcPts val="0"/>
                 </a:spcBef>
@@ -3475,7 +3453,7 @@
                 </a:spcAft>
               </a:pPr>
               <a:r>
-                <a:rPr sz="1374">
+                <a:rPr sz="1400" i="0" b="0">
                   <a:solidFill>
                     <a:srgbClr val="00BA38">
                       <a:alpha val="100000"/>
@@ -3497,8 +3475,8 @@
           </p:nvSpPr>
           <p:spPr>
             <a:xfrm>
-              <a:off x="3475655" y="3182364"/>
-              <a:ext cx="146301" cy="109470"/>
+              <a:off x="3395717" y="3511302"/>
+              <a:ext cx="148955" cy="129570"/>
             </a:xfrm>
             <a:prstGeom prst="rect">
               <a:avLst/>
@@ -3510,9 +3488,6 @@
             <a:lstStyle/>
             <a:p>
               <a:pPr algn="l" marL="0" marR="0" indent="0">
-                <a:lnSpc>
-                  <a:spcPts val="1374"/>
-                </a:lnSpc>
                 <a:spcBef>
                   <a:spcPts val="0"/>
                 </a:spcBef>
@@ -3521,7 +3496,7 @@
                 </a:spcAft>
               </a:pPr>
               <a:r>
-                <a:rPr sz="1374">
+                <a:rPr sz="1400" i="0" b="0">
                   <a:solidFill>
                     <a:srgbClr val="00BFC4">
                       <a:alpha val="100000"/>
@@ -3543,12 +3518,13 @@
           </p:nvSpPr>
           <p:spPr>
             <a:xfrm>
-              <a:off x="1738169" y="2850534"/>
-              <a:ext cx="1844167" cy="1171063"/>
+              <a:off x="1743918" y="3126564"/>
+              <a:ext cx="1758244" cy="1447380"/>
             </a:xfrm>
             <a:prstGeom prst="rect">
               <a:avLst/>
             </a:prstGeom>
+            <a:noFill/>
           </p:spPr>
           <p:txBody>
             <a:bodyPr/>
@@ -3564,17 +3540,13 @@
           </p:nvSpPr>
           <p:spPr>
             <a:xfrm>
-              <a:off x="3670904" y="1315914"/>
-              <a:ext cx="1844167" cy="1171063"/>
+              <a:off x="3590730" y="1315770"/>
+              <a:ext cx="1758244" cy="1447380"/>
             </a:xfrm>
             <a:prstGeom prst="rect">
               <a:avLst/>
             </a:prstGeom>
-            <a:solidFill>
-              <a:srgbClr val="FFFFFF">
-                <a:alpha val="100000"/>
-              </a:srgbClr>
-            </a:solidFill>
+            <a:noFill/>
           </p:spPr>
           <p:txBody>
             <a:bodyPr/>
@@ -3590,13 +3562,13 @@
           </p:nvSpPr>
           <p:spPr>
             <a:xfrm>
-              <a:off x="3670904" y="1350023"/>
-              <a:ext cx="1810637" cy="420673"/>
+              <a:off x="3590730" y="1330101"/>
+              <a:ext cx="1726276" cy="530228"/>
             </a:xfrm>
             <a:custGeom>
               <a:avLst/>
               <a:pathLst>
-                <a:path w="1810637" h="420673">
+                <a:path w="1726276" h="530228">
                   <a:moveTo>
                     <a:pt x="0" y="0"/>
                   </a:moveTo>
@@ -3604,127 +3576,127 @@
                     <a:pt x="0" y="0"/>
                   </a:lnTo>
                   <a:lnTo>
-                    <a:pt x="0" y="11369"/>
-                  </a:lnTo>
-                  <a:lnTo>
-                    <a:pt x="637076" y="11369"/>
-                  </a:lnTo>
-                  <a:lnTo>
-                    <a:pt x="637076" y="22739"/>
-                  </a:lnTo>
-                  <a:lnTo>
-                    <a:pt x="704136" y="22739"/>
-                  </a:lnTo>
-                  <a:lnTo>
-                    <a:pt x="704136" y="34108"/>
-                  </a:lnTo>
-                  <a:lnTo>
-                    <a:pt x="737666" y="34108"/>
-                  </a:lnTo>
-                  <a:lnTo>
-                    <a:pt x="737666" y="45478"/>
-                  </a:lnTo>
-                  <a:lnTo>
-                    <a:pt x="804727" y="45478"/>
-                  </a:lnTo>
-                  <a:lnTo>
-                    <a:pt x="804727" y="56847"/>
-                  </a:lnTo>
-                  <a:lnTo>
-                    <a:pt x="905318" y="56847"/>
-                  </a:lnTo>
-                  <a:lnTo>
-                    <a:pt x="905318" y="79586"/>
-                  </a:lnTo>
-                  <a:lnTo>
-                    <a:pt x="972379" y="79586"/>
-                  </a:lnTo>
-                  <a:lnTo>
-                    <a:pt x="972379" y="90956"/>
-                  </a:lnTo>
-                  <a:lnTo>
-                    <a:pt x="1005909" y="90956"/>
-                  </a:lnTo>
-                  <a:lnTo>
-                    <a:pt x="1005909" y="147804"/>
-                  </a:lnTo>
-                  <a:lnTo>
-                    <a:pt x="1039439" y="147804"/>
-                  </a:lnTo>
-                  <a:lnTo>
-                    <a:pt x="1039439" y="159173"/>
-                  </a:lnTo>
-                  <a:lnTo>
-                    <a:pt x="1106500" y="159173"/>
-                  </a:lnTo>
-                  <a:lnTo>
-                    <a:pt x="1106500" y="204651"/>
-                  </a:lnTo>
-                  <a:lnTo>
-                    <a:pt x="1140030" y="204651"/>
-                  </a:lnTo>
-                  <a:lnTo>
-                    <a:pt x="1140030" y="238760"/>
-                  </a:lnTo>
-                  <a:lnTo>
-                    <a:pt x="1173561" y="238760"/>
-                  </a:lnTo>
-                  <a:lnTo>
-                    <a:pt x="1173561" y="272869"/>
-                  </a:lnTo>
-                  <a:lnTo>
-                    <a:pt x="1207091" y="272869"/>
-                  </a:lnTo>
-                  <a:lnTo>
-                    <a:pt x="1207091" y="295608"/>
-                  </a:lnTo>
-                  <a:lnTo>
-                    <a:pt x="1240621" y="295608"/>
-                  </a:lnTo>
-                  <a:lnTo>
-                    <a:pt x="1240621" y="318347"/>
-                  </a:lnTo>
-                  <a:lnTo>
-                    <a:pt x="1274152" y="318347"/>
-                  </a:lnTo>
-                  <a:lnTo>
-                    <a:pt x="1274152" y="329716"/>
-                  </a:lnTo>
-                  <a:lnTo>
-                    <a:pt x="1341212" y="329716"/>
-                  </a:lnTo>
-                  <a:lnTo>
-                    <a:pt x="1341212" y="352455"/>
-                  </a:lnTo>
-                  <a:lnTo>
-                    <a:pt x="1374742" y="352455"/>
-                  </a:lnTo>
-                  <a:lnTo>
-                    <a:pt x="1374742" y="375195"/>
-                  </a:lnTo>
-                  <a:lnTo>
-                    <a:pt x="1408273" y="375195"/>
-                  </a:lnTo>
-                  <a:lnTo>
-                    <a:pt x="1408273" y="386564"/>
-                  </a:lnTo>
-                  <a:lnTo>
-                    <a:pt x="1441803" y="386564"/>
-                  </a:lnTo>
-                  <a:lnTo>
-                    <a:pt x="1441803" y="409303"/>
-                  </a:lnTo>
-                  <a:lnTo>
-                    <a:pt x="1642985" y="409303"/>
-                  </a:lnTo>
-                  <a:lnTo>
-                    <a:pt x="1642985" y="420673"/>
-                  </a:lnTo>
-                  <a:lnTo>
-                    <a:pt x="1810637" y="420673"/>
-                  </a:lnTo>
-                  <a:lnTo>
-                    <a:pt x="1810637" y="420673"/>
+                    <a:pt x="0" y="14330"/>
+                  </a:lnTo>
+                  <a:lnTo>
+                    <a:pt x="607393" y="14330"/>
+                  </a:lnTo>
+                  <a:lnTo>
+                    <a:pt x="607393" y="28661"/>
+                  </a:lnTo>
+                  <a:lnTo>
+                    <a:pt x="671329" y="28661"/>
+                  </a:lnTo>
+                  <a:lnTo>
+                    <a:pt x="671329" y="42991"/>
+                  </a:lnTo>
+                  <a:lnTo>
+                    <a:pt x="703297" y="42991"/>
+                  </a:lnTo>
+                  <a:lnTo>
+                    <a:pt x="703297" y="57322"/>
+                  </a:lnTo>
+                  <a:lnTo>
+                    <a:pt x="767233" y="57322"/>
+                  </a:lnTo>
+                  <a:lnTo>
+                    <a:pt x="767233" y="71652"/>
+                  </a:lnTo>
+                  <a:lnTo>
+                    <a:pt x="863138" y="71652"/>
+                  </a:lnTo>
+                  <a:lnTo>
+                    <a:pt x="863138" y="100313"/>
+                  </a:lnTo>
+                  <a:lnTo>
+                    <a:pt x="927074" y="100313"/>
+                  </a:lnTo>
+                  <a:lnTo>
+                    <a:pt x="927074" y="114644"/>
+                  </a:lnTo>
+                  <a:lnTo>
+                    <a:pt x="959042" y="114644"/>
+                  </a:lnTo>
+                  <a:lnTo>
+                    <a:pt x="959042" y="186296"/>
+                  </a:lnTo>
+                  <a:lnTo>
+                    <a:pt x="991010" y="186296"/>
+                  </a:lnTo>
+                  <a:lnTo>
+                    <a:pt x="991010" y="200627"/>
+                  </a:lnTo>
+                  <a:lnTo>
+                    <a:pt x="1054946" y="200627"/>
+                  </a:lnTo>
+                  <a:lnTo>
+                    <a:pt x="1054946" y="257949"/>
+                  </a:lnTo>
+                  <a:lnTo>
+                    <a:pt x="1086914" y="257949"/>
+                  </a:lnTo>
+                  <a:lnTo>
+                    <a:pt x="1086914" y="300940"/>
+                  </a:lnTo>
+                  <a:lnTo>
+                    <a:pt x="1118882" y="300940"/>
+                  </a:lnTo>
+                  <a:lnTo>
+                    <a:pt x="1118882" y="343932"/>
+                  </a:lnTo>
+                  <a:lnTo>
+                    <a:pt x="1150850" y="343932"/>
+                  </a:lnTo>
+                  <a:lnTo>
+                    <a:pt x="1150850" y="372593"/>
+                  </a:lnTo>
+                  <a:lnTo>
+                    <a:pt x="1182818" y="372593"/>
+                  </a:lnTo>
+                  <a:lnTo>
+                    <a:pt x="1182818" y="401254"/>
+                  </a:lnTo>
+                  <a:lnTo>
+                    <a:pt x="1214787" y="401254"/>
+                  </a:lnTo>
+                  <a:lnTo>
+                    <a:pt x="1214787" y="415584"/>
+                  </a:lnTo>
+                  <a:lnTo>
+                    <a:pt x="1278723" y="415584"/>
+                  </a:lnTo>
+                  <a:lnTo>
+                    <a:pt x="1278723" y="444245"/>
+                  </a:lnTo>
+                  <a:lnTo>
+                    <a:pt x="1310691" y="444245"/>
+                  </a:lnTo>
+                  <a:lnTo>
+                    <a:pt x="1310691" y="472906"/>
+                  </a:lnTo>
+                  <a:lnTo>
+                    <a:pt x="1342659" y="472906"/>
+                  </a:lnTo>
+                  <a:lnTo>
+                    <a:pt x="1342659" y="487237"/>
+                  </a:lnTo>
+                  <a:lnTo>
+                    <a:pt x="1374627" y="487237"/>
+                  </a:lnTo>
+                  <a:lnTo>
+                    <a:pt x="1374627" y="515898"/>
+                  </a:lnTo>
+                  <a:lnTo>
+                    <a:pt x="1566435" y="515898"/>
+                  </a:lnTo>
+                  <a:lnTo>
+                    <a:pt x="1566435" y="530228"/>
+                  </a:lnTo>
+                  <a:lnTo>
+                    <a:pt x="1726276" y="530228"/>
+                  </a:lnTo>
+                  <a:lnTo>
+                    <a:pt x="1726276" y="530228"/>
                   </a:lnTo>
                 </a:path>
               </a:pathLst>
@@ -3753,129 +3725,129 @@
           </p:nvSpPr>
           <p:spPr>
             <a:xfrm>
-              <a:off x="3670904" y="1350023"/>
-              <a:ext cx="1810637" cy="409303"/>
+              <a:off x="3590730" y="1330101"/>
+              <a:ext cx="1726276" cy="515898"/>
             </a:xfrm>
             <a:custGeom>
               <a:avLst/>
               <a:pathLst>
-                <a:path w="1810637" h="409303">
+                <a:path w="1726276" h="515898">
                   <a:moveTo>
                     <a:pt x="0" y="0"/>
                   </a:moveTo>
                   <a:lnTo>
-                    <a:pt x="670606" y="0"/>
-                  </a:lnTo>
-                  <a:lnTo>
-                    <a:pt x="670606" y="22739"/>
-                  </a:lnTo>
-                  <a:lnTo>
-                    <a:pt x="804727" y="22739"/>
-                  </a:lnTo>
-                  <a:lnTo>
-                    <a:pt x="804727" y="34108"/>
-                  </a:lnTo>
-                  <a:lnTo>
-                    <a:pt x="838257" y="34108"/>
-                  </a:lnTo>
-                  <a:lnTo>
-                    <a:pt x="838257" y="45478"/>
-                  </a:lnTo>
-                  <a:lnTo>
-                    <a:pt x="871788" y="45478"/>
-                  </a:lnTo>
-                  <a:lnTo>
-                    <a:pt x="871788" y="90956"/>
-                  </a:lnTo>
-                  <a:lnTo>
-                    <a:pt x="905318" y="90956"/>
-                  </a:lnTo>
-                  <a:lnTo>
-                    <a:pt x="905318" y="136434"/>
-                  </a:lnTo>
-                  <a:lnTo>
-                    <a:pt x="938848" y="136434"/>
-                  </a:lnTo>
-                  <a:lnTo>
-                    <a:pt x="938848" y="159173"/>
-                  </a:lnTo>
-                  <a:lnTo>
-                    <a:pt x="972379" y="159173"/>
-                  </a:lnTo>
-                  <a:lnTo>
-                    <a:pt x="972379" y="204651"/>
-                  </a:lnTo>
-                  <a:lnTo>
-                    <a:pt x="1005909" y="204651"/>
-                  </a:lnTo>
-                  <a:lnTo>
-                    <a:pt x="1005909" y="250130"/>
-                  </a:lnTo>
-                  <a:lnTo>
-                    <a:pt x="1039439" y="250130"/>
-                  </a:lnTo>
-                  <a:lnTo>
-                    <a:pt x="1039439" y="284238"/>
-                  </a:lnTo>
-                  <a:lnTo>
-                    <a:pt x="1072970" y="284238"/>
-                  </a:lnTo>
-                  <a:lnTo>
-                    <a:pt x="1072970" y="295608"/>
-                  </a:lnTo>
-                  <a:lnTo>
-                    <a:pt x="1106500" y="295608"/>
-                  </a:lnTo>
-                  <a:lnTo>
-                    <a:pt x="1106500" y="318347"/>
-                  </a:lnTo>
-                  <a:lnTo>
-                    <a:pt x="1140030" y="318347"/>
-                  </a:lnTo>
-                  <a:lnTo>
-                    <a:pt x="1140030" y="329716"/>
-                  </a:lnTo>
-                  <a:lnTo>
-                    <a:pt x="1173561" y="329716"/>
-                  </a:lnTo>
-                  <a:lnTo>
-                    <a:pt x="1173561" y="352455"/>
-                  </a:lnTo>
-                  <a:lnTo>
-                    <a:pt x="1207091" y="352455"/>
-                  </a:lnTo>
-                  <a:lnTo>
-                    <a:pt x="1207091" y="363825"/>
-                  </a:lnTo>
-                  <a:lnTo>
-                    <a:pt x="1240621" y="363825"/>
-                  </a:lnTo>
-                  <a:lnTo>
-                    <a:pt x="1240621" y="375195"/>
-                  </a:lnTo>
-                  <a:lnTo>
-                    <a:pt x="1274152" y="375195"/>
-                  </a:lnTo>
-                  <a:lnTo>
-                    <a:pt x="1274152" y="386564"/>
-                  </a:lnTo>
-                  <a:lnTo>
-                    <a:pt x="1341212" y="386564"/>
-                  </a:lnTo>
-                  <a:lnTo>
-                    <a:pt x="1341212" y="397934"/>
-                  </a:lnTo>
-                  <a:lnTo>
-                    <a:pt x="1441803" y="397934"/>
-                  </a:lnTo>
-                  <a:lnTo>
-                    <a:pt x="1441803" y="409303"/>
-                  </a:lnTo>
-                  <a:lnTo>
-                    <a:pt x="1810637" y="409303"/>
-                  </a:lnTo>
-                  <a:lnTo>
-                    <a:pt x="1810637" y="409303"/>
+                    <a:pt x="639361" y="0"/>
+                  </a:lnTo>
+                  <a:lnTo>
+                    <a:pt x="639361" y="28661"/>
+                  </a:lnTo>
+                  <a:lnTo>
+                    <a:pt x="767233" y="28661"/>
+                  </a:lnTo>
+                  <a:lnTo>
+                    <a:pt x="767233" y="42991"/>
+                  </a:lnTo>
+                  <a:lnTo>
+                    <a:pt x="799201" y="42991"/>
+                  </a:lnTo>
+                  <a:lnTo>
+                    <a:pt x="799201" y="57322"/>
+                  </a:lnTo>
+                  <a:lnTo>
+                    <a:pt x="831170" y="57322"/>
+                  </a:lnTo>
+                  <a:lnTo>
+                    <a:pt x="831170" y="114644"/>
+                  </a:lnTo>
+                  <a:lnTo>
+                    <a:pt x="863138" y="114644"/>
+                  </a:lnTo>
+                  <a:lnTo>
+                    <a:pt x="863138" y="171966"/>
+                  </a:lnTo>
+                  <a:lnTo>
+                    <a:pt x="895106" y="171966"/>
+                  </a:lnTo>
+                  <a:lnTo>
+                    <a:pt x="895106" y="200627"/>
+                  </a:lnTo>
+                  <a:lnTo>
+                    <a:pt x="927074" y="200627"/>
+                  </a:lnTo>
+                  <a:lnTo>
+                    <a:pt x="927074" y="257949"/>
+                  </a:lnTo>
+                  <a:lnTo>
+                    <a:pt x="959042" y="257949"/>
+                  </a:lnTo>
+                  <a:lnTo>
+                    <a:pt x="959042" y="315271"/>
+                  </a:lnTo>
+                  <a:lnTo>
+                    <a:pt x="991010" y="315271"/>
+                  </a:lnTo>
+                  <a:lnTo>
+                    <a:pt x="991010" y="358262"/>
+                  </a:lnTo>
+                  <a:lnTo>
+                    <a:pt x="1022978" y="358262"/>
+                  </a:lnTo>
+                  <a:lnTo>
+                    <a:pt x="1022978" y="372593"/>
+                  </a:lnTo>
+                  <a:lnTo>
+                    <a:pt x="1054946" y="372593"/>
+                  </a:lnTo>
+                  <a:lnTo>
+                    <a:pt x="1054946" y="401254"/>
+                  </a:lnTo>
+                  <a:lnTo>
+                    <a:pt x="1086914" y="401254"/>
+                  </a:lnTo>
+                  <a:lnTo>
+                    <a:pt x="1086914" y="415584"/>
+                  </a:lnTo>
+                  <a:lnTo>
+                    <a:pt x="1118882" y="415584"/>
+                  </a:lnTo>
+                  <a:lnTo>
+                    <a:pt x="1118882" y="444245"/>
+                  </a:lnTo>
+                  <a:lnTo>
+                    <a:pt x="1150850" y="444245"/>
+                  </a:lnTo>
+                  <a:lnTo>
+                    <a:pt x="1150850" y="458576"/>
+                  </a:lnTo>
+                  <a:lnTo>
+                    <a:pt x="1182818" y="458576"/>
+                  </a:lnTo>
+                  <a:lnTo>
+                    <a:pt x="1182818" y="472906"/>
+                  </a:lnTo>
+                  <a:lnTo>
+                    <a:pt x="1214787" y="472906"/>
+                  </a:lnTo>
+                  <a:lnTo>
+                    <a:pt x="1214787" y="487237"/>
+                  </a:lnTo>
+                  <a:lnTo>
+                    <a:pt x="1278723" y="487237"/>
+                  </a:lnTo>
+                  <a:lnTo>
+                    <a:pt x="1278723" y="501567"/>
+                  </a:lnTo>
+                  <a:lnTo>
+                    <a:pt x="1374627" y="501567"/>
+                  </a:lnTo>
+                  <a:lnTo>
+                    <a:pt x="1374627" y="515898"/>
+                  </a:lnTo>
+                  <a:lnTo>
+                    <a:pt x="1726276" y="515898"/>
+                  </a:lnTo>
+                  <a:lnTo>
+                    <a:pt x="1726276" y="515898"/>
                   </a:lnTo>
                 </a:path>
               </a:pathLst>
@@ -3904,123 +3876,123 @@
           </p:nvSpPr>
           <p:spPr>
             <a:xfrm>
-              <a:off x="3670904" y="1350023"/>
-              <a:ext cx="1810637" cy="397934"/>
+              <a:off x="3590730" y="1330101"/>
+              <a:ext cx="1726276" cy="501567"/>
             </a:xfrm>
             <a:custGeom>
               <a:avLst/>
               <a:pathLst>
-                <a:path w="1810637" h="397934">
+                <a:path w="1726276" h="501567">
                   <a:moveTo>
                     <a:pt x="0" y="0"/>
                   </a:moveTo>
                   <a:lnTo>
-                    <a:pt x="134121" y="0"/>
-                  </a:lnTo>
-                  <a:lnTo>
-                    <a:pt x="134121" y="11369"/>
-                  </a:lnTo>
-                  <a:lnTo>
-                    <a:pt x="234712" y="11369"/>
-                  </a:lnTo>
-                  <a:lnTo>
-                    <a:pt x="234712" y="22739"/>
-                  </a:lnTo>
-                  <a:lnTo>
-                    <a:pt x="737666" y="22739"/>
-                  </a:lnTo>
-                  <a:lnTo>
-                    <a:pt x="737666" y="34108"/>
-                  </a:lnTo>
-                  <a:lnTo>
-                    <a:pt x="838257" y="34108"/>
-                  </a:lnTo>
-                  <a:lnTo>
-                    <a:pt x="838257" y="45478"/>
-                  </a:lnTo>
-                  <a:lnTo>
-                    <a:pt x="905318" y="45478"/>
-                  </a:lnTo>
-                  <a:lnTo>
-                    <a:pt x="905318" y="68217"/>
-                  </a:lnTo>
-                  <a:lnTo>
-                    <a:pt x="938848" y="68217"/>
-                  </a:lnTo>
-                  <a:lnTo>
-                    <a:pt x="938848" y="90956"/>
-                  </a:lnTo>
-                  <a:lnTo>
-                    <a:pt x="972379" y="90956"/>
-                  </a:lnTo>
-                  <a:lnTo>
-                    <a:pt x="972379" y="125065"/>
-                  </a:lnTo>
-                  <a:lnTo>
-                    <a:pt x="1005909" y="125065"/>
-                  </a:lnTo>
-                  <a:lnTo>
-                    <a:pt x="1005909" y="193282"/>
-                  </a:lnTo>
-                  <a:lnTo>
-                    <a:pt x="1039439" y="193282"/>
-                  </a:lnTo>
-                  <a:lnTo>
-                    <a:pt x="1039439" y="216021"/>
-                  </a:lnTo>
-                  <a:lnTo>
-                    <a:pt x="1072970" y="216021"/>
-                  </a:lnTo>
-                  <a:lnTo>
-                    <a:pt x="1072970" y="238760"/>
-                  </a:lnTo>
-                  <a:lnTo>
-                    <a:pt x="1106500" y="238760"/>
-                  </a:lnTo>
-                  <a:lnTo>
-                    <a:pt x="1106500" y="272869"/>
-                  </a:lnTo>
-                  <a:lnTo>
-                    <a:pt x="1140030" y="272869"/>
-                  </a:lnTo>
-                  <a:lnTo>
-                    <a:pt x="1140030" y="295608"/>
-                  </a:lnTo>
-                  <a:lnTo>
-                    <a:pt x="1173561" y="295608"/>
-                  </a:lnTo>
-                  <a:lnTo>
-                    <a:pt x="1173561" y="329716"/>
-                  </a:lnTo>
-                  <a:lnTo>
-                    <a:pt x="1207091" y="329716"/>
-                  </a:lnTo>
-                  <a:lnTo>
-                    <a:pt x="1207091" y="341086"/>
-                  </a:lnTo>
-                  <a:lnTo>
-                    <a:pt x="1240621" y="341086"/>
-                  </a:lnTo>
-                  <a:lnTo>
-                    <a:pt x="1240621" y="375195"/>
-                  </a:lnTo>
-                  <a:lnTo>
-                    <a:pt x="1274152" y="375195"/>
-                  </a:lnTo>
-                  <a:lnTo>
-                    <a:pt x="1274152" y="386564"/>
-                  </a:lnTo>
-                  <a:lnTo>
-                    <a:pt x="1609455" y="386564"/>
-                  </a:lnTo>
-                  <a:lnTo>
-                    <a:pt x="1609455" y="397934"/>
-                  </a:lnTo>
-                  <a:lnTo>
-                    <a:pt x="1810637" y="397934"/>
-                  </a:lnTo>
-                  <a:lnTo>
-                    <a:pt x="1810637" y="397934"/>
+                    <a:pt x="127872" y="0"/>
+                  </a:lnTo>
+                  <a:lnTo>
+                    <a:pt x="127872" y="14330"/>
+                  </a:lnTo>
+                  <a:lnTo>
+                    <a:pt x="223776" y="14330"/>
+                  </a:lnTo>
+                  <a:lnTo>
+                    <a:pt x="223776" y="28661"/>
+                  </a:lnTo>
+                  <a:lnTo>
+                    <a:pt x="703297" y="28661"/>
+                  </a:lnTo>
+                  <a:lnTo>
+                    <a:pt x="703297" y="42991"/>
+                  </a:lnTo>
+                  <a:lnTo>
+                    <a:pt x="799201" y="42991"/>
+                  </a:lnTo>
+                  <a:lnTo>
+                    <a:pt x="799201" y="57322"/>
+                  </a:lnTo>
+                  <a:lnTo>
+                    <a:pt x="863138" y="57322"/>
+                  </a:lnTo>
+                  <a:lnTo>
+                    <a:pt x="863138" y="85983"/>
+                  </a:lnTo>
+                  <a:lnTo>
+                    <a:pt x="895106" y="85983"/>
+                  </a:lnTo>
+                  <a:lnTo>
+                    <a:pt x="895106" y="114644"/>
+                  </a:lnTo>
+                  <a:lnTo>
+                    <a:pt x="927074" y="114644"/>
+                  </a:lnTo>
+                  <a:lnTo>
+                    <a:pt x="927074" y="157635"/>
+                  </a:lnTo>
+                  <a:lnTo>
+                    <a:pt x="959042" y="157635"/>
+                  </a:lnTo>
+                  <a:lnTo>
+                    <a:pt x="959042" y="243618"/>
+                  </a:lnTo>
+                  <a:lnTo>
+                    <a:pt x="991010" y="243618"/>
+                  </a:lnTo>
+                  <a:lnTo>
+                    <a:pt x="991010" y="272279"/>
+                  </a:lnTo>
+                  <a:lnTo>
+                    <a:pt x="1022978" y="272279"/>
+                  </a:lnTo>
+                  <a:lnTo>
+                    <a:pt x="1022978" y="300940"/>
+                  </a:lnTo>
+                  <a:lnTo>
+                    <a:pt x="1054946" y="300940"/>
+                  </a:lnTo>
+                  <a:lnTo>
+                    <a:pt x="1054946" y="343932"/>
+                  </a:lnTo>
+                  <a:lnTo>
+                    <a:pt x="1086914" y="343932"/>
+                  </a:lnTo>
+                  <a:lnTo>
+                    <a:pt x="1086914" y="372593"/>
+                  </a:lnTo>
+                  <a:lnTo>
+                    <a:pt x="1118882" y="372593"/>
+                  </a:lnTo>
+                  <a:lnTo>
+                    <a:pt x="1118882" y="415584"/>
+                  </a:lnTo>
+                  <a:lnTo>
+                    <a:pt x="1150850" y="415584"/>
+                  </a:lnTo>
+                  <a:lnTo>
+                    <a:pt x="1150850" y="429915"/>
+                  </a:lnTo>
+                  <a:lnTo>
+                    <a:pt x="1182818" y="429915"/>
+                  </a:lnTo>
+                  <a:lnTo>
+                    <a:pt x="1182818" y="472906"/>
+                  </a:lnTo>
+                  <a:lnTo>
+                    <a:pt x="1214787" y="472906"/>
+                  </a:lnTo>
+                  <a:lnTo>
+                    <a:pt x="1214787" y="487237"/>
+                  </a:lnTo>
+                  <a:lnTo>
+                    <a:pt x="1534467" y="487237"/>
+                  </a:lnTo>
+                  <a:lnTo>
+                    <a:pt x="1534467" y="501567"/>
+                  </a:lnTo>
+                  <a:lnTo>
+                    <a:pt x="1726276" y="501567"/>
+                  </a:lnTo>
+                  <a:lnTo>
+                    <a:pt x="1726276" y="501567"/>
                   </a:lnTo>
                 </a:path>
               </a:pathLst>
@@ -4049,8 +4021,8 @@
           </p:nvSpPr>
           <p:spPr>
             <a:xfrm>
-              <a:off x="5408390" y="1715961"/>
-              <a:ext cx="146301" cy="109470"/>
+              <a:off x="5242529" y="1786492"/>
+              <a:ext cx="148955" cy="129570"/>
             </a:xfrm>
             <a:prstGeom prst="rect">
               <a:avLst/>
@@ -4062,9 +4034,6 @@
             <a:lstStyle/>
             <a:p>
               <a:pPr algn="l" marL="0" marR="0" indent="0">
-                <a:lnSpc>
-                  <a:spcPts val="1374"/>
-                </a:lnSpc>
                 <a:spcBef>
                   <a:spcPts val="0"/>
                 </a:spcBef>
@@ -4073,7 +4042,7 @@
                 </a:spcAft>
               </a:pPr>
               <a:r>
-                <a:rPr sz="1374">
+                <a:rPr sz="1400" i="0" b="0">
                   <a:solidFill>
                     <a:srgbClr val="F8766D">
                       <a:alpha val="100000"/>
@@ -4095,8 +4064,8 @@
           </p:nvSpPr>
           <p:spPr>
             <a:xfrm>
-              <a:off x="5408390" y="1704591"/>
-              <a:ext cx="146301" cy="109470"/>
+              <a:off x="5242529" y="1772161"/>
+              <a:ext cx="148955" cy="129570"/>
             </a:xfrm>
             <a:prstGeom prst="rect">
               <a:avLst/>
@@ -4108,9 +4077,6 @@
             <a:lstStyle/>
             <a:p>
               <a:pPr algn="l" marL="0" marR="0" indent="0">
-                <a:lnSpc>
-                  <a:spcPts val="1374"/>
-                </a:lnSpc>
                 <a:spcBef>
                   <a:spcPts val="0"/>
                 </a:spcBef>
@@ -4119,7 +4085,7 @@
                 </a:spcAft>
               </a:pPr>
               <a:r>
-                <a:rPr sz="1374">
+                <a:rPr sz="1400" i="0" b="0">
                   <a:solidFill>
                     <a:srgbClr val="DE8C00">
                       <a:alpha val="100000"/>
@@ -4141,8 +4107,8 @@
           </p:nvSpPr>
           <p:spPr>
             <a:xfrm>
-              <a:off x="5408390" y="1693222"/>
-              <a:ext cx="146301" cy="109470"/>
+              <a:off x="5242529" y="1757831"/>
+              <a:ext cx="148955" cy="129570"/>
             </a:xfrm>
             <a:prstGeom prst="rect">
               <a:avLst/>
@@ -4154,9 +4120,6 @@
             <a:lstStyle/>
             <a:p>
               <a:pPr algn="l" marL="0" marR="0" indent="0">
-                <a:lnSpc>
-                  <a:spcPts val="1374"/>
-                </a:lnSpc>
                 <a:spcBef>
                   <a:spcPts val="0"/>
                 </a:spcBef>
@@ -4165,7 +4128,7 @@
                 </a:spcAft>
               </a:pPr>
               <a:r>
-                <a:rPr sz="1374">
+                <a:rPr sz="1400" i="0" b="0">
                   <a:solidFill>
                     <a:srgbClr val="C77CFF">
                       <a:alpha val="100000"/>
@@ -4187,12 +4150,13 @@
           </p:nvSpPr>
           <p:spPr>
             <a:xfrm>
-              <a:off x="3670904" y="1315914"/>
-              <a:ext cx="1844167" cy="1171063"/>
+              <a:off x="3590730" y="1315770"/>
+              <a:ext cx="1758244" cy="1447380"/>
             </a:xfrm>
             <a:prstGeom prst="rect">
               <a:avLst/>
             </a:prstGeom>
+            <a:noFill/>
           </p:spPr>
           <p:txBody>
             <a:bodyPr/>
@@ -4208,17 +4172,13 @@
           </p:nvSpPr>
           <p:spPr>
             <a:xfrm>
-              <a:off x="3670904" y="2850534"/>
-              <a:ext cx="1844167" cy="1171063"/>
+              <a:off x="3590730" y="3126564"/>
+              <a:ext cx="1758244" cy="1447380"/>
             </a:xfrm>
             <a:prstGeom prst="rect">
               <a:avLst/>
             </a:prstGeom>
-            <a:solidFill>
-              <a:srgbClr val="FFFFFF">
-                <a:alpha val="100000"/>
-              </a:srgbClr>
-            </a:solidFill>
+            <a:noFill/>
           </p:spPr>
           <p:txBody>
             <a:bodyPr/>
@@ -4234,111 +4194,111 @@
           </p:nvSpPr>
           <p:spPr>
             <a:xfrm>
-              <a:off x="3670904" y="2884643"/>
-              <a:ext cx="1810637" cy="397934"/>
+              <a:off x="3590730" y="3140895"/>
+              <a:ext cx="1726276" cy="501567"/>
             </a:xfrm>
             <a:custGeom>
               <a:avLst/>
               <a:pathLst>
-                <a:path w="1810637" h="397934">
+                <a:path w="1726276" h="501567">
                   <a:moveTo>
                     <a:pt x="0" y="0"/>
                   </a:moveTo>
                   <a:lnTo>
-                    <a:pt x="905318" y="0"/>
-                  </a:lnTo>
-                  <a:lnTo>
-                    <a:pt x="905318" y="11369"/>
-                  </a:lnTo>
-                  <a:lnTo>
-                    <a:pt x="972379" y="11369"/>
-                  </a:lnTo>
-                  <a:lnTo>
-                    <a:pt x="972379" y="34108"/>
-                  </a:lnTo>
-                  <a:lnTo>
-                    <a:pt x="1005909" y="34108"/>
-                  </a:lnTo>
-                  <a:lnTo>
-                    <a:pt x="1005909" y="90956"/>
-                  </a:lnTo>
-                  <a:lnTo>
-                    <a:pt x="1039439" y="90956"/>
-                  </a:lnTo>
-                  <a:lnTo>
-                    <a:pt x="1039439" y="147804"/>
-                  </a:lnTo>
-                  <a:lnTo>
-                    <a:pt x="1072970" y="147804"/>
-                  </a:lnTo>
-                  <a:lnTo>
-                    <a:pt x="1072970" y="193282"/>
-                  </a:lnTo>
-                  <a:lnTo>
-                    <a:pt x="1106500" y="193282"/>
-                  </a:lnTo>
-                  <a:lnTo>
-                    <a:pt x="1106500" y="204651"/>
-                  </a:lnTo>
-                  <a:lnTo>
-                    <a:pt x="1173561" y="204651"/>
-                  </a:lnTo>
-                  <a:lnTo>
-                    <a:pt x="1173561" y="238760"/>
-                  </a:lnTo>
-                  <a:lnTo>
-                    <a:pt x="1207091" y="238760"/>
-                  </a:lnTo>
-                  <a:lnTo>
-                    <a:pt x="1207091" y="284238"/>
-                  </a:lnTo>
-                  <a:lnTo>
-                    <a:pt x="1240621" y="284238"/>
-                  </a:lnTo>
-                  <a:lnTo>
-                    <a:pt x="1240621" y="295608"/>
-                  </a:lnTo>
-                  <a:lnTo>
-                    <a:pt x="1274152" y="295608"/>
-                  </a:lnTo>
-                  <a:lnTo>
-                    <a:pt x="1274152" y="329716"/>
-                  </a:lnTo>
-                  <a:lnTo>
-                    <a:pt x="1341212" y="329716"/>
-                  </a:lnTo>
-                  <a:lnTo>
-                    <a:pt x="1341212" y="341086"/>
-                  </a:lnTo>
-                  <a:lnTo>
-                    <a:pt x="1508864" y="341086"/>
-                  </a:lnTo>
-                  <a:lnTo>
-                    <a:pt x="1508864" y="363825"/>
-                  </a:lnTo>
-                  <a:lnTo>
-                    <a:pt x="1542394" y="363825"/>
-                  </a:lnTo>
-                  <a:lnTo>
-                    <a:pt x="1542394" y="375195"/>
-                  </a:lnTo>
-                  <a:lnTo>
-                    <a:pt x="1575924" y="375195"/>
-                  </a:lnTo>
-                  <a:lnTo>
-                    <a:pt x="1575924" y="386564"/>
-                  </a:lnTo>
-                  <a:lnTo>
-                    <a:pt x="1609455" y="386564"/>
-                  </a:lnTo>
-                  <a:lnTo>
-                    <a:pt x="1609455" y="397934"/>
-                  </a:lnTo>
-                  <a:lnTo>
-                    <a:pt x="1810637" y="397934"/>
-                  </a:lnTo>
-                  <a:lnTo>
-                    <a:pt x="1810637" y="397934"/>
+                    <a:pt x="863138" y="0"/>
+                  </a:lnTo>
+                  <a:lnTo>
+                    <a:pt x="863138" y="14330"/>
+                  </a:lnTo>
+                  <a:lnTo>
+                    <a:pt x="927074" y="14330"/>
+                  </a:lnTo>
+                  <a:lnTo>
+                    <a:pt x="927074" y="42991"/>
+                  </a:lnTo>
+                  <a:lnTo>
+                    <a:pt x="959042" y="42991"/>
+                  </a:lnTo>
+                  <a:lnTo>
+                    <a:pt x="959042" y="114644"/>
+                  </a:lnTo>
+                  <a:lnTo>
+                    <a:pt x="991010" y="114644"/>
+                  </a:lnTo>
+                  <a:lnTo>
+                    <a:pt x="991010" y="186296"/>
+                  </a:lnTo>
+                  <a:lnTo>
+                    <a:pt x="1022978" y="186296"/>
+                  </a:lnTo>
+                  <a:lnTo>
+                    <a:pt x="1022978" y="243618"/>
+                  </a:lnTo>
+                  <a:lnTo>
+                    <a:pt x="1054946" y="243618"/>
+                  </a:lnTo>
+                  <a:lnTo>
+                    <a:pt x="1054946" y="257949"/>
+                  </a:lnTo>
+                  <a:lnTo>
+                    <a:pt x="1118882" y="257949"/>
+                  </a:lnTo>
+                  <a:lnTo>
+                    <a:pt x="1118882" y="300940"/>
+                  </a:lnTo>
+                  <a:lnTo>
+                    <a:pt x="1150850" y="300940"/>
+                  </a:lnTo>
+                  <a:lnTo>
+                    <a:pt x="1150850" y="358262"/>
+                  </a:lnTo>
+                  <a:lnTo>
+                    <a:pt x="1182818" y="358262"/>
+                  </a:lnTo>
+                  <a:lnTo>
+                    <a:pt x="1182818" y="372593"/>
+                  </a:lnTo>
+                  <a:lnTo>
+                    <a:pt x="1214787" y="372593"/>
+                  </a:lnTo>
+                  <a:lnTo>
+                    <a:pt x="1214787" y="415584"/>
+                  </a:lnTo>
+                  <a:lnTo>
+                    <a:pt x="1278723" y="415584"/>
+                  </a:lnTo>
+                  <a:lnTo>
+                    <a:pt x="1278723" y="429915"/>
+                  </a:lnTo>
+                  <a:lnTo>
+                    <a:pt x="1438563" y="429915"/>
+                  </a:lnTo>
+                  <a:lnTo>
+                    <a:pt x="1438563" y="458576"/>
+                  </a:lnTo>
+                  <a:lnTo>
+                    <a:pt x="1470531" y="458576"/>
+                  </a:lnTo>
+                  <a:lnTo>
+                    <a:pt x="1470531" y="472906"/>
+                  </a:lnTo>
+                  <a:lnTo>
+                    <a:pt x="1502499" y="472906"/>
+                  </a:lnTo>
+                  <a:lnTo>
+                    <a:pt x="1502499" y="487237"/>
+                  </a:lnTo>
+                  <a:lnTo>
+                    <a:pt x="1534467" y="487237"/>
+                  </a:lnTo>
+                  <a:lnTo>
+                    <a:pt x="1534467" y="501567"/>
+                  </a:lnTo>
+                  <a:lnTo>
+                    <a:pt x="1726276" y="501567"/>
+                  </a:lnTo>
+                  <a:lnTo>
+                    <a:pt x="1726276" y="501567"/>
                   </a:lnTo>
                 </a:path>
               </a:pathLst>
@@ -4367,99 +4327,99 @@
           </p:nvSpPr>
           <p:spPr>
             <a:xfrm>
-              <a:off x="3670904" y="2884643"/>
-              <a:ext cx="1810637" cy="306977"/>
+              <a:off x="3590730" y="3140895"/>
+              <a:ext cx="1726276" cy="386923"/>
             </a:xfrm>
             <a:custGeom>
               <a:avLst/>
               <a:pathLst>
-                <a:path w="1810637" h="306977">
+                <a:path w="1726276" h="386923">
                   <a:moveTo>
                     <a:pt x="0" y="0"/>
                   </a:moveTo>
                   <a:lnTo>
-                    <a:pt x="871788" y="0"/>
-                  </a:lnTo>
-                  <a:lnTo>
-                    <a:pt x="871788" y="22739"/>
-                  </a:lnTo>
-                  <a:lnTo>
-                    <a:pt x="905318" y="22739"/>
-                  </a:lnTo>
-                  <a:lnTo>
-                    <a:pt x="905318" y="34108"/>
-                  </a:lnTo>
-                  <a:lnTo>
-                    <a:pt x="972379" y="34108"/>
-                  </a:lnTo>
-                  <a:lnTo>
-                    <a:pt x="972379" y="90956"/>
-                  </a:lnTo>
-                  <a:lnTo>
-                    <a:pt x="1005909" y="90956"/>
-                  </a:lnTo>
-                  <a:lnTo>
-                    <a:pt x="1005909" y="102325"/>
-                  </a:lnTo>
-                  <a:lnTo>
-                    <a:pt x="1106500" y="102325"/>
-                  </a:lnTo>
-                  <a:lnTo>
-                    <a:pt x="1106500" y="113695"/>
-                  </a:lnTo>
-                  <a:lnTo>
-                    <a:pt x="1140030" y="113695"/>
-                  </a:lnTo>
-                  <a:lnTo>
-                    <a:pt x="1140030" y="159173"/>
-                  </a:lnTo>
-                  <a:lnTo>
-                    <a:pt x="1173561" y="159173"/>
-                  </a:lnTo>
-                  <a:lnTo>
-                    <a:pt x="1173561" y="216021"/>
-                  </a:lnTo>
-                  <a:lnTo>
-                    <a:pt x="1207091" y="216021"/>
-                  </a:lnTo>
-                  <a:lnTo>
-                    <a:pt x="1207091" y="238760"/>
-                  </a:lnTo>
-                  <a:lnTo>
-                    <a:pt x="1240621" y="238760"/>
-                  </a:lnTo>
-                  <a:lnTo>
-                    <a:pt x="1240621" y="261499"/>
-                  </a:lnTo>
-                  <a:lnTo>
-                    <a:pt x="1274152" y="261499"/>
-                  </a:lnTo>
-                  <a:lnTo>
-                    <a:pt x="1274152" y="272869"/>
-                  </a:lnTo>
-                  <a:lnTo>
-                    <a:pt x="1307682" y="272869"/>
-                  </a:lnTo>
-                  <a:lnTo>
-                    <a:pt x="1307682" y="284238"/>
-                  </a:lnTo>
-                  <a:lnTo>
-                    <a:pt x="1575924" y="284238"/>
-                  </a:lnTo>
-                  <a:lnTo>
-                    <a:pt x="1575924" y="295608"/>
-                  </a:lnTo>
-                  <a:lnTo>
-                    <a:pt x="1710046" y="295608"/>
-                  </a:lnTo>
-                  <a:lnTo>
-                    <a:pt x="1710046" y="306977"/>
-                  </a:lnTo>
-                  <a:lnTo>
-                    <a:pt x="1810637" y="306977"/>
-                  </a:lnTo>
-                  <a:lnTo>
-                    <a:pt x="1810637" y="306977"/>
+                    <a:pt x="831170" y="0"/>
+                  </a:lnTo>
+                  <a:lnTo>
+                    <a:pt x="831170" y="28661"/>
+                  </a:lnTo>
+                  <a:lnTo>
+                    <a:pt x="863138" y="28661"/>
+                  </a:lnTo>
+                  <a:lnTo>
+                    <a:pt x="863138" y="42991"/>
+                  </a:lnTo>
+                  <a:lnTo>
+                    <a:pt x="927074" y="42991"/>
+                  </a:lnTo>
+                  <a:lnTo>
+                    <a:pt x="927074" y="114644"/>
+                  </a:lnTo>
+                  <a:lnTo>
+                    <a:pt x="959042" y="114644"/>
+                  </a:lnTo>
+                  <a:lnTo>
+                    <a:pt x="959042" y="128974"/>
+                  </a:lnTo>
+                  <a:lnTo>
+                    <a:pt x="1054946" y="128974"/>
+                  </a:lnTo>
+                  <a:lnTo>
+                    <a:pt x="1054946" y="143305"/>
+                  </a:lnTo>
+                  <a:lnTo>
+                    <a:pt x="1086914" y="143305"/>
+                  </a:lnTo>
+                  <a:lnTo>
+                    <a:pt x="1086914" y="200627"/>
+                  </a:lnTo>
+                  <a:lnTo>
+                    <a:pt x="1118882" y="200627"/>
+                  </a:lnTo>
+                  <a:lnTo>
+                    <a:pt x="1118882" y="272279"/>
+                  </a:lnTo>
+                  <a:lnTo>
+                    <a:pt x="1150850" y="272279"/>
+                  </a:lnTo>
+                  <a:lnTo>
+                    <a:pt x="1150850" y="300940"/>
+                  </a:lnTo>
+                  <a:lnTo>
+                    <a:pt x="1182818" y="300940"/>
+                  </a:lnTo>
+                  <a:lnTo>
+                    <a:pt x="1182818" y="329601"/>
+                  </a:lnTo>
+                  <a:lnTo>
+                    <a:pt x="1214787" y="329601"/>
+                  </a:lnTo>
+                  <a:lnTo>
+                    <a:pt x="1214787" y="343932"/>
+                  </a:lnTo>
+                  <a:lnTo>
+                    <a:pt x="1246755" y="343932"/>
+                  </a:lnTo>
+                  <a:lnTo>
+                    <a:pt x="1246755" y="358262"/>
+                  </a:lnTo>
+                  <a:lnTo>
+                    <a:pt x="1502499" y="358262"/>
+                  </a:lnTo>
+                  <a:lnTo>
+                    <a:pt x="1502499" y="372593"/>
+                  </a:lnTo>
+                  <a:lnTo>
+                    <a:pt x="1630372" y="372593"/>
+                  </a:lnTo>
+                  <a:lnTo>
+                    <a:pt x="1630372" y="386923"/>
+                  </a:lnTo>
+                  <a:lnTo>
+                    <a:pt x="1726276" y="386923"/>
+                  </a:lnTo>
+                  <a:lnTo>
+                    <a:pt x="1726276" y="386923"/>
                   </a:lnTo>
                 </a:path>
               </a:pathLst>
@@ -4488,123 +4448,123 @@
           </p:nvSpPr>
           <p:spPr>
             <a:xfrm>
-              <a:off x="3670904" y="2884643"/>
-              <a:ext cx="1810637" cy="386564"/>
+              <a:off x="3590730" y="3140895"/>
+              <a:ext cx="1726276" cy="487237"/>
             </a:xfrm>
             <a:custGeom>
               <a:avLst/>
               <a:pathLst>
-                <a:path w="1810637" h="386564">
+                <a:path w="1726276" h="487237">
                   <a:moveTo>
                     <a:pt x="0" y="0"/>
                   </a:moveTo>
                   <a:lnTo>
-                    <a:pt x="637076" y="0"/>
-                  </a:lnTo>
-                  <a:lnTo>
-                    <a:pt x="637076" y="11369"/>
-                  </a:lnTo>
-                  <a:lnTo>
-                    <a:pt x="704136" y="11369"/>
-                  </a:lnTo>
-                  <a:lnTo>
-                    <a:pt x="704136" y="22739"/>
-                  </a:lnTo>
-                  <a:lnTo>
-                    <a:pt x="737666" y="22739"/>
-                  </a:lnTo>
-                  <a:lnTo>
-                    <a:pt x="737666" y="34108"/>
-                  </a:lnTo>
-                  <a:lnTo>
-                    <a:pt x="838257" y="34108"/>
-                  </a:lnTo>
-                  <a:lnTo>
-                    <a:pt x="838257" y="45478"/>
-                  </a:lnTo>
-                  <a:lnTo>
-                    <a:pt x="938848" y="45478"/>
-                  </a:lnTo>
-                  <a:lnTo>
-                    <a:pt x="938848" y="56847"/>
-                  </a:lnTo>
-                  <a:lnTo>
-                    <a:pt x="1005909" y="56847"/>
-                  </a:lnTo>
-                  <a:lnTo>
-                    <a:pt x="1005909" y="68217"/>
-                  </a:lnTo>
-                  <a:lnTo>
-                    <a:pt x="1039439" y="68217"/>
-                  </a:lnTo>
-                  <a:lnTo>
-                    <a:pt x="1039439" y="125065"/>
-                  </a:lnTo>
-                  <a:lnTo>
-                    <a:pt x="1106500" y="125065"/>
-                  </a:lnTo>
-                  <a:lnTo>
-                    <a:pt x="1106500" y="136434"/>
-                  </a:lnTo>
-                  <a:lnTo>
-                    <a:pt x="1140030" y="136434"/>
-                  </a:lnTo>
-                  <a:lnTo>
-                    <a:pt x="1140030" y="170543"/>
-                  </a:lnTo>
-                  <a:lnTo>
-                    <a:pt x="1173561" y="170543"/>
-                  </a:lnTo>
-                  <a:lnTo>
-                    <a:pt x="1173561" y="227390"/>
-                  </a:lnTo>
-                  <a:lnTo>
-                    <a:pt x="1207091" y="227390"/>
-                  </a:lnTo>
-                  <a:lnTo>
-                    <a:pt x="1207091" y="250130"/>
-                  </a:lnTo>
-                  <a:lnTo>
-                    <a:pt x="1240621" y="250130"/>
-                  </a:lnTo>
-                  <a:lnTo>
-                    <a:pt x="1240621" y="261499"/>
-                  </a:lnTo>
-                  <a:lnTo>
-                    <a:pt x="1274152" y="261499"/>
-                  </a:lnTo>
-                  <a:lnTo>
-                    <a:pt x="1274152" y="295608"/>
-                  </a:lnTo>
-                  <a:lnTo>
-                    <a:pt x="1307682" y="295608"/>
-                  </a:lnTo>
-                  <a:lnTo>
-                    <a:pt x="1307682" y="341086"/>
-                  </a:lnTo>
-                  <a:lnTo>
-                    <a:pt x="1341212" y="341086"/>
-                  </a:lnTo>
-                  <a:lnTo>
-                    <a:pt x="1341212" y="352455"/>
-                  </a:lnTo>
-                  <a:lnTo>
-                    <a:pt x="1408273" y="352455"/>
-                  </a:lnTo>
-                  <a:lnTo>
-                    <a:pt x="1408273" y="363825"/>
-                  </a:lnTo>
-                  <a:lnTo>
-                    <a:pt x="1609455" y="363825"/>
-                  </a:lnTo>
-                  <a:lnTo>
-                    <a:pt x="1609455" y="375195"/>
-                  </a:lnTo>
-                  <a:lnTo>
-                    <a:pt x="1810637" y="375195"/>
-                  </a:lnTo>
-                  <a:lnTo>
-                    <a:pt x="1810637" y="386564"/>
+                    <a:pt x="607393" y="0"/>
+                  </a:lnTo>
+                  <a:lnTo>
+                    <a:pt x="607393" y="14330"/>
+                  </a:lnTo>
+                  <a:lnTo>
+                    <a:pt x="671329" y="14330"/>
+                  </a:lnTo>
+                  <a:lnTo>
+                    <a:pt x="671329" y="28661"/>
+                  </a:lnTo>
+                  <a:lnTo>
+                    <a:pt x="703297" y="28661"/>
+                  </a:lnTo>
+                  <a:lnTo>
+                    <a:pt x="703297" y="42991"/>
+                  </a:lnTo>
+                  <a:lnTo>
+                    <a:pt x="799201" y="42991"/>
+                  </a:lnTo>
+                  <a:lnTo>
+                    <a:pt x="799201" y="57322"/>
+                  </a:lnTo>
+                  <a:lnTo>
+                    <a:pt x="895106" y="57322"/>
+                  </a:lnTo>
+                  <a:lnTo>
+                    <a:pt x="895106" y="71652"/>
+                  </a:lnTo>
+                  <a:lnTo>
+                    <a:pt x="959042" y="71652"/>
+                  </a:lnTo>
+                  <a:lnTo>
+                    <a:pt x="959042" y="85983"/>
+                  </a:lnTo>
+                  <a:lnTo>
+                    <a:pt x="991010" y="85983"/>
+                  </a:lnTo>
+                  <a:lnTo>
+                    <a:pt x="991010" y="157635"/>
+                  </a:lnTo>
+                  <a:lnTo>
+                    <a:pt x="1054946" y="157635"/>
+                  </a:lnTo>
+                  <a:lnTo>
+                    <a:pt x="1054946" y="171966"/>
+                  </a:lnTo>
+                  <a:lnTo>
+                    <a:pt x="1086914" y="171966"/>
+                  </a:lnTo>
+                  <a:lnTo>
+                    <a:pt x="1086914" y="214957"/>
+                  </a:lnTo>
+                  <a:lnTo>
+                    <a:pt x="1118882" y="214957"/>
+                  </a:lnTo>
+                  <a:lnTo>
+                    <a:pt x="1118882" y="286610"/>
+                  </a:lnTo>
+                  <a:lnTo>
+                    <a:pt x="1150850" y="286610"/>
+                  </a:lnTo>
+                  <a:lnTo>
+                    <a:pt x="1150850" y="315271"/>
+                  </a:lnTo>
+                  <a:lnTo>
+                    <a:pt x="1182818" y="315271"/>
+                  </a:lnTo>
+                  <a:lnTo>
+                    <a:pt x="1182818" y="329601"/>
+                  </a:lnTo>
+                  <a:lnTo>
+                    <a:pt x="1214787" y="329601"/>
+                  </a:lnTo>
+                  <a:lnTo>
+                    <a:pt x="1214787" y="372593"/>
+                  </a:lnTo>
+                  <a:lnTo>
+                    <a:pt x="1246755" y="372593"/>
+                  </a:lnTo>
+                  <a:lnTo>
+                    <a:pt x="1246755" y="429915"/>
+                  </a:lnTo>
+                  <a:lnTo>
+                    <a:pt x="1278723" y="429915"/>
+                  </a:lnTo>
+                  <a:lnTo>
+                    <a:pt x="1278723" y="444245"/>
+                  </a:lnTo>
+                  <a:lnTo>
+                    <a:pt x="1342659" y="444245"/>
+                  </a:lnTo>
+                  <a:lnTo>
+                    <a:pt x="1342659" y="458576"/>
+                  </a:lnTo>
+                  <a:lnTo>
+                    <a:pt x="1534467" y="458576"/>
+                  </a:lnTo>
+                  <a:lnTo>
+                    <a:pt x="1534467" y="472906"/>
+                  </a:lnTo>
+                  <a:lnTo>
+                    <a:pt x="1726276" y="472906"/>
+                  </a:lnTo>
+                  <a:lnTo>
+                    <a:pt x="1726276" y="487237"/>
                   </a:lnTo>
                 </a:path>
               </a:pathLst>
@@ -4633,8 +4593,8 @@
           </p:nvSpPr>
           <p:spPr>
             <a:xfrm>
-              <a:off x="5408390" y="3227842"/>
-              <a:ext cx="146301" cy="109470"/>
+              <a:off x="5242529" y="3568624"/>
+              <a:ext cx="148955" cy="129570"/>
             </a:xfrm>
             <a:prstGeom prst="rect">
               <a:avLst/>
@@ -4646,9 +4606,6 @@
             <a:lstStyle/>
             <a:p>
               <a:pPr algn="l" marL="0" marR="0" indent="0">
-                <a:lnSpc>
-                  <a:spcPts val="1374"/>
-                </a:lnSpc>
                 <a:spcBef>
                   <a:spcPts val="0"/>
                 </a:spcBef>
@@ -4657,7 +4614,7 @@
                 </a:spcAft>
               </a:pPr>
               <a:r>
-                <a:rPr sz="1374">
+                <a:rPr sz="1400" i="0" b="0">
                   <a:solidFill>
                     <a:srgbClr val="00B4F0">
                       <a:alpha val="100000"/>
@@ -4679,8 +4636,8 @@
           </p:nvSpPr>
           <p:spPr>
             <a:xfrm>
-              <a:off x="5408390" y="3136885"/>
-              <a:ext cx="146301" cy="109470"/>
+              <a:off x="5242529" y="3453980"/>
+              <a:ext cx="148955" cy="129570"/>
             </a:xfrm>
             <a:prstGeom prst="rect">
               <a:avLst/>
@@ -4692,9 +4649,6 @@
             <a:lstStyle/>
             <a:p>
               <a:pPr algn="l" marL="0" marR="0" indent="0">
-                <a:lnSpc>
-                  <a:spcPts val="1374"/>
-                </a:lnSpc>
                 <a:spcBef>
                   <a:spcPts val="0"/>
                 </a:spcBef>
@@ -4703,7 +4657,7 @@
                 </a:spcAft>
               </a:pPr>
               <a:r>
-                <a:rPr sz="1374">
+                <a:rPr sz="1400" i="0" b="0">
                   <a:solidFill>
                     <a:srgbClr val="619CFF">
                       <a:alpha val="100000"/>
@@ -4725,8 +4679,8 @@
           </p:nvSpPr>
           <p:spPr>
             <a:xfrm>
-              <a:off x="5408390" y="3216472"/>
-              <a:ext cx="146301" cy="109470"/>
+              <a:off x="5242529" y="3554294"/>
+              <a:ext cx="148955" cy="129570"/>
             </a:xfrm>
             <a:prstGeom prst="rect">
               <a:avLst/>
@@ -4738,9 +4692,6 @@
             <a:lstStyle/>
             <a:p>
               <a:pPr algn="l" marL="0" marR="0" indent="0">
-                <a:lnSpc>
-                  <a:spcPts val="1374"/>
-                </a:lnSpc>
                 <a:spcBef>
                   <a:spcPts val="0"/>
                 </a:spcBef>
@@ -4749,7 +4700,7 @@
                 </a:spcAft>
               </a:pPr>
               <a:r>
-                <a:rPr sz="1374">
+                <a:rPr sz="1400" i="0" b="0">
                   <a:solidFill>
                     <a:srgbClr val="F564E3">
                       <a:alpha val="100000"/>
@@ -4771,12 +4722,13 @@
           </p:nvSpPr>
           <p:spPr>
             <a:xfrm>
-              <a:off x="3670904" y="2850534"/>
-              <a:ext cx="1844167" cy="1171063"/>
+              <a:off x="3590730" y="3126564"/>
+              <a:ext cx="1758244" cy="1447380"/>
             </a:xfrm>
             <a:prstGeom prst="rect">
               <a:avLst/>
             </a:prstGeom>
+            <a:noFill/>
           </p:spPr>
           <p:txBody>
             <a:bodyPr/>
@@ -4792,8 +4744,8 @@
           </p:nvSpPr>
           <p:spPr>
             <a:xfrm>
-              <a:off x="1738169" y="2575545"/>
-              <a:ext cx="1844167" cy="274989"/>
+              <a:off x="1743918" y="2851719"/>
+              <a:ext cx="1758244" cy="274845"/>
             </a:xfrm>
             <a:prstGeom prst="rect">
               <a:avLst/>
@@ -4827,8 +4779,8 @@
           </p:nvSpPr>
           <p:spPr>
             <a:xfrm>
-              <a:off x="2608058" y="2657304"/>
-              <a:ext cx="104388" cy="107582"/>
+              <a:off x="2570920" y="2937341"/>
+              <a:ext cx="104241" cy="103601"/>
             </a:xfrm>
             <a:prstGeom prst="rect">
               <a:avLst/>
@@ -4840,9 +4792,6 @@
             <a:lstStyle/>
             <a:p>
               <a:pPr algn="l" marL="0" marR="0" indent="0">
-                <a:lnSpc>
-                  <a:spcPts val="1120"/>
-                </a:lnSpc>
                 <a:spcBef>
                   <a:spcPts val="0"/>
                 </a:spcBef>
@@ -4851,9 +4800,9 @@
                 </a:spcAft>
               </a:pPr>
               <a:r>
-                <a:rPr sz="1120" b="1">
+                <a:rPr sz="1120" i="0" b="1">
                   <a:solidFill>
-                    <a:srgbClr val="000000">
+                    <a:srgbClr val="1A1A1A">
                       <a:alpha val="100000"/>
                     </a:srgbClr>
                   </a:solidFill>
@@ -4873,8 +4822,8 @@
           </p:nvSpPr>
           <p:spPr>
             <a:xfrm>
-              <a:off x="3670904" y="2575545"/>
-              <a:ext cx="1844167" cy="274989"/>
+              <a:off x="3590730" y="2851719"/>
+              <a:ext cx="1758244" cy="274845"/>
             </a:xfrm>
             <a:prstGeom prst="rect">
               <a:avLst/>
@@ -4908,8 +4857,8 @@
           </p:nvSpPr>
           <p:spPr>
             <a:xfrm>
-              <a:off x="4533953" y="2661193"/>
-              <a:ext cx="118070" cy="103693"/>
+              <a:off x="4410874" y="2937341"/>
+              <a:ext cx="117957" cy="103601"/>
             </a:xfrm>
             <a:prstGeom prst="rect">
               <a:avLst/>
@@ -4921,9 +4870,6 @@
             <a:lstStyle/>
             <a:p>
               <a:pPr algn="l" marL="0" marR="0" indent="0">
-                <a:lnSpc>
-                  <a:spcPts val="1120"/>
-                </a:lnSpc>
                 <a:spcBef>
                   <a:spcPts val="0"/>
                 </a:spcBef>
@@ -4932,9 +4878,9 @@
                 </a:spcAft>
               </a:pPr>
               <a:r>
-                <a:rPr sz="1120" b="1">
+                <a:rPr sz="1120" i="0" b="1">
                   <a:solidFill>
-                    <a:srgbClr val="000000">
+                    <a:srgbClr val="1A1A1A">
                       <a:alpha val="100000"/>
                     </a:srgbClr>
                   </a:solidFill>
@@ -4954,8 +4900,8 @@
           </p:nvSpPr>
           <p:spPr>
             <a:xfrm>
-              <a:off x="1738169" y="1040925"/>
-              <a:ext cx="1844167" cy="274989"/>
+              <a:off x="1743918" y="1040925"/>
+              <a:ext cx="1758244" cy="274845"/>
             </a:xfrm>
             <a:prstGeom prst="rect">
               <a:avLst/>
@@ -4989,8 +4935,8 @@
           </p:nvSpPr>
           <p:spPr>
             <a:xfrm>
-              <a:off x="2605211" y="1126573"/>
-              <a:ext cx="110083" cy="103693"/>
+              <a:off x="2568039" y="1126547"/>
+              <a:ext cx="110002" cy="103601"/>
             </a:xfrm>
             <a:prstGeom prst="rect">
               <a:avLst/>
@@ -5002,9 +4948,6 @@
             <a:lstStyle/>
             <a:p>
               <a:pPr algn="l" marL="0" marR="0" indent="0">
-                <a:lnSpc>
-                  <a:spcPts val="1120"/>
-                </a:lnSpc>
                 <a:spcBef>
                   <a:spcPts val="0"/>
                 </a:spcBef>
@@ -5013,9 +4956,9 @@
                 </a:spcAft>
               </a:pPr>
               <a:r>
-                <a:rPr sz="1120" b="1">
+                <a:rPr sz="1120" i="0" b="1">
                   <a:solidFill>
-                    <a:srgbClr val="000000">
+                    <a:srgbClr val="1A1A1A">
                       <a:alpha val="100000"/>
                     </a:srgbClr>
                   </a:solidFill>
@@ -5035,8 +4978,8 @@
           </p:nvSpPr>
           <p:spPr>
             <a:xfrm>
-              <a:off x="3670904" y="1040925"/>
-              <a:ext cx="1844167" cy="274989"/>
+              <a:off x="3590730" y="1040925"/>
+              <a:ext cx="1758244" cy="274845"/>
             </a:xfrm>
             <a:prstGeom prst="rect">
               <a:avLst/>
@@ -5070,8 +5013,8 @@
           </p:nvSpPr>
           <p:spPr>
             <a:xfrm>
-              <a:off x="4538780" y="1126573"/>
-              <a:ext cx="108416" cy="103693"/>
+              <a:off x="4415720" y="1126547"/>
+              <a:ext cx="108264" cy="103601"/>
             </a:xfrm>
             <a:prstGeom prst="rect">
               <a:avLst/>
@@ -5083,9 +5026,6 @@
             <a:lstStyle/>
             <a:p>
               <a:pPr algn="l" marL="0" marR="0" indent="0">
-                <a:lnSpc>
-                  <a:spcPts val="1120"/>
-                </a:lnSpc>
                 <a:spcBef>
                   <a:spcPts val="0"/>
                 </a:spcBef>
@@ -5094,9 +5034,9 @@
                 </a:spcAft>
               </a:pPr>
               <a:r>
-                <a:rPr sz="1120" b="1">
+                <a:rPr sz="1120" i="0" b="1">
                   <a:solidFill>
-                    <a:srgbClr val="000000">
+                    <a:srgbClr val="1A1A1A">
                       <a:alpha val="100000"/>
                     </a:srgbClr>
                   </a:solidFill>
@@ -5116,23 +5056,23 @@
           </p:nvSpPr>
           <p:spPr>
             <a:xfrm>
-              <a:off x="1738169" y="4021598"/>
-              <a:ext cx="1844167" cy="0"/>
+              <a:off x="1743918" y="4573945"/>
+              <a:ext cx="1758244" cy="0"/>
             </a:xfrm>
             <a:custGeom>
               <a:avLst/>
               <a:pathLst>
-                <a:path w="1844167" h="0">
+                <a:path w="1758244" h="0">
                   <a:moveTo>
                     <a:pt x="0" y="0"/>
                   </a:moveTo>
                   <a:lnTo>
-                    <a:pt x="1844167" y="0"/>
+                    <a:pt x="1758244" y="0"/>
                   </a:lnTo>
                 </a:path>
               </a:pathLst>
             </a:custGeom>
-            <a:ln w="17246" cap="flat">
+            <a:ln w="18970" cap="flat">
               <a:solidFill>
                 <a:srgbClr val="000000">
                   <a:alpha val="100000"/>
@@ -5156,7 +5096,7 @@
           </p:nvSpPr>
           <p:spPr>
             <a:xfrm>
-              <a:off x="1738169" y="4021598"/>
+              <a:off x="1743918" y="4573945"/>
               <a:ext cx="0" cy="44283"/>
             </a:xfrm>
             <a:custGeom>
@@ -5172,9 +5112,9 @@
                 </a:path>
               </a:pathLst>
             </a:custGeom>
-            <a:ln w="17246" cap="flat">
+            <a:ln w="18970" cap="flat">
               <a:solidFill>
-                <a:srgbClr val="000000">
+                <a:srgbClr val="333333">
                   <a:alpha val="100000"/>
                 </a:srgbClr>
               </a:solidFill>
@@ -5196,7 +5136,7 @@
           </p:nvSpPr>
           <p:spPr>
             <a:xfrm>
-              <a:off x="1939351" y="4021598"/>
+              <a:off x="1935727" y="4573945"/>
               <a:ext cx="0" cy="44283"/>
             </a:xfrm>
             <a:custGeom>
@@ -5212,9 +5152,9 @@
                 </a:path>
               </a:pathLst>
             </a:custGeom>
-            <a:ln w="17246" cap="flat">
+            <a:ln w="18970" cap="flat">
               <a:solidFill>
-                <a:srgbClr val="000000">
+                <a:srgbClr val="333333">
                   <a:alpha val="100000"/>
                 </a:srgbClr>
               </a:solidFill>
@@ -5236,7 +5176,7 @@
           </p:nvSpPr>
           <p:spPr>
             <a:xfrm>
-              <a:off x="2140533" y="4021598"/>
+              <a:off x="2127535" y="4573945"/>
               <a:ext cx="0" cy="44283"/>
             </a:xfrm>
             <a:custGeom>
@@ -5252,9 +5192,9 @@
                 </a:path>
               </a:pathLst>
             </a:custGeom>
-            <a:ln w="17246" cap="flat">
+            <a:ln w="18970" cap="flat">
               <a:solidFill>
-                <a:srgbClr val="000000">
+                <a:srgbClr val="333333">
                   <a:alpha val="100000"/>
                 </a:srgbClr>
               </a:solidFill>
@@ -5276,7 +5216,7 @@
           </p:nvSpPr>
           <p:spPr>
             <a:xfrm>
-              <a:off x="2341714" y="4021598"/>
+              <a:off x="2319344" y="4573945"/>
               <a:ext cx="0" cy="44283"/>
             </a:xfrm>
             <a:custGeom>
@@ -5292,9 +5232,9 @@
                 </a:path>
               </a:pathLst>
             </a:custGeom>
-            <a:ln w="17246" cap="flat">
+            <a:ln w="18970" cap="flat">
               <a:solidFill>
-                <a:srgbClr val="000000">
+                <a:srgbClr val="333333">
                   <a:alpha val="100000"/>
                 </a:srgbClr>
               </a:solidFill>
@@ -5316,7 +5256,7 @@
           </p:nvSpPr>
           <p:spPr>
             <a:xfrm>
-              <a:off x="2542896" y="4021598"/>
+              <a:off x="2511152" y="4573945"/>
               <a:ext cx="0" cy="44283"/>
             </a:xfrm>
             <a:custGeom>
@@ -5332,9 +5272,9 @@
                 </a:path>
               </a:pathLst>
             </a:custGeom>
-            <a:ln w="17246" cap="flat">
+            <a:ln w="18970" cap="flat">
               <a:solidFill>
-                <a:srgbClr val="000000">
+                <a:srgbClr val="333333">
                   <a:alpha val="100000"/>
                 </a:srgbClr>
               </a:solidFill>
@@ -5356,7 +5296,7 @@
           </p:nvSpPr>
           <p:spPr>
             <a:xfrm>
-              <a:off x="2744078" y="4021598"/>
+              <a:off x="2702961" y="4573945"/>
               <a:ext cx="0" cy="44283"/>
             </a:xfrm>
             <a:custGeom>
@@ -5372,9 +5312,9 @@
                 </a:path>
               </a:pathLst>
             </a:custGeom>
-            <a:ln w="17246" cap="flat">
+            <a:ln w="18970" cap="flat">
               <a:solidFill>
-                <a:srgbClr val="000000">
+                <a:srgbClr val="333333">
                   <a:alpha val="100000"/>
                 </a:srgbClr>
               </a:solidFill>
@@ -5396,7 +5336,7 @@
           </p:nvSpPr>
           <p:spPr>
             <a:xfrm>
-              <a:off x="2945260" y="4021598"/>
+              <a:off x="2894769" y="4573945"/>
               <a:ext cx="0" cy="44283"/>
             </a:xfrm>
             <a:custGeom>
@@ -5412,9 +5352,9 @@
                 </a:path>
               </a:pathLst>
             </a:custGeom>
-            <a:ln w="17246" cap="flat">
+            <a:ln w="18970" cap="flat">
               <a:solidFill>
-                <a:srgbClr val="000000">
+                <a:srgbClr val="333333">
                   <a:alpha val="100000"/>
                 </a:srgbClr>
               </a:solidFill>
@@ -5436,7 +5376,7 @@
           </p:nvSpPr>
           <p:spPr>
             <a:xfrm>
-              <a:off x="3146442" y="4021598"/>
+              <a:off x="3086577" y="4573945"/>
               <a:ext cx="0" cy="44283"/>
             </a:xfrm>
             <a:custGeom>
@@ -5452,9 +5392,9 @@
                 </a:path>
               </a:pathLst>
             </a:custGeom>
-            <a:ln w="17246" cap="flat">
+            <a:ln w="18970" cap="flat">
               <a:solidFill>
-                <a:srgbClr val="000000">
+                <a:srgbClr val="333333">
                   <a:alpha val="100000"/>
                 </a:srgbClr>
               </a:solidFill>
@@ -5476,7 +5416,7 @@
           </p:nvSpPr>
           <p:spPr>
             <a:xfrm>
-              <a:off x="3347624" y="4021598"/>
+              <a:off x="3278386" y="4573945"/>
               <a:ext cx="0" cy="44283"/>
             </a:xfrm>
             <a:custGeom>
@@ -5492,9 +5432,9 @@
                 </a:path>
               </a:pathLst>
             </a:custGeom>
-            <a:ln w="17246" cap="flat">
+            <a:ln w="18970" cap="flat">
               <a:solidFill>
-                <a:srgbClr val="000000">
+                <a:srgbClr val="333333">
                   <a:alpha val="100000"/>
                 </a:srgbClr>
               </a:solidFill>
@@ -5516,7 +5456,7 @@
           </p:nvSpPr>
           <p:spPr>
             <a:xfrm>
-              <a:off x="3548806" y="4021598"/>
+              <a:off x="3470194" y="4573945"/>
               <a:ext cx="0" cy="44283"/>
             </a:xfrm>
             <a:custGeom>
@@ -5532,9 +5472,9 @@
                 </a:path>
               </a:pathLst>
             </a:custGeom>
-            <a:ln w="17246" cap="flat">
+            <a:ln w="18970" cap="flat">
               <a:solidFill>
-                <a:srgbClr val="000000">
+                <a:srgbClr val="333333">
                   <a:alpha val="100000"/>
                 </a:srgbClr>
               </a:solidFill>
@@ -5556,8 +5496,8 @@
           </p:nvSpPr>
           <p:spPr>
             <a:xfrm>
-              <a:off x="1692920" y="4097419"/>
-              <a:ext cx="90497" cy="107582"/>
+              <a:off x="1697101" y="4653656"/>
+              <a:ext cx="93634" cy="107350"/>
             </a:xfrm>
             <a:prstGeom prst="rect">
               <a:avLst/>
@@ -5569,9 +5509,6 @@
             <a:lstStyle/>
             <a:p>
               <a:pPr algn="l" marL="0" marR="0" indent="0">
-                <a:lnSpc>
-                  <a:spcPts val="1120"/>
-                </a:lnSpc>
                 <a:spcBef>
                   <a:spcPts val="0"/>
                 </a:spcBef>
@@ -5580,7 +5517,7 @@
                 </a:spcAft>
               </a:pPr>
               <a:r>
-                <a:rPr sz="1120">
+                <a:rPr sz="1160" i="0" b="0">
                   <a:solidFill>
                     <a:srgbClr val="000000">
                       <a:alpha val="100000"/>
@@ -5602,8 +5539,8 @@
           </p:nvSpPr>
           <p:spPr>
             <a:xfrm>
-              <a:off x="1894102" y="4097419"/>
-              <a:ext cx="90497" cy="107582"/>
+              <a:off x="1888909" y="4653656"/>
+              <a:ext cx="93634" cy="107350"/>
             </a:xfrm>
             <a:prstGeom prst="rect">
               <a:avLst/>
@@ -5615,9 +5552,6 @@
             <a:lstStyle/>
             <a:p>
               <a:pPr algn="l" marL="0" marR="0" indent="0">
-                <a:lnSpc>
-                  <a:spcPts val="1120"/>
-                </a:lnSpc>
                 <a:spcBef>
                   <a:spcPts val="0"/>
                 </a:spcBef>
@@ -5626,7 +5560,7 @@
                 </a:spcAft>
               </a:pPr>
               <a:r>
-                <a:rPr sz="1120">
+                <a:rPr sz="1160" i="0" b="0">
                   <a:solidFill>
                     <a:srgbClr val="000000">
                       <a:alpha val="100000"/>
@@ -5648,8 +5582,8 @@
           </p:nvSpPr>
           <p:spPr>
             <a:xfrm>
-              <a:off x="2050035" y="4099434"/>
-              <a:ext cx="180994" cy="105568"/>
+              <a:off x="2033901" y="4653656"/>
+              <a:ext cx="187269" cy="107350"/>
             </a:xfrm>
             <a:prstGeom prst="rect">
               <a:avLst/>
@@ -5661,9 +5595,6 @@
             <a:lstStyle/>
             <a:p>
               <a:pPr algn="l" marL="0" marR="0" indent="0">
-                <a:lnSpc>
-                  <a:spcPts val="1120"/>
-                </a:lnSpc>
                 <a:spcBef>
                   <a:spcPts val="0"/>
                 </a:spcBef>
@@ -5672,7 +5603,7 @@
                 </a:spcAft>
               </a:pPr>
               <a:r>
-                <a:rPr sz="1120">
+                <a:rPr sz="1160" i="0" b="0">
                   <a:solidFill>
                     <a:srgbClr val="000000">
                       <a:alpha val="100000"/>
@@ -5694,8 +5625,8 @@
           </p:nvSpPr>
           <p:spPr>
             <a:xfrm>
-              <a:off x="2251217" y="4097419"/>
-              <a:ext cx="180994" cy="107582"/>
+              <a:off x="2225709" y="4653656"/>
+              <a:ext cx="187269" cy="107350"/>
             </a:xfrm>
             <a:prstGeom prst="rect">
               <a:avLst/>
@@ -5707,9 +5638,6 @@
             <a:lstStyle/>
             <a:p>
               <a:pPr algn="l" marL="0" marR="0" indent="0">
-                <a:lnSpc>
-                  <a:spcPts val="1120"/>
-                </a:lnSpc>
                 <a:spcBef>
                   <a:spcPts val="0"/>
                 </a:spcBef>
@@ -5718,7 +5646,7 @@
                 </a:spcAft>
               </a:pPr>
               <a:r>
-                <a:rPr sz="1120">
+                <a:rPr sz="1160" i="0" b="0">
                   <a:solidFill>
                     <a:srgbClr val="000000">
                       <a:alpha val="100000"/>
@@ -5740,8 +5668,8 @@
           </p:nvSpPr>
           <p:spPr>
             <a:xfrm>
-              <a:off x="2452399" y="4099434"/>
-              <a:ext cx="180994" cy="105568"/>
+              <a:off x="2417517" y="4653656"/>
+              <a:ext cx="187269" cy="107350"/>
             </a:xfrm>
             <a:prstGeom prst="rect">
               <a:avLst/>
@@ -5753,9 +5681,6 @@
             <a:lstStyle/>
             <a:p>
               <a:pPr algn="l" marL="0" marR="0" indent="0">
-                <a:lnSpc>
-                  <a:spcPts val="1120"/>
-                </a:lnSpc>
                 <a:spcBef>
                   <a:spcPts val="0"/>
                 </a:spcBef>
@@ -5764,7 +5689,7 @@
                 </a:spcAft>
               </a:pPr>
               <a:r>
-                <a:rPr sz="1120">
+                <a:rPr sz="1160" i="0" b="0">
                   <a:solidFill>
                     <a:srgbClr val="000000">
                       <a:alpha val="100000"/>
@@ -5786,8 +5711,8 @@
           </p:nvSpPr>
           <p:spPr>
             <a:xfrm>
-              <a:off x="2653581" y="4097419"/>
-              <a:ext cx="180994" cy="107582"/>
+              <a:off x="2609326" y="4653656"/>
+              <a:ext cx="187269" cy="107350"/>
             </a:xfrm>
             <a:prstGeom prst="rect">
               <a:avLst/>
@@ -5799,9 +5724,6 @@
             <a:lstStyle/>
             <a:p>
               <a:pPr algn="l" marL="0" marR="0" indent="0">
-                <a:lnSpc>
-                  <a:spcPts val="1120"/>
-                </a:lnSpc>
                 <a:spcBef>
                   <a:spcPts val="0"/>
                 </a:spcBef>
@@ -5810,7 +5732,7 @@
                 </a:spcAft>
               </a:pPr>
               <a:r>
-                <a:rPr sz="1120">
+                <a:rPr sz="1160" i="0" b="0">
                   <a:solidFill>
                     <a:srgbClr val="000000">
                       <a:alpha val="100000"/>
@@ -5832,8 +5754,8 @@
           </p:nvSpPr>
           <p:spPr>
             <a:xfrm>
-              <a:off x="2854763" y="4097419"/>
-              <a:ext cx="180994" cy="107582"/>
+              <a:off x="2801134" y="4653656"/>
+              <a:ext cx="187269" cy="107350"/>
             </a:xfrm>
             <a:prstGeom prst="rect">
               <a:avLst/>
@@ -5845,9 +5767,6 @@
             <a:lstStyle/>
             <a:p>
               <a:pPr algn="l" marL="0" marR="0" indent="0">
-                <a:lnSpc>
-                  <a:spcPts val="1120"/>
-                </a:lnSpc>
                 <a:spcBef>
                   <a:spcPts val="0"/>
                 </a:spcBef>
@@ -5856,7 +5775,7 @@
                 </a:spcAft>
               </a:pPr>
               <a:r>
-                <a:rPr sz="1120">
+                <a:rPr sz="1160" i="0" b="0">
                   <a:solidFill>
                     <a:srgbClr val="000000">
                       <a:alpha val="100000"/>
@@ -5878,8 +5797,8 @@
           </p:nvSpPr>
           <p:spPr>
             <a:xfrm>
-              <a:off x="3055945" y="4099434"/>
-              <a:ext cx="180994" cy="105568"/>
+              <a:off x="2992943" y="4653656"/>
+              <a:ext cx="187269" cy="107350"/>
             </a:xfrm>
             <a:prstGeom prst="rect">
               <a:avLst/>
@@ -5891,9 +5810,6 @@
             <a:lstStyle/>
             <a:p>
               <a:pPr algn="l" marL="0" marR="0" indent="0">
-                <a:lnSpc>
-                  <a:spcPts val="1120"/>
-                </a:lnSpc>
                 <a:spcBef>
                   <a:spcPts val="0"/>
                 </a:spcBef>
@@ -5902,7 +5818,7 @@
                 </a:spcAft>
               </a:pPr>
               <a:r>
-                <a:rPr sz="1120">
+                <a:rPr sz="1160" i="0" b="0">
                   <a:solidFill>
                     <a:srgbClr val="000000">
                       <a:alpha val="100000"/>
@@ -5924,8 +5840,8 @@
           </p:nvSpPr>
           <p:spPr>
             <a:xfrm>
-              <a:off x="3257127" y="4097419"/>
-              <a:ext cx="180994" cy="107582"/>
+              <a:off x="3184751" y="4653656"/>
+              <a:ext cx="187269" cy="107350"/>
             </a:xfrm>
             <a:prstGeom prst="rect">
               <a:avLst/>
@@ -5937,9 +5853,6 @@
             <a:lstStyle/>
             <a:p>
               <a:pPr algn="l" marL="0" marR="0" indent="0">
-                <a:lnSpc>
-                  <a:spcPts val="1120"/>
-                </a:lnSpc>
                 <a:spcBef>
                   <a:spcPts val="0"/>
                 </a:spcBef>
@@ -5948,7 +5861,7 @@
                 </a:spcAft>
               </a:pPr>
               <a:r>
-                <a:rPr sz="1120">
+                <a:rPr sz="1160" i="0" b="0">
                   <a:solidFill>
                     <a:srgbClr val="000000">
                       <a:alpha val="100000"/>
@@ -5970,8 +5883,8 @@
           </p:nvSpPr>
           <p:spPr>
             <a:xfrm>
-              <a:off x="3458308" y="4099295"/>
-              <a:ext cx="180994" cy="105707"/>
+              <a:off x="3376560" y="4653656"/>
+              <a:ext cx="187269" cy="107350"/>
             </a:xfrm>
             <a:prstGeom prst="rect">
               <a:avLst/>
@@ -5983,9 +5896,6 @@
             <a:lstStyle/>
             <a:p>
               <a:pPr algn="l" marL="0" marR="0" indent="0">
-                <a:lnSpc>
-                  <a:spcPts val="1120"/>
-                </a:lnSpc>
                 <a:spcBef>
                   <a:spcPts val="0"/>
                 </a:spcBef>
@@ -5994,7 +5904,7 @@
                 </a:spcAft>
               </a:pPr>
               <a:r>
-                <a:rPr sz="1120">
+                <a:rPr sz="1160" i="0" b="0">
                   <a:solidFill>
                     <a:srgbClr val="000000">
                       <a:alpha val="100000"/>
@@ -6016,23 +5926,23 @@
           </p:nvSpPr>
           <p:spPr>
             <a:xfrm>
-              <a:off x="3670904" y="4021598"/>
-              <a:ext cx="1844167" cy="0"/>
+              <a:off x="3590730" y="4573945"/>
+              <a:ext cx="1758244" cy="0"/>
             </a:xfrm>
             <a:custGeom>
               <a:avLst/>
               <a:pathLst>
-                <a:path w="1844167" h="0">
+                <a:path w="1758244" h="0">
                   <a:moveTo>
                     <a:pt x="0" y="0"/>
                   </a:moveTo>
                   <a:lnTo>
-                    <a:pt x="1844167" y="0"/>
+                    <a:pt x="1758244" y="0"/>
                   </a:lnTo>
                 </a:path>
               </a:pathLst>
             </a:custGeom>
-            <a:ln w="17246" cap="flat">
+            <a:ln w="18970" cap="flat">
               <a:solidFill>
                 <a:srgbClr val="000000">
                   <a:alpha val="100000"/>
@@ -6056,7 +5966,7 @@
           </p:nvSpPr>
           <p:spPr>
             <a:xfrm>
-              <a:off x="3670904" y="4021598"/>
+              <a:off x="3590730" y="4573945"/>
               <a:ext cx="0" cy="44283"/>
             </a:xfrm>
             <a:custGeom>
@@ -6072,9 +5982,9 @@
                 </a:path>
               </a:pathLst>
             </a:custGeom>
-            <a:ln w="17246" cap="flat">
+            <a:ln w="18970" cap="flat">
               <a:solidFill>
-                <a:srgbClr val="000000">
+                <a:srgbClr val="333333">
                   <a:alpha val="100000"/>
                 </a:srgbClr>
               </a:solidFill>
@@ -6096,7 +6006,7 @@
           </p:nvSpPr>
           <p:spPr>
             <a:xfrm>
-              <a:off x="3872086" y="4021598"/>
+              <a:off x="3782539" y="4573945"/>
               <a:ext cx="0" cy="44283"/>
             </a:xfrm>
             <a:custGeom>
@@ -6112,9 +6022,9 @@
                 </a:path>
               </a:pathLst>
             </a:custGeom>
-            <a:ln w="17246" cap="flat">
+            <a:ln w="18970" cap="flat">
               <a:solidFill>
-                <a:srgbClr val="000000">
+                <a:srgbClr val="333333">
                   <a:alpha val="100000"/>
                 </a:srgbClr>
               </a:solidFill>
@@ -6136,7 +6046,7 @@
           </p:nvSpPr>
           <p:spPr>
             <a:xfrm>
-              <a:off x="4073268" y="4021598"/>
+              <a:off x="3974347" y="4573945"/>
               <a:ext cx="0" cy="44283"/>
             </a:xfrm>
             <a:custGeom>
@@ -6152,9 +6062,9 @@
                 </a:path>
               </a:pathLst>
             </a:custGeom>
-            <a:ln w="17246" cap="flat">
+            <a:ln w="18970" cap="flat">
               <a:solidFill>
-                <a:srgbClr val="000000">
+                <a:srgbClr val="333333">
                   <a:alpha val="100000"/>
                 </a:srgbClr>
               </a:solidFill>
@@ -6176,7 +6086,7 @@
           </p:nvSpPr>
           <p:spPr>
             <a:xfrm>
-              <a:off x="4274450" y="4021598"/>
+              <a:off x="4166156" y="4573945"/>
               <a:ext cx="0" cy="44283"/>
             </a:xfrm>
             <a:custGeom>
@@ -6192,9 +6102,9 @@
                 </a:path>
               </a:pathLst>
             </a:custGeom>
-            <a:ln w="17246" cap="flat">
+            <a:ln w="18970" cap="flat">
               <a:solidFill>
-                <a:srgbClr val="000000">
+                <a:srgbClr val="333333">
                   <a:alpha val="100000"/>
                 </a:srgbClr>
               </a:solidFill>
@@ -6216,7 +6126,7 @@
           </p:nvSpPr>
           <p:spPr>
             <a:xfrm>
-              <a:off x="4475632" y="4021598"/>
+              <a:off x="4357964" y="4573945"/>
               <a:ext cx="0" cy="44283"/>
             </a:xfrm>
             <a:custGeom>
@@ -6232,9 +6142,9 @@
                 </a:path>
               </a:pathLst>
             </a:custGeom>
-            <a:ln w="17246" cap="flat">
+            <a:ln w="18970" cap="flat">
               <a:solidFill>
-                <a:srgbClr val="000000">
+                <a:srgbClr val="333333">
                   <a:alpha val="100000"/>
                 </a:srgbClr>
               </a:solidFill>
@@ -6256,7 +6166,7 @@
           </p:nvSpPr>
           <p:spPr>
             <a:xfrm>
-              <a:off x="4676814" y="4021598"/>
+              <a:off x="4549773" y="4573945"/>
               <a:ext cx="0" cy="44283"/>
             </a:xfrm>
             <a:custGeom>
@@ -6272,9 +6182,9 @@
                 </a:path>
               </a:pathLst>
             </a:custGeom>
-            <a:ln w="17246" cap="flat">
+            <a:ln w="18970" cap="flat">
               <a:solidFill>
-                <a:srgbClr val="000000">
+                <a:srgbClr val="333333">
                   <a:alpha val="100000"/>
                 </a:srgbClr>
               </a:solidFill>
@@ -6296,7 +6206,7 @@
           </p:nvSpPr>
           <p:spPr>
             <a:xfrm>
-              <a:off x="4877995" y="4021598"/>
+              <a:off x="4741581" y="4573945"/>
               <a:ext cx="0" cy="44283"/>
             </a:xfrm>
             <a:custGeom>
@@ -6312,9 +6222,9 @@
                 </a:path>
               </a:pathLst>
             </a:custGeom>
-            <a:ln w="17246" cap="flat">
+            <a:ln w="18970" cap="flat">
               <a:solidFill>
-                <a:srgbClr val="000000">
+                <a:srgbClr val="333333">
                   <a:alpha val="100000"/>
                 </a:srgbClr>
               </a:solidFill>
@@ -6336,7 +6246,7 @@
           </p:nvSpPr>
           <p:spPr>
             <a:xfrm>
-              <a:off x="5079177" y="4021598"/>
+              <a:off x="4933390" y="4573945"/>
               <a:ext cx="0" cy="44283"/>
             </a:xfrm>
             <a:custGeom>
@@ -6352,9 +6262,9 @@
                 </a:path>
               </a:pathLst>
             </a:custGeom>
-            <a:ln w="17246" cap="flat">
+            <a:ln w="18970" cap="flat">
               <a:solidFill>
-                <a:srgbClr val="000000">
+                <a:srgbClr val="333333">
                   <a:alpha val="100000"/>
                 </a:srgbClr>
               </a:solidFill>
@@ -6376,7 +6286,7 @@
           </p:nvSpPr>
           <p:spPr>
             <a:xfrm>
-              <a:off x="5280359" y="4021598"/>
+              <a:off x="5125198" y="4573945"/>
               <a:ext cx="0" cy="44283"/>
             </a:xfrm>
             <a:custGeom>
@@ -6392,9 +6302,9 @@
                 </a:path>
               </a:pathLst>
             </a:custGeom>
-            <a:ln w="17246" cap="flat">
+            <a:ln w="18970" cap="flat">
               <a:solidFill>
-                <a:srgbClr val="000000">
+                <a:srgbClr val="333333">
                   <a:alpha val="100000"/>
                 </a:srgbClr>
               </a:solidFill>
@@ -6416,7 +6326,7 @@
           </p:nvSpPr>
           <p:spPr>
             <a:xfrm>
-              <a:off x="5481541" y="4021598"/>
+              <a:off x="5317007" y="4573945"/>
               <a:ext cx="0" cy="44283"/>
             </a:xfrm>
             <a:custGeom>
@@ -6432,9 +6342,9 @@
                 </a:path>
               </a:pathLst>
             </a:custGeom>
-            <a:ln w="17246" cap="flat">
+            <a:ln w="18970" cap="flat">
               <a:solidFill>
-                <a:srgbClr val="000000">
+                <a:srgbClr val="333333">
                   <a:alpha val="100000"/>
                 </a:srgbClr>
               </a:solidFill>
@@ -6456,8 +6366,8 @@
           </p:nvSpPr>
           <p:spPr>
             <a:xfrm>
-              <a:off x="3625655" y="4097419"/>
-              <a:ext cx="90497" cy="107582"/>
+              <a:off x="3543913" y="4653656"/>
+              <a:ext cx="93634" cy="107350"/>
             </a:xfrm>
             <a:prstGeom prst="rect">
               <a:avLst/>
@@ -6469,9 +6379,6 @@
             <a:lstStyle/>
             <a:p>
               <a:pPr algn="l" marL="0" marR="0" indent="0">
-                <a:lnSpc>
-                  <a:spcPts val="1120"/>
-                </a:lnSpc>
                 <a:spcBef>
                   <a:spcPts val="0"/>
                 </a:spcBef>
@@ -6480,7 +6387,7 @@
                 </a:spcAft>
               </a:pPr>
               <a:r>
-                <a:rPr sz="1120">
+                <a:rPr sz="1160" i="0" b="0">
                   <a:solidFill>
                     <a:srgbClr val="000000">
                       <a:alpha val="100000"/>
@@ -6502,8 +6409,8 @@
           </p:nvSpPr>
           <p:spPr>
             <a:xfrm>
-              <a:off x="3826837" y="4097419"/>
-              <a:ext cx="90497" cy="107582"/>
+              <a:off x="3735722" y="4653656"/>
+              <a:ext cx="93634" cy="107350"/>
             </a:xfrm>
             <a:prstGeom prst="rect">
               <a:avLst/>
@@ -6515,9 +6422,6 @@
             <a:lstStyle/>
             <a:p>
               <a:pPr algn="l" marL="0" marR="0" indent="0">
-                <a:lnSpc>
-                  <a:spcPts val="1120"/>
-                </a:lnSpc>
                 <a:spcBef>
                   <a:spcPts val="0"/>
                 </a:spcBef>
@@ -6526,7 +6430,7 @@
                 </a:spcAft>
               </a:pPr>
               <a:r>
-                <a:rPr sz="1120">
+                <a:rPr sz="1160" i="0" b="0">
                   <a:solidFill>
                     <a:srgbClr val="000000">
                       <a:alpha val="100000"/>
@@ -6548,8 +6452,8 @@
           </p:nvSpPr>
           <p:spPr>
             <a:xfrm>
-              <a:off x="3982770" y="4099434"/>
-              <a:ext cx="180994" cy="105568"/>
+              <a:off x="3880713" y="4653656"/>
+              <a:ext cx="187269" cy="107350"/>
             </a:xfrm>
             <a:prstGeom prst="rect">
               <a:avLst/>
@@ -6561,9 +6465,6 @@
             <a:lstStyle/>
             <a:p>
               <a:pPr algn="l" marL="0" marR="0" indent="0">
-                <a:lnSpc>
-                  <a:spcPts val="1120"/>
-                </a:lnSpc>
                 <a:spcBef>
                   <a:spcPts val="0"/>
                 </a:spcBef>
@@ -6572,7 +6473,7 @@
                 </a:spcAft>
               </a:pPr>
               <a:r>
-                <a:rPr sz="1120">
+                <a:rPr sz="1160" i="0" b="0">
                   <a:solidFill>
                     <a:srgbClr val="000000">
                       <a:alpha val="100000"/>
@@ -6594,8 +6495,8 @@
           </p:nvSpPr>
           <p:spPr>
             <a:xfrm>
-              <a:off x="4183952" y="4097419"/>
-              <a:ext cx="180994" cy="107582"/>
+              <a:off x="4072521" y="4653656"/>
+              <a:ext cx="187269" cy="107350"/>
             </a:xfrm>
             <a:prstGeom prst="rect">
               <a:avLst/>
@@ -6607,9 +6508,6 @@
             <a:lstStyle/>
             <a:p>
               <a:pPr algn="l" marL="0" marR="0" indent="0">
-                <a:lnSpc>
-                  <a:spcPts val="1120"/>
-                </a:lnSpc>
                 <a:spcBef>
                   <a:spcPts val="0"/>
                 </a:spcBef>
@@ -6618,7 +6516,7 @@
                 </a:spcAft>
               </a:pPr>
               <a:r>
-                <a:rPr sz="1120">
+                <a:rPr sz="1160" i="0" b="0">
                   <a:solidFill>
                     <a:srgbClr val="000000">
                       <a:alpha val="100000"/>
@@ -6640,8 +6538,8 @@
           </p:nvSpPr>
           <p:spPr>
             <a:xfrm>
-              <a:off x="4385134" y="4099434"/>
-              <a:ext cx="180994" cy="105568"/>
+              <a:off x="4264330" y="4653656"/>
+              <a:ext cx="187269" cy="107350"/>
             </a:xfrm>
             <a:prstGeom prst="rect">
               <a:avLst/>
@@ -6653,9 +6551,6 @@
             <a:lstStyle/>
             <a:p>
               <a:pPr algn="l" marL="0" marR="0" indent="0">
-                <a:lnSpc>
-                  <a:spcPts val="1120"/>
-                </a:lnSpc>
                 <a:spcBef>
                   <a:spcPts val="0"/>
                 </a:spcBef>
@@ -6664,7 +6559,7 @@
                 </a:spcAft>
               </a:pPr>
               <a:r>
-                <a:rPr sz="1120">
+                <a:rPr sz="1160" i="0" b="0">
                   <a:solidFill>
                     <a:srgbClr val="000000">
                       <a:alpha val="100000"/>
@@ -6686,8 +6581,8 @@
           </p:nvSpPr>
           <p:spPr>
             <a:xfrm>
-              <a:off x="4586316" y="4097419"/>
-              <a:ext cx="180994" cy="107582"/>
+              <a:off x="4456138" y="4653656"/>
+              <a:ext cx="187269" cy="107350"/>
             </a:xfrm>
             <a:prstGeom prst="rect">
               <a:avLst/>
@@ -6699,9 +6594,6 @@
             <a:lstStyle/>
             <a:p>
               <a:pPr algn="l" marL="0" marR="0" indent="0">
-                <a:lnSpc>
-                  <a:spcPts val="1120"/>
-                </a:lnSpc>
                 <a:spcBef>
                   <a:spcPts val="0"/>
                 </a:spcBef>
@@ -6710,7 +6602,7 @@
                 </a:spcAft>
               </a:pPr>
               <a:r>
-                <a:rPr sz="1120">
+                <a:rPr sz="1160" i="0" b="0">
                   <a:solidFill>
                     <a:srgbClr val="000000">
                       <a:alpha val="100000"/>
@@ -6732,8 +6624,8 @@
           </p:nvSpPr>
           <p:spPr>
             <a:xfrm>
-              <a:off x="4787498" y="4097419"/>
-              <a:ext cx="180994" cy="107582"/>
+              <a:off x="4647947" y="4653656"/>
+              <a:ext cx="187269" cy="107350"/>
             </a:xfrm>
             <a:prstGeom prst="rect">
               <a:avLst/>
@@ -6745,9 +6637,6 @@
             <a:lstStyle/>
             <a:p>
               <a:pPr algn="l" marL="0" marR="0" indent="0">
-                <a:lnSpc>
-                  <a:spcPts val="1120"/>
-                </a:lnSpc>
                 <a:spcBef>
                   <a:spcPts val="0"/>
                 </a:spcBef>
@@ -6756,7 +6645,7 @@
                 </a:spcAft>
               </a:pPr>
               <a:r>
-                <a:rPr sz="1120">
+                <a:rPr sz="1160" i="0" b="0">
                   <a:solidFill>
                     <a:srgbClr val="000000">
                       <a:alpha val="100000"/>
@@ -6778,8 +6667,8 @@
           </p:nvSpPr>
           <p:spPr>
             <a:xfrm>
-              <a:off x="4988680" y="4099434"/>
-              <a:ext cx="180994" cy="105568"/>
+              <a:off x="4839755" y="4653656"/>
+              <a:ext cx="187269" cy="107350"/>
             </a:xfrm>
             <a:prstGeom prst="rect">
               <a:avLst/>
@@ -6791,9 +6680,6 @@
             <a:lstStyle/>
             <a:p>
               <a:pPr algn="l" marL="0" marR="0" indent="0">
-                <a:lnSpc>
-                  <a:spcPts val="1120"/>
-                </a:lnSpc>
                 <a:spcBef>
                   <a:spcPts val="0"/>
                 </a:spcBef>
@@ -6802,7 +6688,7 @@
                 </a:spcAft>
               </a:pPr>
               <a:r>
-                <a:rPr sz="1120">
+                <a:rPr sz="1160" i="0" b="0">
                   <a:solidFill>
                     <a:srgbClr val="000000">
                       <a:alpha val="100000"/>
@@ -6824,8 +6710,8 @@
           </p:nvSpPr>
           <p:spPr>
             <a:xfrm>
-              <a:off x="5189862" y="4097419"/>
-              <a:ext cx="180994" cy="107582"/>
+              <a:off x="5031564" y="4653656"/>
+              <a:ext cx="187269" cy="107350"/>
             </a:xfrm>
             <a:prstGeom prst="rect">
               <a:avLst/>
@@ -6837,9 +6723,6 @@
             <a:lstStyle/>
             <a:p>
               <a:pPr algn="l" marL="0" marR="0" indent="0">
-                <a:lnSpc>
-                  <a:spcPts val="1120"/>
-                </a:lnSpc>
                 <a:spcBef>
                   <a:spcPts val="0"/>
                 </a:spcBef>
@@ -6848,7 +6731,7 @@
                 </a:spcAft>
               </a:pPr>
               <a:r>
-                <a:rPr sz="1120">
+                <a:rPr sz="1160" i="0" b="0">
                   <a:solidFill>
                     <a:srgbClr val="000000">
                       <a:alpha val="100000"/>
@@ -6870,8 +6753,8 @@
           </p:nvSpPr>
           <p:spPr>
             <a:xfrm>
-              <a:off x="5391044" y="4099295"/>
-              <a:ext cx="180994" cy="105707"/>
+              <a:off x="5223372" y="4653656"/>
+              <a:ext cx="187269" cy="107350"/>
             </a:xfrm>
             <a:prstGeom prst="rect">
               <a:avLst/>
@@ -6883,9 +6766,6 @@
             <a:lstStyle/>
             <a:p>
               <a:pPr algn="l" marL="0" marR="0" indent="0">
-                <a:lnSpc>
-                  <a:spcPts val="1120"/>
-                </a:lnSpc>
                 <a:spcBef>
                   <a:spcPts val="0"/>
                 </a:spcBef>
@@ -6894,7 +6774,7 @@
                 </a:spcAft>
               </a:pPr>
               <a:r>
-                <a:rPr sz="1120">
+                <a:rPr sz="1160" i="0" b="0">
                   <a:solidFill>
                     <a:srgbClr val="000000">
                       <a:alpha val="100000"/>
@@ -6916,15 +6796,15 @@
           </p:nvSpPr>
           <p:spPr>
             <a:xfrm>
-              <a:off x="1738169" y="1315914"/>
-              <a:ext cx="0" cy="1171063"/>
+              <a:off x="1743918" y="1315770"/>
+              <a:ext cx="0" cy="1447380"/>
             </a:xfrm>
             <a:custGeom>
               <a:avLst/>
               <a:pathLst>
-                <a:path w="0" h="1171063">
+                <a:path w="0" h="1447380">
                   <a:moveTo>
-                    <a:pt x="0" y="1171063"/>
+                    <a:pt x="0" y="1447380"/>
                   </a:moveTo>
                   <a:lnTo>
                     <a:pt x="0" y="0"/>
@@ -6932,7 +6812,7 @@
                 </a:path>
               </a:pathLst>
             </a:custGeom>
-            <a:ln w="17246" cap="flat">
+            <a:ln w="18970" cap="flat">
               <a:solidFill>
                 <a:srgbClr val="000000">
                   <a:alpha val="100000"/>
@@ -6956,8 +6836,8 @@
           </p:nvSpPr>
           <p:spPr>
             <a:xfrm>
-              <a:off x="1432804" y="2431241"/>
-              <a:ext cx="225653" cy="107582"/>
+              <a:off x="1430669" y="2709476"/>
+              <a:ext cx="233537" cy="107350"/>
             </a:xfrm>
             <a:prstGeom prst="rect">
               <a:avLst/>
@@ -6969,9 +6849,6 @@
             <a:lstStyle/>
             <a:p>
               <a:pPr algn="l" marL="0" marR="0" indent="0">
-                <a:lnSpc>
-                  <a:spcPts val="1120"/>
-                </a:lnSpc>
                 <a:spcBef>
                   <a:spcPts val="0"/>
                 </a:spcBef>
@@ -6980,7 +6857,7 @@
                 </a:spcAft>
               </a:pPr>
               <a:r>
-                <a:rPr sz="1120">
+                <a:rPr sz="1160" i="0" b="0">
                   <a:solidFill>
                     <a:srgbClr val="000000">
                       <a:alpha val="100000"/>
@@ -7002,8 +6879,8 @@
           </p:nvSpPr>
           <p:spPr>
             <a:xfrm>
-              <a:off x="1342307" y="2317546"/>
-              <a:ext cx="316150" cy="107582"/>
+              <a:off x="1337035" y="2566171"/>
+              <a:ext cx="327172" cy="107350"/>
             </a:xfrm>
             <a:prstGeom prst="rect">
               <a:avLst/>
@@ -7015,9 +6892,6 @@
             <a:lstStyle/>
             <a:p>
               <a:pPr algn="l" marL="0" marR="0" indent="0">
-                <a:lnSpc>
-                  <a:spcPts val="1120"/>
-                </a:lnSpc>
                 <a:spcBef>
                   <a:spcPts val="0"/>
                 </a:spcBef>
@@ -7026,7 +6900,7 @@
                 </a:spcAft>
               </a:pPr>
               <a:r>
-                <a:rPr sz="1120">
+                <a:rPr sz="1160" i="0" b="0">
                   <a:solidFill>
                     <a:srgbClr val="000000">
                       <a:alpha val="100000"/>
@@ -7048,8 +6922,8 @@
           </p:nvSpPr>
           <p:spPr>
             <a:xfrm>
-              <a:off x="1342307" y="2203850"/>
-              <a:ext cx="316150" cy="107582"/>
+              <a:off x="1337035" y="2422866"/>
+              <a:ext cx="327172" cy="107350"/>
             </a:xfrm>
             <a:prstGeom prst="rect">
               <a:avLst/>
@@ -7061,9 +6935,6 @@
             <a:lstStyle/>
             <a:p>
               <a:pPr algn="l" marL="0" marR="0" indent="0">
-                <a:lnSpc>
-                  <a:spcPts val="1120"/>
-                </a:lnSpc>
                 <a:spcBef>
                   <a:spcPts val="0"/>
                 </a:spcBef>
@@ -7072,7 +6943,7 @@
                 </a:spcAft>
               </a:pPr>
               <a:r>
-                <a:rPr sz="1120">
+                <a:rPr sz="1160" i="0" b="0">
                   <a:solidFill>
                     <a:srgbClr val="000000">
                       <a:alpha val="100000"/>
@@ -7094,8 +6965,8 @@
           </p:nvSpPr>
           <p:spPr>
             <a:xfrm>
-              <a:off x="1342307" y="2090155"/>
-              <a:ext cx="316150" cy="107582"/>
+              <a:off x="1337035" y="2279561"/>
+              <a:ext cx="327172" cy="107350"/>
             </a:xfrm>
             <a:prstGeom prst="rect">
               <a:avLst/>
@@ -7107,9 +6978,6 @@
             <a:lstStyle/>
             <a:p>
               <a:pPr algn="l" marL="0" marR="0" indent="0">
-                <a:lnSpc>
-                  <a:spcPts val="1120"/>
-                </a:lnSpc>
                 <a:spcBef>
                   <a:spcPts val="0"/>
                 </a:spcBef>
@@ -7118,7 +6986,7 @@
                 </a:spcAft>
               </a:pPr>
               <a:r>
-                <a:rPr sz="1120">
+                <a:rPr sz="1160" i="0" b="0">
                   <a:solidFill>
                     <a:srgbClr val="000000">
                       <a:alpha val="100000"/>
@@ -7140,8 +7008,8 @@
           </p:nvSpPr>
           <p:spPr>
             <a:xfrm>
-              <a:off x="1342307" y="1976459"/>
-              <a:ext cx="316150" cy="107582"/>
+              <a:off x="1337035" y="2136256"/>
+              <a:ext cx="327172" cy="107350"/>
             </a:xfrm>
             <a:prstGeom prst="rect">
               <a:avLst/>
@@ -7153,9 +7021,6 @@
             <a:lstStyle/>
             <a:p>
               <a:pPr algn="l" marL="0" marR="0" indent="0">
-                <a:lnSpc>
-                  <a:spcPts val="1120"/>
-                </a:lnSpc>
                 <a:spcBef>
                   <a:spcPts val="0"/>
                 </a:spcBef>
@@ -7164,7 +7029,7 @@
                 </a:spcAft>
               </a:pPr>
               <a:r>
-                <a:rPr sz="1120">
+                <a:rPr sz="1160" i="0" b="0">
                   <a:solidFill>
                     <a:srgbClr val="000000">
                       <a:alpha val="100000"/>
@@ -7186,8 +7051,8 @@
           </p:nvSpPr>
           <p:spPr>
             <a:xfrm>
-              <a:off x="1342307" y="1862764"/>
-              <a:ext cx="316150" cy="107582"/>
+              <a:off x="1337035" y="1992951"/>
+              <a:ext cx="327172" cy="107350"/>
             </a:xfrm>
             <a:prstGeom prst="rect">
               <a:avLst/>
@@ -7199,9 +7064,6 @@
             <a:lstStyle/>
             <a:p>
               <a:pPr algn="l" marL="0" marR="0" indent="0">
-                <a:lnSpc>
-                  <a:spcPts val="1120"/>
-                </a:lnSpc>
                 <a:spcBef>
                   <a:spcPts val="0"/>
                 </a:spcBef>
@@ -7210,7 +7072,7 @@
                 </a:spcAft>
               </a:pPr>
               <a:r>
-                <a:rPr sz="1120">
+                <a:rPr sz="1160" i="0" b="0">
                   <a:solidFill>
                     <a:srgbClr val="000000">
                       <a:alpha val="100000"/>
@@ -7232,8 +7094,8 @@
           </p:nvSpPr>
           <p:spPr>
             <a:xfrm>
-              <a:off x="1342307" y="1749069"/>
-              <a:ext cx="316150" cy="107582"/>
+              <a:off x="1337035" y="1849646"/>
+              <a:ext cx="327172" cy="107350"/>
             </a:xfrm>
             <a:prstGeom prst="rect">
               <a:avLst/>
@@ -7245,9 +7107,6 @@
             <a:lstStyle/>
             <a:p>
               <a:pPr algn="l" marL="0" marR="0" indent="0">
-                <a:lnSpc>
-                  <a:spcPts val="1120"/>
-                </a:lnSpc>
                 <a:spcBef>
                   <a:spcPts val="0"/>
                 </a:spcBef>
@@ -7256,7 +7115,7 @@
                 </a:spcAft>
               </a:pPr>
               <a:r>
-                <a:rPr sz="1120">
+                <a:rPr sz="1160" i="0" b="0">
                   <a:solidFill>
                     <a:srgbClr val="000000">
                       <a:alpha val="100000"/>
@@ -7278,8 +7137,8 @@
           </p:nvSpPr>
           <p:spPr>
             <a:xfrm>
-              <a:off x="1342307" y="1635373"/>
-              <a:ext cx="316150" cy="107582"/>
+              <a:off x="1337035" y="1706341"/>
+              <a:ext cx="327172" cy="107350"/>
             </a:xfrm>
             <a:prstGeom prst="rect">
               <a:avLst/>
@@ -7291,9 +7150,6 @@
             <a:lstStyle/>
             <a:p>
               <a:pPr algn="l" marL="0" marR="0" indent="0">
-                <a:lnSpc>
-                  <a:spcPts val="1120"/>
-                </a:lnSpc>
                 <a:spcBef>
                   <a:spcPts val="0"/>
                 </a:spcBef>
@@ -7302,7 +7158,7 @@
                 </a:spcAft>
               </a:pPr>
               <a:r>
-                <a:rPr sz="1120">
+                <a:rPr sz="1160" i="0" b="0">
                   <a:solidFill>
                     <a:srgbClr val="000000">
                       <a:alpha val="100000"/>
@@ -7324,8 +7180,8 @@
           </p:nvSpPr>
           <p:spPr>
             <a:xfrm>
-              <a:off x="1342307" y="1521678"/>
-              <a:ext cx="316150" cy="107582"/>
+              <a:off x="1337035" y="1563036"/>
+              <a:ext cx="327172" cy="107350"/>
             </a:xfrm>
             <a:prstGeom prst="rect">
               <a:avLst/>
@@ -7337,9 +7193,6 @@
             <a:lstStyle/>
             <a:p>
               <a:pPr algn="l" marL="0" marR="0" indent="0">
-                <a:lnSpc>
-                  <a:spcPts val="1120"/>
-                </a:lnSpc>
                 <a:spcBef>
                   <a:spcPts val="0"/>
                 </a:spcBef>
@@ -7348,7 +7201,7 @@
                 </a:spcAft>
               </a:pPr>
               <a:r>
-                <a:rPr sz="1120">
+                <a:rPr sz="1160" i="0" b="0">
                   <a:solidFill>
                     <a:srgbClr val="000000">
                       <a:alpha val="100000"/>
@@ -7370,8 +7223,8 @@
           </p:nvSpPr>
           <p:spPr>
             <a:xfrm>
-              <a:off x="1342307" y="1407982"/>
-              <a:ext cx="316150" cy="107582"/>
+              <a:off x="1337035" y="1419731"/>
+              <a:ext cx="327172" cy="107350"/>
             </a:xfrm>
             <a:prstGeom prst="rect">
               <a:avLst/>
@@ -7383,9 +7236,6 @@
             <a:lstStyle/>
             <a:p>
               <a:pPr algn="l" marL="0" marR="0" indent="0">
-                <a:lnSpc>
-                  <a:spcPts val="1120"/>
-                </a:lnSpc>
                 <a:spcBef>
                   <a:spcPts val="0"/>
                 </a:spcBef>
@@ -7394,7 +7244,7 @@
                 </a:spcAft>
               </a:pPr>
               <a:r>
-                <a:rPr sz="1120">
+                <a:rPr sz="1160" i="0" b="0">
                   <a:solidFill>
                     <a:srgbClr val="000000">
                       <a:alpha val="100000"/>
@@ -7416,8 +7266,8 @@
           </p:nvSpPr>
           <p:spPr>
             <a:xfrm>
-              <a:off x="1251810" y="1294287"/>
-              <a:ext cx="406648" cy="107582"/>
+              <a:off x="1243400" y="1276425"/>
+              <a:ext cx="420806" cy="107350"/>
             </a:xfrm>
             <a:prstGeom prst="rect">
               <a:avLst/>
@@ -7429,9 +7279,6 @@
             <a:lstStyle/>
             <a:p>
               <a:pPr algn="l" marL="0" marR="0" indent="0">
-                <a:lnSpc>
-                  <a:spcPts val="1120"/>
-                </a:lnSpc>
                 <a:spcBef>
                   <a:spcPts val="0"/>
                 </a:spcBef>
@@ -7440,7 +7287,7 @@
                 </a:spcAft>
               </a:pPr>
               <a:r>
-                <a:rPr sz="1120">
+                <a:rPr sz="1160" i="0" b="0">
                   <a:solidFill>
                     <a:srgbClr val="000000">
                       <a:alpha val="100000"/>
@@ -7462,7 +7309,7 @@
           </p:nvSpPr>
           <p:spPr>
             <a:xfrm>
-              <a:off x="1693885" y="2486977"/>
+              <a:off x="1699634" y="2763151"/>
               <a:ext cx="44283" cy="0"/>
             </a:xfrm>
             <a:custGeom>
@@ -7478,7 +7325,447 @@
                 </a:path>
               </a:pathLst>
             </a:custGeom>
-            <a:ln w="17246" cap="flat">
+            <a:ln w="18970" cap="flat">
+              <a:solidFill>
+                <a:srgbClr val="333333">
+                  <a:alpha val="100000"/>
+                </a:srgbClr>
+              </a:solidFill>
+              <a:prstDash val="solid"/>
+              <a:round/>
+            </a:ln>
+          </p:spPr>
+          <p:txBody>
+            <a:bodyPr/>
+            <a:lstStyle/>
+            <a:p/>
+          </p:txBody>
+        </p:sp>
+        <p:sp>
+          <p:nvSpPr>
+            <p:cNvPr id="101" name="pl100"/>
+            <p:cNvSpPr/>
+            <p:nvPr/>
+          </p:nvSpPr>
+          <p:spPr>
+            <a:xfrm>
+              <a:off x="1699634" y="2619846"/>
+              <a:ext cx="44283" cy="0"/>
+            </a:xfrm>
+            <a:custGeom>
+              <a:avLst/>
+              <a:pathLst>
+                <a:path w="44283" h="0">
+                  <a:moveTo>
+                    <a:pt x="0" y="0"/>
+                  </a:moveTo>
+                  <a:lnTo>
+                    <a:pt x="44283" y="0"/>
+                  </a:lnTo>
+                </a:path>
+              </a:pathLst>
+            </a:custGeom>
+            <a:ln w="18970" cap="flat">
+              <a:solidFill>
+                <a:srgbClr val="333333">
+                  <a:alpha val="100000"/>
+                </a:srgbClr>
+              </a:solidFill>
+              <a:prstDash val="solid"/>
+              <a:round/>
+            </a:ln>
+          </p:spPr>
+          <p:txBody>
+            <a:bodyPr/>
+            <a:lstStyle/>
+            <a:p/>
+          </p:txBody>
+        </p:sp>
+        <p:sp>
+          <p:nvSpPr>
+            <p:cNvPr id="102" name="pl101"/>
+            <p:cNvSpPr/>
+            <p:nvPr/>
+          </p:nvSpPr>
+          <p:spPr>
+            <a:xfrm>
+              <a:off x="1699634" y="2476541"/>
+              <a:ext cx="44283" cy="0"/>
+            </a:xfrm>
+            <a:custGeom>
+              <a:avLst/>
+              <a:pathLst>
+                <a:path w="44283" h="0">
+                  <a:moveTo>
+                    <a:pt x="0" y="0"/>
+                  </a:moveTo>
+                  <a:lnTo>
+                    <a:pt x="44283" y="0"/>
+                  </a:lnTo>
+                </a:path>
+              </a:pathLst>
+            </a:custGeom>
+            <a:ln w="18970" cap="flat">
+              <a:solidFill>
+                <a:srgbClr val="333333">
+                  <a:alpha val="100000"/>
+                </a:srgbClr>
+              </a:solidFill>
+              <a:prstDash val="solid"/>
+              <a:round/>
+            </a:ln>
+          </p:spPr>
+          <p:txBody>
+            <a:bodyPr/>
+            <a:lstStyle/>
+            <a:p/>
+          </p:txBody>
+        </p:sp>
+        <p:sp>
+          <p:nvSpPr>
+            <p:cNvPr id="103" name="pl102"/>
+            <p:cNvSpPr/>
+            <p:nvPr/>
+          </p:nvSpPr>
+          <p:spPr>
+            <a:xfrm>
+              <a:off x="1699634" y="2333236"/>
+              <a:ext cx="44283" cy="0"/>
+            </a:xfrm>
+            <a:custGeom>
+              <a:avLst/>
+              <a:pathLst>
+                <a:path w="44283" h="0">
+                  <a:moveTo>
+                    <a:pt x="0" y="0"/>
+                  </a:moveTo>
+                  <a:lnTo>
+                    <a:pt x="44283" y="0"/>
+                  </a:lnTo>
+                </a:path>
+              </a:pathLst>
+            </a:custGeom>
+            <a:ln w="18970" cap="flat">
+              <a:solidFill>
+                <a:srgbClr val="333333">
+                  <a:alpha val="100000"/>
+                </a:srgbClr>
+              </a:solidFill>
+              <a:prstDash val="solid"/>
+              <a:round/>
+            </a:ln>
+          </p:spPr>
+          <p:txBody>
+            <a:bodyPr/>
+            <a:lstStyle/>
+            <a:p/>
+          </p:txBody>
+        </p:sp>
+        <p:sp>
+          <p:nvSpPr>
+            <p:cNvPr id="104" name="pl103"/>
+            <p:cNvSpPr/>
+            <p:nvPr/>
+          </p:nvSpPr>
+          <p:spPr>
+            <a:xfrm>
+              <a:off x="1699634" y="2189931"/>
+              <a:ext cx="44283" cy="0"/>
+            </a:xfrm>
+            <a:custGeom>
+              <a:avLst/>
+              <a:pathLst>
+                <a:path w="44283" h="0">
+                  <a:moveTo>
+                    <a:pt x="0" y="0"/>
+                  </a:moveTo>
+                  <a:lnTo>
+                    <a:pt x="44283" y="0"/>
+                  </a:lnTo>
+                </a:path>
+              </a:pathLst>
+            </a:custGeom>
+            <a:ln w="18970" cap="flat">
+              <a:solidFill>
+                <a:srgbClr val="333333">
+                  <a:alpha val="100000"/>
+                </a:srgbClr>
+              </a:solidFill>
+              <a:prstDash val="solid"/>
+              <a:round/>
+            </a:ln>
+          </p:spPr>
+          <p:txBody>
+            <a:bodyPr/>
+            <a:lstStyle/>
+            <a:p/>
+          </p:txBody>
+        </p:sp>
+        <p:sp>
+          <p:nvSpPr>
+            <p:cNvPr id="105" name="pl104"/>
+            <p:cNvSpPr/>
+            <p:nvPr/>
+          </p:nvSpPr>
+          <p:spPr>
+            <a:xfrm>
+              <a:off x="1699634" y="2046626"/>
+              <a:ext cx="44283" cy="0"/>
+            </a:xfrm>
+            <a:custGeom>
+              <a:avLst/>
+              <a:pathLst>
+                <a:path w="44283" h="0">
+                  <a:moveTo>
+                    <a:pt x="0" y="0"/>
+                  </a:moveTo>
+                  <a:lnTo>
+                    <a:pt x="44283" y="0"/>
+                  </a:lnTo>
+                </a:path>
+              </a:pathLst>
+            </a:custGeom>
+            <a:ln w="18970" cap="flat">
+              <a:solidFill>
+                <a:srgbClr val="333333">
+                  <a:alpha val="100000"/>
+                </a:srgbClr>
+              </a:solidFill>
+              <a:prstDash val="solid"/>
+              <a:round/>
+            </a:ln>
+          </p:spPr>
+          <p:txBody>
+            <a:bodyPr/>
+            <a:lstStyle/>
+            <a:p/>
+          </p:txBody>
+        </p:sp>
+        <p:sp>
+          <p:nvSpPr>
+            <p:cNvPr id="106" name="pl105"/>
+            <p:cNvSpPr/>
+            <p:nvPr/>
+          </p:nvSpPr>
+          <p:spPr>
+            <a:xfrm>
+              <a:off x="1699634" y="1903321"/>
+              <a:ext cx="44283" cy="0"/>
+            </a:xfrm>
+            <a:custGeom>
+              <a:avLst/>
+              <a:pathLst>
+                <a:path w="44283" h="0">
+                  <a:moveTo>
+                    <a:pt x="0" y="0"/>
+                  </a:moveTo>
+                  <a:lnTo>
+                    <a:pt x="44283" y="0"/>
+                  </a:lnTo>
+                </a:path>
+              </a:pathLst>
+            </a:custGeom>
+            <a:ln w="18970" cap="flat">
+              <a:solidFill>
+                <a:srgbClr val="333333">
+                  <a:alpha val="100000"/>
+                </a:srgbClr>
+              </a:solidFill>
+              <a:prstDash val="solid"/>
+              <a:round/>
+            </a:ln>
+          </p:spPr>
+          <p:txBody>
+            <a:bodyPr/>
+            <a:lstStyle/>
+            <a:p/>
+          </p:txBody>
+        </p:sp>
+        <p:sp>
+          <p:nvSpPr>
+            <p:cNvPr id="107" name="pl106"/>
+            <p:cNvSpPr/>
+            <p:nvPr/>
+          </p:nvSpPr>
+          <p:spPr>
+            <a:xfrm>
+              <a:off x="1699634" y="1760016"/>
+              <a:ext cx="44283" cy="0"/>
+            </a:xfrm>
+            <a:custGeom>
+              <a:avLst/>
+              <a:pathLst>
+                <a:path w="44283" h="0">
+                  <a:moveTo>
+                    <a:pt x="0" y="0"/>
+                  </a:moveTo>
+                  <a:lnTo>
+                    <a:pt x="44283" y="0"/>
+                  </a:lnTo>
+                </a:path>
+              </a:pathLst>
+            </a:custGeom>
+            <a:ln w="18970" cap="flat">
+              <a:solidFill>
+                <a:srgbClr val="333333">
+                  <a:alpha val="100000"/>
+                </a:srgbClr>
+              </a:solidFill>
+              <a:prstDash val="solid"/>
+              <a:round/>
+            </a:ln>
+          </p:spPr>
+          <p:txBody>
+            <a:bodyPr/>
+            <a:lstStyle/>
+            <a:p/>
+          </p:txBody>
+        </p:sp>
+        <p:sp>
+          <p:nvSpPr>
+            <p:cNvPr id="108" name="pl107"/>
+            <p:cNvSpPr/>
+            <p:nvPr/>
+          </p:nvSpPr>
+          <p:spPr>
+            <a:xfrm>
+              <a:off x="1699634" y="1616711"/>
+              <a:ext cx="44283" cy="0"/>
+            </a:xfrm>
+            <a:custGeom>
+              <a:avLst/>
+              <a:pathLst>
+                <a:path w="44283" h="0">
+                  <a:moveTo>
+                    <a:pt x="0" y="0"/>
+                  </a:moveTo>
+                  <a:lnTo>
+                    <a:pt x="44283" y="0"/>
+                  </a:lnTo>
+                </a:path>
+              </a:pathLst>
+            </a:custGeom>
+            <a:ln w="18970" cap="flat">
+              <a:solidFill>
+                <a:srgbClr val="333333">
+                  <a:alpha val="100000"/>
+                </a:srgbClr>
+              </a:solidFill>
+              <a:prstDash val="solid"/>
+              <a:round/>
+            </a:ln>
+          </p:spPr>
+          <p:txBody>
+            <a:bodyPr/>
+            <a:lstStyle/>
+            <a:p/>
+          </p:txBody>
+        </p:sp>
+        <p:sp>
+          <p:nvSpPr>
+            <p:cNvPr id="109" name="pl108"/>
+            <p:cNvSpPr/>
+            <p:nvPr/>
+          </p:nvSpPr>
+          <p:spPr>
+            <a:xfrm>
+              <a:off x="1699634" y="1473406"/>
+              <a:ext cx="44283" cy="0"/>
+            </a:xfrm>
+            <a:custGeom>
+              <a:avLst/>
+              <a:pathLst>
+                <a:path w="44283" h="0">
+                  <a:moveTo>
+                    <a:pt x="0" y="0"/>
+                  </a:moveTo>
+                  <a:lnTo>
+                    <a:pt x="44283" y="0"/>
+                  </a:lnTo>
+                </a:path>
+              </a:pathLst>
+            </a:custGeom>
+            <a:ln w="18970" cap="flat">
+              <a:solidFill>
+                <a:srgbClr val="333333">
+                  <a:alpha val="100000"/>
+                </a:srgbClr>
+              </a:solidFill>
+              <a:prstDash val="solid"/>
+              <a:round/>
+            </a:ln>
+          </p:spPr>
+          <p:txBody>
+            <a:bodyPr/>
+            <a:lstStyle/>
+            <a:p/>
+          </p:txBody>
+        </p:sp>
+        <p:sp>
+          <p:nvSpPr>
+            <p:cNvPr id="110" name="pl109"/>
+            <p:cNvSpPr/>
+            <p:nvPr/>
+          </p:nvSpPr>
+          <p:spPr>
+            <a:xfrm>
+              <a:off x="1699634" y="1330101"/>
+              <a:ext cx="44283" cy="0"/>
+            </a:xfrm>
+            <a:custGeom>
+              <a:avLst/>
+              <a:pathLst>
+                <a:path w="44283" h="0">
+                  <a:moveTo>
+                    <a:pt x="0" y="0"/>
+                  </a:moveTo>
+                  <a:lnTo>
+                    <a:pt x="44283" y="0"/>
+                  </a:lnTo>
+                </a:path>
+              </a:pathLst>
+            </a:custGeom>
+            <a:ln w="18970" cap="flat">
+              <a:solidFill>
+                <a:srgbClr val="333333">
+                  <a:alpha val="100000"/>
+                </a:srgbClr>
+              </a:solidFill>
+              <a:prstDash val="solid"/>
+              <a:round/>
+            </a:ln>
+          </p:spPr>
+          <p:txBody>
+            <a:bodyPr/>
+            <a:lstStyle/>
+            <a:p/>
+          </p:txBody>
+        </p:sp>
+        <p:sp>
+          <p:nvSpPr>
+            <p:cNvPr id="111" name="pl110"/>
+            <p:cNvSpPr/>
+            <p:nvPr/>
+          </p:nvSpPr>
+          <p:spPr>
+            <a:xfrm>
+              <a:off x="1743918" y="3126564"/>
+              <a:ext cx="0" cy="1447380"/>
+            </a:xfrm>
+            <a:custGeom>
+              <a:avLst/>
+              <a:pathLst>
+                <a:path w="0" h="1447380">
+                  <a:moveTo>
+                    <a:pt x="0" y="1447380"/>
+                  </a:moveTo>
+                  <a:lnTo>
+                    <a:pt x="0" y="0"/>
+                  </a:lnTo>
+                </a:path>
+              </a:pathLst>
+            </a:custGeom>
+            <a:ln w="18970" cap="flat">
               <a:solidFill>
                 <a:srgbClr val="000000">
                   <a:alpha val="100000"/>
@@ -7496,454 +7783,14 @@
         </p:sp>
         <p:sp>
           <p:nvSpPr>
-            <p:cNvPr id="101" name="pl100"/>
-            <p:cNvSpPr/>
-            <p:nvPr/>
-          </p:nvSpPr>
-          <p:spPr>
-            <a:xfrm>
-              <a:off x="1693885" y="2373282"/>
-              <a:ext cx="44283" cy="0"/>
-            </a:xfrm>
-            <a:custGeom>
-              <a:avLst/>
-              <a:pathLst>
-                <a:path w="44283" h="0">
-                  <a:moveTo>
-                    <a:pt x="0" y="0"/>
-                  </a:moveTo>
-                  <a:lnTo>
-                    <a:pt x="44283" y="0"/>
-                  </a:lnTo>
-                </a:path>
-              </a:pathLst>
-            </a:custGeom>
-            <a:ln w="17246" cap="flat">
-              <a:solidFill>
-                <a:srgbClr val="000000">
-                  <a:alpha val="100000"/>
-                </a:srgbClr>
-              </a:solidFill>
-              <a:prstDash val="solid"/>
-              <a:round/>
-            </a:ln>
-          </p:spPr>
-          <p:txBody>
-            <a:bodyPr/>
-            <a:lstStyle/>
-            <a:p/>
-          </p:txBody>
-        </p:sp>
-        <p:sp>
-          <p:nvSpPr>
-            <p:cNvPr id="102" name="pl101"/>
-            <p:cNvSpPr/>
-            <p:nvPr/>
-          </p:nvSpPr>
-          <p:spPr>
-            <a:xfrm>
-              <a:off x="1693885" y="2259587"/>
-              <a:ext cx="44283" cy="0"/>
-            </a:xfrm>
-            <a:custGeom>
-              <a:avLst/>
-              <a:pathLst>
-                <a:path w="44283" h="0">
-                  <a:moveTo>
-                    <a:pt x="0" y="0"/>
-                  </a:moveTo>
-                  <a:lnTo>
-                    <a:pt x="44283" y="0"/>
-                  </a:lnTo>
-                </a:path>
-              </a:pathLst>
-            </a:custGeom>
-            <a:ln w="17246" cap="flat">
-              <a:solidFill>
-                <a:srgbClr val="000000">
-                  <a:alpha val="100000"/>
-                </a:srgbClr>
-              </a:solidFill>
-              <a:prstDash val="solid"/>
-              <a:round/>
-            </a:ln>
-          </p:spPr>
-          <p:txBody>
-            <a:bodyPr/>
-            <a:lstStyle/>
-            <a:p/>
-          </p:txBody>
-        </p:sp>
-        <p:sp>
-          <p:nvSpPr>
-            <p:cNvPr id="103" name="pl102"/>
-            <p:cNvSpPr/>
-            <p:nvPr/>
-          </p:nvSpPr>
-          <p:spPr>
-            <a:xfrm>
-              <a:off x="1693885" y="2145891"/>
-              <a:ext cx="44283" cy="0"/>
-            </a:xfrm>
-            <a:custGeom>
-              <a:avLst/>
-              <a:pathLst>
-                <a:path w="44283" h="0">
-                  <a:moveTo>
-                    <a:pt x="0" y="0"/>
-                  </a:moveTo>
-                  <a:lnTo>
-                    <a:pt x="44283" y="0"/>
-                  </a:lnTo>
-                </a:path>
-              </a:pathLst>
-            </a:custGeom>
-            <a:ln w="17246" cap="flat">
-              <a:solidFill>
-                <a:srgbClr val="000000">
-                  <a:alpha val="100000"/>
-                </a:srgbClr>
-              </a:solidFill>
-              <a:prstDash val="solid"/>
-              <a:round/>
-            </a:ln>
-          </p:spPr>
-          <p:txBody>
-            <a:bodyPr/>
-            <a:lstStyle/>
-            <a:p/>
-          </p:txBody>
-        </p:sp>
-        <p:sp>
-          <p:nvSpPr>
-            <p:cNvPr id="104" name="pl103"/>
-            <p:cNvSpPr/>
-            <p:nvPr/>
-          </p:nvSpPr>
-          <p:spPr>
-            <a:xfrm>
-              <a:off x="1693885" y="2032196"/>
-              <a:ext cx="44283" cy="0"/>
-            </a:xfrm>
-            <a:custGeom>
-              <a:avLst/>
-              <a:pathLst>
-                <a:path w="44283" h="0">
-                  <a:moveTo>
-                    <a:pt x="0" y="0"/>
-                  </a:moveTo>
-                  <a:lnTo>
-                    <a:pt x="44283" y="0"/>
-                  </a:lnTo>
-                </a:path>
-              </a:pathLst>
-            </a:custGeom>
-            <a:ln w="17246" cap="flat">
-              <a:solidFill>
-                <a:srgbClr val="000000">
-                  <a:alpha val="100000"/>
-                </a:srgbClr>
-              </a:solidFill>
-              <a:prstDash val="solid"/>
-              <a:round/>
-            </a:ln>
-          </p:spPr>
-          <p:txBody>
-            <a:bodyPr/>
-            <a:lstStyle/>
-            <a:p/>
-          </p:txBody>
-        </p:sp>
-        <p:sp>
-          <p:nvSpPr>
-            <p:cNvPr id="105" name="pl104"/>
-            <p:cNvSpPr/>
-            <p:nvPr/>
-          </p:nvSpPr>
-          <p:spPr>
-            <a:xfrm>
-              <a:off x="1693885" y="1918500"/>
-              <a:ext cx="44283" cy="0"/>
-            </a:xfrm>
-            <a:custGeom>
-              <a:avLst/>
-              <a:pathLst>
-                <a:path w="44283" h="0">
-                  <a:moveTo>
-                    <a:pt x="0" y="0"/>
-                  </a:moveTo>
-                  <a:lnTo>
-                    <a:pt x="44283" y="0"/>
-                  </a:lnTo>
-                </a:path>
-              </a:pathLst>
-            </a:custGeom>
-            <a:ln w="17246" cap="flat">
-              <a:solidFill>
-                <a:srgbClr val="000000">
-                  <a:alpha val="100000"/>
-                </a:srgbClr>
-              </a:solidFill>
-              <a:prstDash val="solid"/>
-              <a:round/>
-            </a:ln>
-          </p:spPr>
-          <p:txBody>
-            <a:bodyPr/>
-            <a:lstStyle/>
-            <a:p/>
-          </p:txBody>
-        </p:sp>
-        <p:sp>
-          <p:nvSpPr>
-            <p:cNvPr id="106" name="pl105"/>
-            <p:cNvSpPr/>
-            <p:nvPr/>
-          </p:nvSpPr>
-          <p:spPr>
-            <a:xfrm>
-              <a:off x="1693885" y="1804805"/>
-              <a:ext cx="44283" cy="0"/>
-            </a:xfrm>
-            <a:custGeom>
-              <a:avLst/>
-              <a:pathLst>
-                <a:path w="44283" h="0">
-                  <a:moveTo>
-                    <a:pt x="0" y="0"/>
-                  </a:moveTo>
-                  <a:lnTo>
-                    <a:pt x="44283" y="0"/>
-                  </a:lnTo>
-                </a:path>
-              </a:pathLst>
-            </a:custGeom>
-            <a:ln w="17246" cap="flat">
-              <a:solidFill>
-                <a:srgbClr val="000000">
-                  <a:alpha val="100000"/>
-                </a:srgbClr>
-              </a:solidFill>
-              <a:prstDash val="solid"/>
-              <a:round/>
-            </a:ln>
-          </p:spPr>
-          <p:txBody>
-            <a:bodyPr/>
-            <a:lstStyle/>
-            <a:p/>
-          </p:txBody>
-        </p:sp>
-        <p:sp>
-          <p:nvSpPr>
-            <p:cNvPr id="107" name="pl106"/>
-            <p:cNvSpPr/>
-            <p:nvPr/>
-          </p:nvSpPr>
-          <p:spPr>
-            <a:xfrm>
-              <a:off x="1693885" y="1691109"/>
-              <a:ext cx="44283" cy="0"/>
-            </a:xfrm>
-            <a:custGeom>
-              <a:avLst/>
-              <a:pathLst>
-                <a:path w="44283" h="0">
-                  <a:moveTo>
-                    <a:pt x="0" y="0"/>
-                  </a:moveTo>
-                  <a:lnTo>
-                    <a:pt x="44283" y="0"/>
-                  </a:lnTo>
-                </a:path>
-              </a:pathLst>
-            </a:custGeom>
-            <a:ln w="17246" cap="flat">
-              <a:solidFill>
-                <a:srgbClr val="000000">
-                  <a:alpha val="100000"/>
-                </a:srgbClr>
-              </a:solidFill>
-              <a:prstDash val="solid"/>
-              <a:round/>
-            </a:ln>
-          </p:spPr>
-          <p:txBody>
-            <a:bodyPr/>
-            <a:lstStyle/>
-            <a:p/>
-          </p:txBody>
-        </p:sp>
-        <p:sp>
-          <p:nvSpPr>
-            <p:cNvPr id="108" name="pl107"/>
-            <p:cNvSpPr/>
-            <p:nvPr/>
-          </p:nvSpPr>
-          <p:spPr>
-            <a:xfrm>
-              <a:off x="1693885" y="1577414"/>
-              <a:ext cx="44283" cy="0"/>
-            </a:xfrm>
-            <a:custGeom>
-              <a:avLst/>
-              <a:pathLst>
-                <a:path w="44283" h="0">
-                  <a:moveTo>
-                    <a:pt x="0" y="0"/>
-                  </a:moveTo>
-                  <a:lnTo>
-                    <a:pt x="44283" y="0"/>
-                  </a:lnTo>
-                </a:path>
-              </a:pathLst>
-            </a:custGeom>
-            <a:ln w="17246" cap="flat">
-              <a:solidFill>
-                <a:srgbClr val="000000">
-                  <a:alpha val="100000"/>
-                </a:srgbClr>
-              </a:solidFill>
-              <a:prstDash val="solid"/>
-              <a:round/>
-            </a:ln>
-          </p:spPr>
-          <p:txBody>
-            <a:bodyPr/>
-            <a:lstStyle/>
-            <a:p/>
-          </p:txBody>
-        </p:sp>
-        <p:sp>
-          <p:nvSpPr>
-            <p:cNvPr id="109" name="pl108"/>
-            <p:cNvSpPr/>
-            <p:nvPr/>
-          </p:nvSpPr>
-          <p:spPr>
-            <a:xfrm>
-              <a:off x="1693885" y="1463718"/>
-              <a:ext cx="44283" cy="0"/>
-            </a:xfrm>
-            <a:custGeom>
-              <a:avLst/>
-              <a:pathLst>
-                <a:path w="44283" h="0">
-                  <a:moveTo>
-                    <a:pt x="0" y="0"/>
-                  </a:moveTo>
-                  <a:lnTo>
-                    <a:pt x="44283" y="0"/>
-                  </a:lnTo>
-                </a:path>
-              </a:pathLst>
-            </a:custGeom>
-            <a:ln w="17246" cap="flat">
-              <a:solidFill>
-                <a:srgbClr val="000000">
-                  <a:alpha val="100000"/>
-                </a:srgbClr>
-              </a:solidFill>
-              <a:prstDash val="solid"/>
-              <a:round/>
-            </a:ln>
-          </p:spPr>
-          <p:txBody>
-            <a:bodyPr/>
-            <a:lstStyle/>
-            <a:p/>
-          </p:txBody>
-        </p:sp>
-        <p:sp>
-          <p:nvSpPr>
-            <p:cNvPr id="110" name="pl109"/>
-            <p:cNvSpPr/>
-            <p:nvPr/>
-          </p:nvSpPr>
-          <p:spPr>
-            <a:xfrm>
-              <a:off x="1693885" y="1350023"/>
-              <a:ext cx="44283" cy="0"/>
-            </a:xfrm>
-            <a:custGeom>
-              <a:avLst/>
-              <a:pathLst>
-                <a:path w="44283" h="0">
-                  <a:moveTo>
-                    <a:pt x="0" y="0"/>
-                  </a:moveTo>
-                  <a:lnTo>
-                    <a:pt x="44283" y="0"/>
-                  </a:lnTo>
-                </a:path>
-              </a:pathLst>
-            </a:custGeom>
-            <a:ln w="17246" cap="flat">
-              <a:solidFill>
-                <a:srgbClr val="000000">
-                  <a:alpha val="100000"/>
-                </a:srgbClr>
-              </a:solidFill>
-              <a:prstDash val="solid"/>
-              <a:round/>
-            </a:ln>
-          </p:spPr>
-          <p:txBody>
-            <a:bodyPr/>
-            <a:lstStyle/>
-            <a:p/>
-          </p:txBody>
-        </p:sp>
-        <p:sp>
-          <p:nvSpPr>
-            <p:cNvPr id="111" name="pl110"/>
-            <p:cNvSpPr/>
-            <p:nvPr/>
-          </p:nvSpPr>
-          <p:spPr>
-            <a:xfrm>
-              <a:off x="1738169" y="2850534"/>
-              <a:ext cx="0" cy="1171063"/>
-            </a:xfrm>
-            <a:custGeom>
-              <a:avLst/>
-              <a:pathLst>
-                <a:path w="0" h="1171063">
-                  <a:moveTo>
-                    <a:pt x="0" y="1171063"/>
-                  </a:moveTo>
-                  <a:lnTo>
-                    <a:pt x="0" y="0"/>
-                  </a:lnTo>
-                </a:path>
-              </a:pathLst>
-            </a:custGeom>
-            <a:ln w="17246" cap="flat">
-              <a:solidFill>
-                <a:srgbClr val="000000">
-                  <a:alpha val="100000"/>
-                </a:srgbClr>
-              </a:solidFill>
-              <a:prstDash val="solid"/>
-              <a:round/>
-            </a:ln>
-          </p:spPr>
-          <p:txBody>
-            <a:bodyPr/>
-            <a:lstStyle/>
-            <a:p/>
-          </p:txBody>
-        </p:sp>
-        <p:sp>
-          <p:nvSpPr>
             <p:cNvPr id="112" name="tx111"/>
             <p:cNvSpPr/>
             <p:nvPr/>
           </p:nvSpPr>
           <p:spPr>
             <a:xfrm>
-              <a:off x="1432804" y="3965862"/>
-              <a:ext cx="225653" cy="107582"/>
+              <a:off x="1430669" y="4520270"/>
+              <a:ext cx="233537" cy="107350"/>
             </a:xfrm>
             <a:prstGeom prst="rect">
               <a:avLst/>
@@ -7955,9 +7802,6 @@
             <a:lstStyle/>
             <a:p>
               <a:pPr algn="l" marL="0" marR="0" indent="0">
-                <a:lnSpc>
-                  <a:spcPts val="1120"/>
-                </a:lnSpc>
                 <a:spcBef>
                   <a:spcPts val="0"/>
                 </a:spcBef>
@@ -7966,7 +7810,7 @@
                 </a:spcAft>
               </a:pPr>
               <a:r>
-                <a:rPr sz="1120">
+                <a:rPr sz="1160" i="0" b="0">
                   <a:solidFill>
                     <a:srgbClr val="000000">
                       <a:alpha val="100000"/>
@@ -7988,8 +7832,8 @@
           </p:nvSpPr>
           <p:spPr>
             <a:xfrm>
-              <a:off x="1342307" y="3852166"/>
-              <a:ext cx="316150" cy="107582"/>
+              <a:off x="1337035" y="4376964"/>
+              <a:ext cx="327172" cy="107350"/>
             </a:xfrm>
             <a:prstGeom prst="rect">
               <a:avLst/>
@@ -8001,9 +7845,6 @@
             <a:lstStyle/>
             <a:p>
               <a:pPr algn="l" marL="0" marR="0" indent="0">
-                <a:lnSpc>
-                  <a:spcPts val="1120"/>
-                </a:lnSpc>
                 <a:spcBef>
                   <a:spcPts val="0"/>
                 </a:spcBef>
@@ -8012,7 +7853,7 @@
                 </a:spcAft>
               </a:pPr>
               <a:r>
-                <a:rPr sz="1120">
+                <a:rPr sz="1160" i="0" b="0">
                   <a:solidFill>
                     <a:srgbClr val="000000">
                       <a:alpha val="100000"/>
@@ -8034,8 +7875,8 @@
           </p:nvSpPr>
           <p:spPr>
             <a:xfrm>
-              <a:off x="1342307" y="3738471"/>
-              <a:ext cx="316150" cy="107582"/>
+              <a:off x="1337035" y="4233659"/>
+              <a:ext cx="327172" cy="107350"/>
             </a:xfrm>
             <a:prstGeom prst="rect">
               <a:avLst/>
@@ -8047,9 +7888,6 @@
             <a:lstStyle/>
             <a:p>
               <a:pPr algn="l" marL="0" marR="0" indent="0">
-                <a:lnSpc>
-                  <a:spcPts val="1120"/>
-                </a:lnSpc>
                 <a:spcBef>
                   <a:spcPts val="0"/>
                 </a:spcBef>
@@ -8058,7 +7896,7 @@
                 </a:spcAft>
               </a:pPr>
               <a:r>
-                <a:rPr sz="1120">
+                <a:rPr sz="1160" i="0" b="0">
                   <a:solidFill>
                     <a:srgbClr val="000000">
                       <a:alpha val="100000"/>
@@ -8080,8 +7918,8 @@
           </p:nvSpPr>
           <p:spPr>
             <a:xfrm>
-              <a:off x="1342307" y="3624775"/>
-              <a:ext cx="316150" cy="107582"/>
+              <a:off x="1337035" y="4090354"/>
+              <a:ext cx="327172" cy="107350"/>
             </a:xfrm>
             <a:prstGeom prst="rect">
               <a:avLst/>
@@ -8093,9 +7931,6 @@
             <a:lstStyle/>
             <a:p>
               <a:pPr algn="l" marL="0" marR="0" indent="0">
-                <a:lnSpc>
-                  <a:spcPts val="1120"/>
-                </a:lnSpc>
                 <a:spcBef>
                   <a:spcPts val="0"/>
                 </a:spcBef>
@@ -8104,7 +7939,7 @@
                 </a:spcAft>
               </a:pPr>
               <a:r>
-                <a:rPr sz="1120">
+                <a:rPr sz="1160" i="0" b="0">
                   <a:solidFill>
                     <a:srgbClr val="000000">
                       <a:alpha val="100000"/>
@@ -8126,8 +7961,8 @@
           </p:nvSpPr>
           <p:spPr>
             <a:xfrm>
-              <a:off x="1342307" y="3511080"/>
-              <a:ext cx="316150" cy="107582"/>
+              <a:off x="1337035" y="3947049"/>
+              <a:ext cx="327172" cy="107350"/>
             </a:xfrm>
             <a:prstGeom prst="rect">
               <a:avLst/>
@@ -8139,9 +7974,6 @@
             <a:lstStyle/>
             <a:p>
               <a:pPr algn="l" marL="0" marR="0" indent="0">
-                <a:lnSpc>
-                  <a:spcPts val="1120"/>
-                </a:lnSpc>
                 <a:spcBef>
                   <a:spcPts val="0"/>
                 </a:spcBef>
@@ -8150,7 +7982,7 @@
                 </a:spcAft>
               </a:pPr>
               <a:r>
-                <a:rPr sz="1120">
+                <a:rPr sz="1160" i="0" b="0">
                   <a:solidFill>
                     <a:srgbClr val="000000">
                       <a:alpha val="100000"/>
@@ -8172,8 +8004,8 @@
           </p:nvSpPr>
           <p:spPr>
             <a:xfrm>
-              <a:off x="1342307" y="3397384"/>
-              <a:ext cx="316150" cy="107582"/>
+              <a:off x="1337035" y="3803744"/>
+              <a:ext cx="327172" cy="107350"/>
             </a:xfrm>
             <a:prstGeom prst="rect">
               <a:avLst/>
@@ -8185,9 +8017,6 @@
             <a:lstStyle/>
             <a:p>
               <a:pPr algn="l" marL="0" marR="0" indent="0">
-                <a:lnSpc>
-                  <a:spcPts val="1120"/>
-                </a:lnSpc>
                 <a:spcBef>
                   <a:spcPts val="0"/>
                 </a:spcBef>
@@ -8196,7 +8025,7 @@
                 </a:spcAft>
               </a:pPr>
               <a:r>
-                <a:rPr sz="1120">
+                <a:rPr sz="1160" i="0" b="0">
                   <a:solidFill>
                     <a:srgbClr val="000000">
                       <a:alpha val="100000"/>
@@ -8218,8 +8047,8 @@
           </p:nvSpPr>
           <p:spPr>
             <a:xfrm>
-              <a:off x="1342307" y="3283689"/>
-              <a:ext cx="316150" cy="107582"/>
+              <a:off x="1337035" y="3660439"/>
+              <a:ext cx="327172" cy="107350"/>
             </a:xfrm>
             <a:prstGeom prst="rect">
               <a:avLst/>
@@ -8231,9 +8060,6 @@
             <a:lstStyle/>
             <a:p>
               <a:pPr algn="l" marL="0" marR="0" indent="0">
-                <a:lnSpc>
-                  <a:spcPts val="1120"/>
-                </a:lnSpc>
                 <a:spcBef>
                   <a:spcPts val="0"/>
                 </a:spcBef>
@@ -8242,7 +8068,7 @@
                 </a:spcAft>
               </a:pPr>
               <a:r>
-                <a:rPr sz="1120">
+                <a:rPr sz="1160" i="0" b="0">
                   <a:solidFill>
                     <a:srgbClr val="000000">
                       <a:alpha val="100000"/>
@@ -8264,8 +8090,8 @@
           </p:nvSpPr>
           <p:spPr>
             <a:xfrm>
-              <a:off x="1342307" y="3169993"/>
-              <a:ext cx="316150" cy="107582"/>
+              <a:off x="1337035" y="3517134"/>
+              <a:ext cx="327172" cy="107350"/>
             </a:xfrm>
             <a:prstGeom prst="rect">
               <a:avLst/>
@@ -8277,9 +8103,6 @@
             <a:lstStyle/>
             <a:p>
               <a:pPr algn="l" marL="0" marR="0" indent="0">
-                <a:lnSpc>
-                  <a:spcPts val="1120"/>
-                </a:lnSpc>
                 <a:spcBef>
                   <a:spcPts val="0"/>
                 </a:spcBef>
@@ -8288,7 +8111,7 @@
                 </a:spcAft>
               </a:pPr>
               <a:r>
-                <a:rPr sz="1120">
+                <a:rPr sz="1160" i="0" b="0">
                   <a:solidFill>
                     <a:srgbClr val="000000">
                       <a:alpha val="100000"/>
@@ -8310,8 +8133,8 @@
           </p:nvSpPr>
           <p:spPr>
             <a:xfrm>
-              <a:off x="1342307" y="3056298"/>
-              <a:ext cx="316150" cy="107582"/>
+              <a:off x="1337035" y="3373829"/>
+              <a:ext cx="327172" cy="107350"/>
             </a:xfrm>
             <a:prstGeom prst="rect">
               <a:avLst/>
@@ -8323,9 +8146,6 @@
             <a:lstStyle/>
             <a:p>
               <a:pPr algn="l" marL="0" marR="0" indent="0">
-                <a:lnSpc>
-                  <a:spcPts val="1120"/>
-                </a:lnSpc>
                 <a:spcBef>
                   <a:spcPts val="0"/>
                 </a:spcBef>
@@ -8334,7 +8154,7 @@
                 </a:spcAft>
               </a:pPr>
               <a:r>
-                <a:rPr sz="1120">
+                <a:rPr sz="1160" i="0" b="0">
                   <a:solidFill>
                     <a:srgbClr val="000000">
                       <a:alpha val="100000"/>
@@ -8356,8 +8176,8 @@
           </p:nvSpPr>
           <p:spPr>
             <a:xfrm>
-              <a:off x="1342307" y="2942602"/>
-              <a:ext cx="316150" cy="107582"/>
+              <a:off x="1337035" y="3230524"/>
+              <a:ext cx="327172" cy="107350"/>
             </a:xfrm>
             <a:prstGeom prst="rect">
               <a:avLst/>
@@ -8369,9 +8189,6 @@
             <a:lstStyle/>
             <a:p>
               <a:pPr algn="l" marL="0" marR="0" indent="0">
-                <a:lnSpc>
-                  <a:spcPts val="1120"/>
-                </a:lnSpc>
                 <a:spcBef>
                   <a:spcPts val="0"/>
                 </a:spcBef>
@@ -8380,7 +8197,7 @@
                 </a:spcAft>
               </a:pPr>
               <a:r>
-                <a:rPr sz="1120">
+                <a:rPr sz="1160" i="0" b="0">
                   <a:solidFill>
                     <a:srgbClr val="000000">
                       <a:alpha val="100000"/>
@@ -8402,8 +8219,8 @@
           </p:nvSpPr>
           <p:spPr>
             <a:xfrm>
-              <a:off x="1251810" y="2828907"/>
-              <a:ext cx="406648" cy="107582"/>
+              <a:off x="1243400" y="3087219"/>
+              <a:ext cx="420806" cy="107350"/>
             </a:xfrm>
             <a:prstGeom prst="rect">
               <a:avLst/>
@@ -8415,9 +8232,6 @@
             <a:lstStyle/>
             <a:p>
               <a:pPr algn="l" marL="0" marR="0" indent="0">
-                <a:lnSpc>
-                  <a:spcPts val="1120"/>
-                </a:lnSpc>
                 <a:spcBef>
                   <a:spcPts val="0"/>
                 </a:spcBef>
@@ -8426,7 +8240,7 @@
                 </a:spcAft>
               </a:pPr>
               <a:r>
-                <a:rPr sz="1120">
+                <a:rPr sz="1160" i="0" b="0">
                   <a:solidFill>
                     <a:srgbClr val="000000">
                       <a:alpha val="100000"/>
@@ -8448,7 +8262,7 @@
           </p:nvSpPr>
           <p:spPr>
             <a:xfrm>
-              <a:off x="1693885" y="4021598"/>
+              <a:off x="1699634" y="4573945"/>
               <a:ext cx="44283" cy="0"/>
             </a:xfrm>
             <a:custGeom>
@@ -8464,9 +8278,9 @@
                 </a:path>
               </a:pathLst>
             </a:custGeom>
-            <a:ln w="17246" cap="flat">
+            <a:ln w="18970" cap="flat">
               <a:solidFill>
-                <a:srgbClr val="000000">
+                <a:srgbClr val="333333">
                   <a:alpha val="100000"/>
                 </a:srgbClr>
               </a:solidFill>
@@ -8488,7 +8302,7 @@
           </p:nvSpPr>
           <p:spPr>
             <a:xfrm>
-              <a:off x="1693885" y="3907902"/>
+              <a:off x="1699634" y="4430640"/>
               <a:ext cx="44283" cy="0"/>
             </a:xfrm>
             <a:custGeom>
@@ -8504,9 +8318,9 @@
                 </a:path>
               </a:pathLst>
             </a:custGeom>
-            <a:ln w="17246" cap="flat">
+            <a:ln w="18970" cap="flat">
               <a:solidFill>
-                <a:srgbClr val="000000">
+                <a:srgbClr val="333333">
                   <a:alpha val="100000"/>
                 </a:srgbClr>
               </a:solidFill>
@@ -8528,7 +8342,7 @@
           </p:nvSpPr>
           <p:spPr>
             <a:xfrm>
-              <a:off x="1693885" y="3794207"/>
+              <a:off x="1699634" y="4287335"/>
               <a:ext cx="44283" cy="0"/>
             </a:xfrm>
             <a:custGeom>
@@ -8544,9 +8358,9 @@
                 </a:path>
               </a:pathLst>
             </a:custGeom>
-            <a:ln w="17246" cap="flat">
+            <a:ln w="18970" cap="flat">
               <a:solidFill>
-                <a:srgbClr val="000000">
+                <a:srgbClr val="333333">
                   <a:alpha val="100000"/>
                 </a:srgbClr>
               </a:solidFill>
@@ -8568,7 +8382,7 @@
           </p:nvSpPr>
           <p:spPr>
             <a:xfrm>
-              <a:off x="1693885" y="3680511"/>
+              <a:off x="1699634" y="4144030"/>
               <a:ext cx="44283" cy="0"/>
             </a:xfrm>
             <a:custGeom>
@@ -8584,9 +8398,9 @@
                 </a:path>
               </a:pathLst>
             </a:custGeom>
-            <a:ln w="17246" cap="flat">
+            <a:ln w="18970" cap="flat">
               <a:solidFill>
-                <a:srgbClr val="000000">
+                <a:srgbClr val="333333">
                   <a:alpha val="100000"/>
                 </a:srgbClr>
               </a:solidFill>
@@ -8608,7 +8422,7 @@
           </p:nvSpPr>
           <p:spPr>
             <a:xfrm>
-              <a:off x="1693885" y="3566816"/>
+              <a:off x="1699634" y="4000725"/>
               <a:ext cx="44283" cy="0"/>
             </a:xfrm>
             <a:custGeom>
@@ -8624,9 +8438,9 @@
                 </a:path>
               </a:pathLst>
             </a:custGeom>
-            <a:ln w="17246" cap="flat">
+            <a:ln w="18970" cap="flat">
               <a:solidFill>
-                <a:srgbClr val="000000">
+                <a:srgbClr val="333333">
                   <a:alpha val="100000"/>
                 </a:srgbClr>
               </a:solidFill>
@@ -8648,7 +8462,7 @@
           </p:nvSpPr>
           <p:spPr>
             <a:xfrm>
-              <a:off x="1693885" y="3453120"/>
+              <a:off x="1699634" y="3857420"/>
               <a:ext cx="44283" cy="0"/>
             </a:xfrm>
             <a:custGeom>
@@ -8664,9 +8478,9 @@
                 </a:path>
               </a:pathLst>
             </a:custGeom>
-            <a:ln w="17246" cap="flat">
+            <a:ln w="18970" cap="flat">
               <a:solidFill>
-                <a:srgbClr val="000000">
+                <a:srgbClr val="333333">
                   <a:alpha val="100000"/>
                 </a:srgbClr>
               </a:solidFill>
@@ -8688,7 +8502,7 @@
           </p:nvSpPr>
           <p:spPr>
             <a:xfrm>
-              <a:off x="1693885" y="3339425"/>
+              <a:off x="1699634" y="3714115"/>
               <a:ext cx="44283" cy="0"/>
             </a:xfrm>
             <a:custGeom>
@@ -8704,9 +8518,9 @@
                 </a:path>
               </a:pathLst>
             </a:custGeom>
-            <a:ln w="17246" cap="flat">
+            <a:ln w="18970" cap="flat">
               <a:solidFill>
-                <a:srgbClr val="000000">
+                <a:srgbClr val="333333">
                   <a:alpha val="100000"/>
                 </a:srgbClr>
               </a:solidFill>
@@ -8728,7 +8542,7 @@
           </p:nvSpPr>
           <p:spPr>
             <a:xfrm>
-              <a:off x="1693885" y="3225729"/>
+              <a:off x="1699634" y="3570810"/>
               <a:ext cx="44283" cy="0"/>
             </a:xfrm>
             <a:custGeom>
@@ -8744,9 +8558,9 @@
                 </a:path>
               </a:pathLst>
             </a:custGeom>
-            <a:ln w="17246" cap="flat">
+            <a:ln w="18970" cap="flat">
               <a:solidFill>
-                <a:srgbClr val="000000">
+                <a:srgbClr val="333333">
                   <a:alpha val="100000"/>
                 </a:srgbClr>
               </a:solidFill>
@@ -8768,7 +8582,7 @@
           </p:nvSpPr>
           <p:spPr>
             <a:xfrm>
-              <a:off x="1693885" y="3112034"/>
+              <a:off x="1699634" y="3427505"/>
               <a:ext cx="44283" cy="0"/>
             </a:xfrm>
             <a:custGeom>
@@ -8784,9 +8598,9 @@
                 </a:path>
               </a:pathLst>
             </a:custGeom>
-            <a:ln w="17246" cap="flat">
+            <a:ln w="18970" cap="flat">
               <a:solidFill>
-                <a:srgbClr val="000000">
+                <a:srgbClr val="333333">
                   <a:alpha val="100000"/>
                 </a:srgbClr>
               </a:solidFill>
@@ -8808,7 +8622,7 @@
           </p:nvSpPr>
           <p:spPr>
             <a:xfrm>
-              <a:off x="1693885" y="2998339"/>
+              <a:off x="1699634" y="3284200"/>
               <a:ext cx="44283" cy="0"/>
             </a:xfrm>
             <a:custGeom>
@@ -8824,9 +8638,9 @@
                 </a:path>
               </a:pathLst>
             </a:custGeom>
-            <a:ln w="17246" cap="flat">
+            <a:ln w="18970" cap="flat">
               <a:solidFill>
-                <a:srgbClr val="000000">
+                <a:srgbClr val="333333">
                   <a:alpha val="100000"/>
                 </a:srgbClr>
               </a:solidFill>
@@ -8848,7 +8662,7 @@
           </p:nvSpPr>
           <p:spPr>
             <a:xfrm>
-              <a:off x="1693885" y="2884643"/>
+              <a:off x="1699634" y="3140895"/>
               <a:ext cx="44283" cy="0"/>
             </a:xfrm>
             <a:custGeom>
@@ -8864,9 +8678,9 @@
                 </a:path>
               </a:pathLst>
             </a:custGeom>
-            <a:ln w="17246" cap="flat">
+            <a:ln w="18970" cap="flat">
               <a:solidFill>
-                <a:srgbClr val="000000">
+                <a:srgbClr val="333333">
                   <a:alpha val="100000"/>
                 </a:srgbClr>
               </a:solidFill>
@@ -8888,8 +8702,8 @@
           </p:nvSpPr>
           <p:spPr>
             <a:xfrm>
-              <a:off x="3444610" y="4338047"/>
-              <a:ext cx="364021" cy="129616"/>
+              <a:off x="3371613" y="4892104"/>
+              <a:ext cx="349666" cy="123078"/>
             </a:xfrm>
             <a:prstGeom prst="rect">
               <a:avLst/>
@@ -8901,9 +8715,6 @@
             <a:lstStyle/>
             <a:p>
               <a:pPr algn="l" marL="0" marR="0" indent="0">
-                <a:lnSpc>
-                  <a:spcPts val="1400"/>
-                </a:lnSpc>
                 <a:spcBef>
                   <a:spcPts val="0"/>
                 </a:spcBef>
@@ -8912,7 +8723,7 @@
                 </a:spcAft>
               </a:pPr>
               <a:r>
-                <a:rPr sz="1400" b="1">
+                <a:rPr sz="1330" i="0" b="1">
                   <a:solidFill>
                     <a:srgbClr val="000000">
                       <a:alpha val="100000"/>
@@ -8934,8 +8745,8 @@
           </p:nvSpPr>
           <p:spPr>
             <a:xfrm rot="-5400000">
-              <a:off x="58684" y="2582026"/>
-              <a:ext cx="1976288" cy="173459"/>
+              <a:off x="130228" y="2883318"/>
+              <a:ext cx="1874245" cy="123078"/>
             </a:xfrm>
             <a:prstGeom prst="rect">
               <a:avLst/>
@@ -8947,9 +8758,6 @@
             <a:lstStyle/>
             <a:p>
               <a:pPr algn="l" marL="0" marR="0" indent="0">
-                <a:lnSpc>
-                  <a:spcPts val="1400"/>
-                </a:lnSpc>
                 <a:spcBef>
                   <a:spcPts val="0"/>
                 </a:spcBef>
@@ -8958,7 +8766,7 @@
                 </a:spcAft>
               </a:pPr>
               <a:r>
-                <a:rPr sz="1400" b="1">
+                <a:rPr sz="1330" i="0" b="1">
                   <a:solidFill>
                     <a:srgbClr val="000000">
                       <a:alpha val="100000"/>
@@ -8967,7 +8775,7 @@
                   <a:latin typeface="DejaVu Sans"/>
                   <a:cs typeface="DejaVu Sans"/>
                 </a:rPr>
-                <a:t>Survival Probability</a:t>
+                <a:t>Survival probability</a:t>
               </a:r>
             </a:p>
           </p:txBody>
@@ -8980,8 +8788,8 @@
           </p:nvSpPr>
           <p:spPr>
             <a:xfrm>
-              <a:off x="5692207" y="1581072"/>
-              <a:ext cx="582066" cy="2175368"/>
+              <a:off x="5526110" y="1703713"/>
+              <a:ext cx="565283" cy="2482288"/>
             </a:xfrm>
             <a:prstGeom prst="rect">
               <a:avLst/>
@@ -9000,70 +8808,24 @@
         </p:sp>
         <p:sp>
           <p:nvSpPr>
-            <p:cNvPr id="137" name="tx136"/>
-            <p:cNvSpPr/>
-            <p:nvPr/>
-          </p:nvSpPr>
-          <p:spPr>
-            <a:xfrm>
-              <a:off x="5692207" y="1590076"/>
-              <a:ext cx="582066" cy="117946"/>
-            </a:xfrm>
-            <a:prstGeom prst="rect">
-              <a:avLst/>
-            </a:prstGeom>
-            <a:noFill/>
-          </p:spPr>
-          <p:txBody>
-            <a:bodyPr lIns="0" rIns="0" tIns="0" bIns="0" anchorCtr="1" anchor="ctr" wrap="none"/>
-            <a:lstStyle/>
-            <a:p>
-              <a:pPr algn="l" marL="0" marR="0" indent="0">
-                <a:lnSpc>
-                  <a:spcPts val="1200"/>
-                </a:lnSpc>
-                <a:spcBef>
-                  <a:spcPts val="0"/>
-                </a:spcBef>
-                <a:spcAft>
-                  <a:spcPts val="0"/>
-                </a:spcAft>
-              </a:pPr>
-              <a:r>
-                <a:rPr sz="1200">
-                  <a:solidFill>
-                    <a:srgbClr val="000000">
-                      <a:alpha val="100000"/>
-                    </a:srgbClr>
-                  </a:solidFill>
-                  <a:latin typeface="DejaVu Sans"/>
-                  <a:cs typeface="DejaVu Sans"/>
-                </a:rPr>
-                <a:t>Tank.ID</a:t>
-              </a:r>
-            </a:p>
-          </p:txBody>
-        </p:sp>
-        <p:sp>
-          <p:nvSpPr>
-            <p:cNvPr id="138" name="pl137"/>
-            <p:cNvSpPr/>
-            <p:nvPr/>
-          </p:nvSpPr>
-          <p:spPr>
-            <a:xfrm>
-              <a:off x="5708407" y="1893440"/>
-              <a:ext cx="129600" cy="0"/>
+            <p:cNvPr id="137" name="pl136"/>
+            <p:cNvSpPr/>
+            <p:nvPr/>
+          </p:nvSpPr>
+          <p:spPr>
+            <a:xfrm>
+              <a:off x="5551310" y="1807142"/>
+              <a:ext cx="201599" cy="0"/>
             </a:xfrm>
             <a:custGeom>
               <a:avLst/>
               <a:pathLst>
-                <a:path w="129600" h="0">
+                <a:path w="201599" h="0">
                   <a:moveTo>
                     <a:pt x="0" y="0"/>
                   </a:moveTo>
                   <a:lnTo>
-                    <a:pt x="129600" y="0"/>
+                    <a:pt x="201599" y="0"/>
                   </a:lnTo>
                 </a:path>
               </a:pathLst>
@@ -9086,70 +8848,24 @@
         </p:sp>
         <p:sp>
           <p:nvSpPr>
-            <p:cNvPr id="139" name="tx138"/>
-            <p:cNvSpPr/>
-            <p:nvPr/>
-          </p:nvSpPr>
-          <p:spPr>
-            <a:xfrm>
-              <a:off x="5700056" y="1838705"/>
-              <a:ext cx="146301" cy="109470"/>
-            </a:xfrm>
-            <a:prstGeom prst="rect">
-              <a:avLst/>
-            </a:prstGeom>
-            <a:noFill/>
-          </p:spPr>
-          <p:txBody>
-            <a:bodyPr lIns="0" rIns="0" tIns="0" bIns="0" anchorCtr="1" anchor="ctr" wrap="none"/>
-            <a:lstStyle/>
-            <a:p>
-              <a:pPr algn="l" marL="0" marR="0" indent="0">
-                <a:lnSpc>
-                  <a:spcPts val="1374"/>
-                </a:lnSpc>
-                <a:spcBef>
-                  <a:spcPts val="0"/>
-                </a:spcBef>
-                <a:spcAft>
-                  <a:spcPts val="0"/>
-                </a:spcAft>
-              </a:pPr>
-              <a:r>
-                <a:rPr sz="1374">
-                  <a:solidFill>
-                    <a:srgbClr val="F8766D">
-                      <a:alpha val="100000"/>
-                    </a:srgbClr>
-                  </a:solidFill>
-                  <a:latin typeface="DejaVu Sans"/>
-                  <a:cs typeface="DejaVu Sans"/>
-                </a:rPr>
-                <a:t>+</a:t>
-              </a:r>
-            </a:p>
-          </p:txBody>
-        </p:sp>
-        <p:sp>
-          <p:nvSpPr>
-            <p:cNvPr id="140" name="pl139"/>
-            <p:cNvSpPr/>
-            <p:nvPr/>
-          </p:nvSpPr>
-          <p:spPr>
-            <a:xfrm>
-              <a:off x="5708407" y="2055440"/>
-              <a:ext cx="129600" cy="0"/>
+            <p:cNvPr id="138" name="pl137"/>
+            <p:cNvSpPr/>
+            <p:nvPr/>
+          </p:nvSpPr>
+          <p:spPr>
+            <a:xfrm>
+              <a:off x="5551310" y="2013999"/>
+              <a:ext cx="201599" cy="0"/>
             </a:xfrm>
             <a:custGeom>
               <a:avLst/>
               <a:pathLst>
-                <a:path w="129600" h="0">
+                <a:path w="201599" h="0">
                   <a:moveTo>
                     <a:pt x="0" y="0"/>
                   </a:moveTo>
                   <a:lnTo>
-                    <a:pt x="129600" y="0"/>
+                    <a:pt x="201599" y="0"/>
                   </a:lnTo>
                 </a:path>
               </a:pathLst>
@@ -9172,70 +8888,24 @@
         </p:sp>
         <p:sp>
           <p:nvSpPr>
-            <p:cNvPr id="141" name="tx140"/>
-            <p:cNvSpPr/>
-            <p:nvPr/>
-          </p:nvSpPr>
-          <p:spPr>
-            <a:xfrm>
-              <a:off x="5700056" y="2000705"/>
-              <a:ext cx="146301" cy="109470"/>
-            </a:xfrm>
-            <a:prstGeom prst="rect">
-              <a:avLst/>
-            </a:prstGeom>
-            <a:noFill/>
-          </p:spPr>
-          <p:txBody>
-            <a:bodyPr lIns="0" rIns="0" tIns="0" bIns="0" anchorCtr="1" anchor="ctr" wrap="none"/>
-            <a:lstStyle/>
-            <a:p>
-              <a:pPr algn="l" marL="0" marR="0" indent="0">
-                <a:lnSpc>
-                  <a:spcPts val="1374"/>
-                </a:lnSpc>
-                <a:spcBef>
-                  <a:spcPts val="0"/>
-                </a:spcBef>
-                <a:spcAft>
-                  <a:spcPts val="0"/>
-                </a:spcAft>
-              </a:pPr>
-              <a:r>
-                <a:rPr sz="1374">
-                  <a:solidFill>
-                    <a:srgbClr val="DE8C00">
-                      <a:alpha val="100000"/>
-                    </a:srgbClr>
-                  </a:solidFill>
-                  <a:latin typeface="DejaVu Sans"/>
-                  <a:cs typeface="DejaVu Sans"/>
-                </a:rPr>
-                <a:t>+</a:t>
-              </a:r>
-            </a:p>
-          </p:txBody>
-        </p:sp>
-        <p:sp>
-          <p:nvSpPr>
-            <p:cNvPr id="142" name="pl141"/>
-            <p:cNvSpPr/>
-            <p:nvPr/>
-          </p:nvSpPr>
-          <p:spPr>
-            <a:xfrm>
-              <a:off x="5708407" y="2217440"/>
-              <a:ext cx="129600" cy="0"/>
+            <p:cNvPr id="139" name="pl138"/>
+            <p:cNvSpPr/>
+            <p:nvPr/>
+          </p:nvSpPr>
+          <p:spPr>
+            <a:xfrm>
+              <a:off x="5551310" y="2220857"/>
+              <a:ext cx="201599" cy="0"/>
             </a:xfrm>
             <a:custGeom>
               <a:avLst/>
               <a:pathLst>
-                <a:path w="129600" h="0">
+                <a:path w="201599" h="0">
                   <a:moveTo>
                     <a:pt x="0" y="0"/>
                   </a:moveTo>
                   <a:lnTo>
-                    <a:pt x="129600" y="0"/>
+                    <a:pt x="201599" y="0"/>
                   </a:lnTo>
                 </a:path>
               </a:pathLst>
@@ -9258,70 +8928,24 @@
         </p:sp>
         <p:sp>
           <p:nvSpPr>
-            <p:cNvPr id="143" name="tx142"/>
-            <p:cNvSpPr/>
-            <p:nvPr/>
-          </p:nvSpPr>
-          <p:spPr>
-            <a:xfrm>
-              <a:off x="5700056" y="2162705"/>
-              <a:ext cx="146301" cy="109470"/>
-            </a:xfrm>
-            <a:prstGeom prst="rect">
-              <a:avLst/>
-            </a:prstGeom>
-            <a:noFill/>
-          </p:spPr>
-          <p:txBody>
-            <a:bodyPr lIns="0" rIns="0" tIns="0" bIns="0" anchorCtr="1" anchor="ctr" wrap="none"/>
-            <a:lstStyle/>
-            <a:p>
-              <a:pPr algn="l" marL="0" marR="0" indent="0">
-                <a:lnSpc>
-                  <a:spcPts val="1374"/>
-                </a:lnSpc>
-                <a:spcBef>
-                  <a:spcPts val="0"/>
-                </a:spcBef>
-                <a:spcAft>
-                  <a:spcPts val="0"/>
-                </a:spcAft>
-              </a:pPr>
-              <a:r>
-                <a:rPr sz="1374">
-                  <a:solidFill>
-                    <a:srgbClr val="B79F00">
-                      <a:alpha val="100000"/>
-                    </a:srgbClr>
-                  </a:solidFill>
-                  <a:latin typeface="DejaVu Sans"/>
-                  <a:cs typeface="DejaVu Sans"/>
-                </a:rPr>
-                <a:t>+</a:t>
-              </a:r>
-            </a:p>
-          </p:txBody>
-        </p:sp>
-        <p:sp>
-          <p:nvSpPr>
-            <p:cNvPr id="144" name="pl143"/>
-            <p:cNvSpPr/>
-            <p:nvPr/>
-          </p:nvSpPr>
-          <p:spPr>
-            <a:xfrm>
-              <a:off x="5708407" y="2379440"/>
-              <a:ext cx="129600" cy="0"/>
+            <p:cNvPr id="140" name="pl139"/>
+            <p:cNvSpPr/>
+            <p:nvPr/>
+          </p:nvSpPr>
+          <p:spPr>
+            <a:xfrm>
+              <a:off x="5551310" y="2427714"/>
+              <a:ext cx="201599" cy="0"/>
             </a:xfrm>
             <a:custGeom>
               <a:avLst/>
               <a:pathLst>
-                <a:path w="129600" h="0">
+                <a:path w="201599" h="0">
                   <a:moveTo>
                     <a:pt x="0" y="0"/>
                   </a:moveTo>
                   <a:lnTo>
-                    <a:pt x="129600" y="0"/>
+                    <a:pt x="201599" y="0"/>
                   </a:lnTo>
                 </a:path>
               </a:pathLst>
@@ -9344,70 +8968,24 @@
         </p:sp>
         <p:sp>
           <p:nvSpPr>
-            <p:cNvPr id="145" name="tx144"/>
-            <p:cNvSpPr/>
-            <p:nvPr/>
-          </p:nvSpPr>
-          <p:spPr>
-            <a:xfrm>
-              <a:off x="5700056" y="2324705"/>
-              <a:ext cx="146301" cy="109470"/>
-            </a:xfrm>
-            <a:prstGeom prst="rect">
-              <a:avLst/>
-            </a:prstGeom>
-            <a:noFill/>
-          </p:spPr>
-          <p:txBody>
-            <a:bodyPr lIns="0" rIns="0" tIns="0" bIns="0" anchorCtr="1" anchor="ctr" wrap="none"/>
-            <a:lstStyle/>
-            <a:p>
-              <a:pPr algn="l" marL="0" marR="0" indent="0">
-                <a:lnSpc>
-                  <a:spcPts val="1374"/>
-                </a:lnSpc>
-                <a:spcBef>
-                  <a:spcPts val="0"/>
-                </a:spcBef>
-                <a:spcAft>
-                  <a:spcPts val="0"/>
-                </a:spcAft>
-              </a:pPr>
-              <a:r>
-                <a:rPr sz="1374">
-                  <a:solidFill>
-                    <a:srgbClr val="7CAE00">
-                      <a:alpha val="100000"/>
-                    </a:srgbClr>
-                  </a:solidFill>
-                  <a:latin typeface="DejaVu Sans"/>
-                  <a:cs typeface="DejaVu Sans"/>
-                </a:rPr>
-                <a:t>+</a:t>
-              </a:r>
-            </a:p>
-          </p:txBody>
-        </p:sp>
-        <p:sp>
-          <p:nvSpPr>
-            <p:cNvPr id="146" name="pl145"/>
-            <p:cNvSpPr/>
-            <p:nvPr/>
-          </p:nvSpPr>
-          <p:spPr>
-            <a:xfrm>
-              <a:off x="5708407" y="2541440"/>
-              <a:ext cx="129600" cy="0"/>
+            <p:cNvPr id="141" name="pl140"/>
+            <p:cNvSpPr/>
+            <p:nvPr/>
+          </p:nvSpPr>
+          <p:spPr>
+            <a:xfrm>
+              <a:off x="5551310" y="2634571"/>
+              <a:ext cx="201599" cy="0"/>
             </a:xfrm>
             <a:custGeom>
               <a:avLst/>
               <a:pathLst>
-                <a:path w="129600" h="0">
+                <a:path w="201599" h="0">
                   <a:moveTo>
                     <a:pt x="0" y="0"/>
                   </a:moveTo>
                   <a:lnTo>
-                    <a:pt x="129600" y="0"/>
+                    <a:pt x="201599" y="0"/>
                   </a:lnTo>
                 </a:path>
               </a:pathLst>
@@ -9430,70 +9008,24 @@
         </p:sp>
         <p:sp>
           <p:nvSpPr>
-            <p:cNvPr id="147" name="tx146"/>
-            <p:cNvSpPr/>
-            <p:nvPr/>
-          </p:nvSpPr>
-          <p:spPr>
-            <a:xfrm>
-              <a:off x="5700056" y="2486705"/>
-              <a:ext cx="146301" cy="109470"/>
-            </a:xfrm>
-            <a:prstGeom prst="rect">
-              <a:avLst/>
-            </a:prstGeom>
-            <a:noFill/>
-          </p:spPr>
-          <p:txBody>
-            <a:bodyPr lIns="0" rIns="0" tIns="0" bIns="0" anchorCtr="1" anchor="ctr" wrap="none"/>
-            <a:lstStyle/>
-            <a:p>
-              <a:pPr algn="l" marL="0" marR="0" indent="0">
-                <a:lnSpc>
-                  <a:spcPts val="1374"/>
-                </a:lnSpc>
-                <a:spcBef>
-                  <a:spcPts val="0"/>
-                </a:spcBef>
-                <a:spcAft>
-                  <a:spcPts val="0"/>
-                </a:spcAft>
-              </a:pPr>
-              <a:r>
-                <a:rPr sz="1374">
-                  <a:solidFill>
-                    <a:srgbClr val="00BA38">
-                      <a:alpha val="100000"/>
-                    </a:srgbClr>
-                  </a:solidFill>
-                  <a:latin typeface="DejaVu Sans"/>
-                  <a:cs typeface="DejaVu Sans"/>
-                </a:rPr>
-                <a:t>+</a:t>
-              </a:r>
-            </a:p>
-          </p:txBody>
-        </p:sp>
-        <p:sp>
-          <p:nvSpPr>
-            <p:cNvPr id="148" name="pl147"/>
-            <p:cNvSpPr/>
-            <p:nvPr/>
-          </p:nvSpPr>
-          <p:spPr>
-            <a:xfrm>
-              <a:off x="5708407" y="2703440"/>
-              <a:ext cx="129600" cy="0"/>
+            <p:cNvPr id="142" name="pl141"/>
+            <p:cNvSpPr/>
+            <p:nvPr/>
+          </p:nvSpPr>
+          <p:spPr>
+            <a:xfrm>
+              <a:off x="5551310" y="2841429"/>
+              <a:ext cx="201599" cy="0"/>
             </a:xfrm>
             <a:custGeom>
               <a:avLst/>
               <a:pathLst>
-                <a:path w="129600" h="0">
+                <a:path w="201599" h="0">
                   <a:moveTo>
                     <a:pt x="0" y="0"/>
                   </a:moveTo>
                   <a:lnTo>
-                    <a:pt x="129600" y="0"/>
+                    <a:pt x="201599" y="0"/>
                   </a:lnTo>
                 </a:path>
               </a:pathLst>
@@ -9516,70 +9048,24 @@
         </p:sp>
         <p:sp>
           <p:nvSpPr>
-            <p:cNvPr id="149" name="tx148"/>
-            <p:cNvSpPr/>
-            <p:nvPr/>
-          </p:nvSpPr>
-          <p:spPr>
-            <a:xfrm>
-              <a:off x="5700056" y="2648705"/>
-              <a:ext cx="146301" cy="109470"/>
-            </a:xfrm>
-            <a:prstGeom prst="rect">
-              <a:avLst/>
-            </a:prstGeom>
-            <a:noFill/>
-          </p:spPr>
-          <p:txBody>
-            <a:bodyPr lIns="0" rIns="0" tIns="0" bIns="0" anchorCtr="1" anchor="ctr" wrap="none"/>
-            <a:lstStyle/>
-            <a:p>
-              <a:pPr algn="l" marL="0" marR="0" indent="0">
-                <a:lnSpc>
-                  <a:spcPts val="1374"/>
-                </a:lnSpc>
-                <a:spcBef>
-                  <a:spcPts val="0"/>
-                </a:spcBef>
-                <a:spcAft>
-                  <a:spcPts val="0"/>
-                </a:spcAft>
-              </a:pPr>
-              <a:r>
-                <a:rPr sz="1374">
-                  <a:solidFill>
-                    <a:srgbClr val="00C08B">
-                      <a:alpha val="100000"/>
-                    </a:srgbClr>
-                  </a:solidFill>
-                  <a:latin typeface="DejaVu Sans"/>
-                  <a:cs typeface="DejaVu Sans"/>
-                </a:rPr>
-                <a:t>+</a:t>
-              </a:r>
-            </a:p>
-          </p:txBody>
-        </p:sp>
-        <p:sp>
-          <p:nvSpPr>
-            <p:cNvPr id="150" name="pl149"/>
-            <p:cNvSpPr/>
-            <p:nvPr/>
-          </p:nvSpPr>
-          <p:spPr>
-            <a:xfrm>
-              <a:off x="5708407" y="2865440"/>
-              <a:ext cx="129600" cy="0"/>
+            <p:cNvPr id="143" name="pl142"/>
+            <p:cNvSpPr/>
+            <p:nvPr/>
+          </p:nvSpPr>
+          <p:spPr>
+            <a:xfrm>
+              <a:off x="5551310" y="3048286"/>
+              <a:ext cx="201599" cy="0"/>
             </a:xfrm>
             <a:custGeom>
               <a:avLst/>
               <a:pathLst>
-                <a:path w="129600" h="0">
+                <a:path w="201599" h="0">
                   <a:moveTo>
                     <a:pt x="0" y="0"/>
                   </a:moveTo>
                   <a:lnTo>
-                    <a:pt x="129600" y="0"/>
+                    <a:pt x="201599" y="0"/>
                   </a:lnTo>
                 </a:path>
               </a:pathLst>
@@ -9602,70 +9088,24 @@
         </p:sp>
         <p:sp>
           <p:nvSpPr>
-            <p:cNvPr id="151" name="tx150"/>
-            <p:cNvSpPr/>
-            <p:nvPr/>
-          </p:nvSpPr>
-          <p:spPr>
-            <a:xfrm>
-              <a:off x="5700056" y="2810705"/>
-              <a:ext cx="146301" cy="109470"/>
-            </a:xfrm>
-            <a:prstGeom prst="rect">
-              <a:avLst/>
-            </a:prstGeom>
-            <a:noFill/>
-          </p:spPr>
-          <p:txBody>
-            <a:bodyPr lIns="0" rIns="0" tIns="0" bIns="0" anchorCtr="1" anchor="ctr" wrap="none"/>
-            <a:lstStyle/>
-            <a:p>
-              <a:pPr algn="l" marL="0" marR="0" indent="0">
-                <a:lnSpc>
-                  <a:spcPts val="1374"/>
-                </a:lnSpc>
-                <a:spcBef>
-                  <a:spcPts val="0"/>
-                </a:spcBef>
-                <a:spcAft>
-                  <a:spcPts val="0"/>
-                </a:spcAft>
-              </a:pPr>
-              <a:r>
-                <a:rPr sz="1374">
-                  <a:solidFill>
-                    <a:srgbClr val="00BFC4">
-                      <a:alpha val="100000"/>
-                    </a:srgbClr>
-                  </a:solidFill>
-                  <a:latin typeface="DejaVu Sans"/>
-                  <a:cs typeface="DejaVu Sans"/>
-                </a:rPr>
-                <a:t>+</a:t>
-              </a:r>
-            </a:p>
-          </p:txBody>
-        </p:sp>
-        <p:sp>
-          <p:nvSpPr>
-            <p:cNvPr id="152" name="pl151"/>
-            <p:cNvSpPr/>
-            <p:nvPr/>
-          </p:nvSpPr>
-          <p:spPr>
-            <a:xfrm>
-              <a:off x="5708407" y="3027440"/>
-              <a:ext cx="129600" cy="0"/>
+            <p:cNvPr id="144" name="pl143"/>
+            <p:cNvSpPr/>
+            <p:nvPr/>
+          </p:nvSpPr>
+          <p:spPr>
+            <a:xfrm>
+              <a:off x="5551310" y="3255144"/>
+              <a:ext cx="201599" cy="0"/>
             </a:xfrm>
             <a:custGeom>
               <a:avLst/>
               <a:pathLst>
-                <a:path w="129600" h="0">
+                <a:path w="201599" h="0">
                   <a:moveTo>
                     <a:pt x="0" y="0"/>
                   </a:moveTo>
                   <a:lnTo>
-                    <a:pt x="129600" y="0"/>
+                    <a:pt x="201599" y="0"/>
                   </a:lnTo>
                 </a:path>
               </a:pathLst>
@@ -9688,70 +9128,24 @@
         </p:sp>
         <p:sp>
           <p:nvSpPr>
-            <p:cNvPr id="153" name="tx152"/>
-            <p:cNvSpPr/>
-            <p:nvPr/>
-          </p:nvSpPr>
-          <p:spPr>
-            <a:xfrm>
-              <a:off x="5700056" y="2972705"/>
-              <a:ext cx="146301" cy="109470"/>
-            </a:xfrm>
-            <a:prstGeom prst="rect">
-              <a:avLst/>
-            </a:prstGeom>
-            <a:noFill/>
-          </p:spPr>
-          <p:txBody>
-            <a:bodyPr lIns="0" rIns="0" tIns="0" bIns="0" anchorCtr="1" anchor="ctr" wrap="none"/>
-            <a:lstStyle/>
-            <a:p>
-              <a:pPr algn="l" marL="0" marR="0" indent="0">
-                <a:lnSpc>
-                  <a:spcPts val="1374"/>
-                </a:lnSpc>
-                <a:spcBef>
-                  <a:spcPts val="0"/>
-                </a:spcBef>
-                <a:spcAft>
-                  <a:spcPts val="0"/>
-                </a:spcAft>
-              </a:pPr>
-              <a:r>
-                <a:rPr sz="1374">
-                  <a:solidFill>
-                    <a:srgbClr val="00B4F0">
-                      <a:alpha val="100000"/>
-                    </a:srgbClr>
-                  </a:solidFill>
-                  <a:latin typeface="DejaVu Sans"/>
-                  <a:cs typeface="DejaVu Sans"/>
-                </a:rPr>
-                <a:t>+</a:t>
-              </a:r>
-            </a:p>
-          </p:txBody>
-        </p:sp>
-        <p:sp>
-          <p:nvSpPr>
-            <p:cNvPr id="154" name="pl153"/>
-            <p:cNvSpPr/>
-            <p:nvPr/>
-          </p:nvSpPr>
-          <p:spPr>
-            <a:xfrm>
-              <a:off x="5708407" y="3189440"/>
-              <a:ext cx="129600" cy="0"/>
+            <p:cNvPr id="145" name="pl144"/>
+            <p:cNvSpPr/>
+            <p:nvPr/>
+          </p:nvSpPr>
+          <p:spPr>
+            <a:xfrm>
+              <a:off x="5551310" y="3462001"/>
+              <a:ext cx="201599" cy="0"/>
             </a:xfrm>
             <a:custGeom>
               <a:avLst/>
               <a:pathLst>
-                <a:path w="129600" h="0">
+                <a:path w="201599" h="0">
                   <a:moveTo>
                     <a:pt x="0" y="0"/>
                   </a:moveTo>
                   <a:lnTo>
-                    <a:pt x="129600" y="0"/>
+                    <a:pt x="201599" y="0"/>
                   </a:lnTo>
                 </a:path>
               </a:pathLst>
@@ -9774,70 +9168,24 @@
         </p:sp>
         <p:sp>
           <p:nvSpPr>
-            <p:cNvPr id="155" name="tx154"/>
-            <p:cNvSpPr/>
-            <p:nvPr/>
-          </p:nvSpPr>
-          <p:spPr>
-            <a:xfrm>
-              <a:off x="5700056" y="3134705"/>
-              <a:ext cx="146301" cy="109470"/>
-            </a:xfrm>
-            <a:prstGeom prst="rect">
-              <a:avLst/>
-            </a:prstGeom>
-            <a:noFill/>
-          </p:spPr>
-          <p:txBody>
-            <a:bodyPr lIns="0" rIns="0" tIns="0" bIns="0" anchorCtr="1" anchor="ctr" wrap="none"/>
-            <a:lstStyle/>
-            <a:p>
-              <a:pPr algn="l" marL="0" marR="0" indent="0">
-                <a:lnSpc>
-                  <a:spcPts val="1374"/>
-                </a:lnSpc>
-                <a:spcBef>
-                  <a:spcPts val="0"/>
-                </a:spcBef>
-                <a:spcAft>
-                  <a:spcPts val="0"/>
-                </a:spcAft>
-              </a:pPr>
-              <a:r>
-                <a:rPr sz="1374">
-                  <a:solidFill>
-                    <a:srgbClr val="619CFF">
-                      <a:alpha val="100000"/>
-                    </a:srgbClr>
-                  </a:solidFill>
-                  <a:latin typeface="DejaVu Sans"/>
-                  <a:cs typeface="DejaVu Sans"/>
-                </a:rPr>
-                <a:t>+</a:t>
-              </a:r>
-            </a:p>
-          </p:txBody>
-        </p:sp>
-        <p:sp>
-          <p:nvSpPr>
-            <p:cNvPr id="156" name="pl155"/>
-            <p:cNvSpPr/>
-            <p:nvPr/>
-          </p:nvSpPr>
-          <p:spPr>
-            <a:xfrm>
-              <a:off x="5708407" y="3351440"/>
-              <a:ext cx="129600" cy="0"/>
+            <p:cNvPr id="146" name="pl145"/>
+            <p:cNvSpPr/>
+            <p:nvPr/>
+          </p:nvSpPr>
+          <p:spPr>
+            <a:xfrm>
+              <a:off x="5551310" y="3668858"/>
+              <a:ext cx="201599" cy="0"/>
             </a:xfrm>
             <a:custGeom>
               <a:avLst/>
               <a:pathLst>
-                <a:path w="129600" h="0">
+                <a:path w="201599" h="0">
                   <a:moveTo>
                     <a:pt x="0" y="0"/>
                   </a:moveTo>
                   <a:lnTo>
-                    <a:pt x="129600" y="0"/>
+                    <a:pt x="201599" y="0"/>
                   </a:lnTo>
                 </a:path>
               </a:pathLst>
@@ -9860,70 +9208,24 @@
         </p:sp>
         <p:sp>
           <p:nvSpPr>
-            <p:cNvPr id="157" name="tx156"/>
-            <p:cNvSpPr/>
-            <p:nvPr/>
-          </p:nvSpPr>
-          <p:spPr>
-            <a:xfrm>
-              <a:off x="5700056" y="3296705"/>
-              <a:ext cx="146301" cy="109470"/>
-            </a:xfrm>
-            <a:prstGeom prst="rect">
-              <a:avLst/>
-            </a:prstGeom>
-            <a:noFill/>
-          </p:spPr>
-          <p:txBody>
-            <a:bodyPr lIns="0" rIns="0" tIns="0" bIns="0" anchorCtr="1" anchor="ctr" wrap="none"/>
-            <a:lstStyle/>
-            <a:p>
-              <a:pPr algn="l" marL="0" marR="0" indent="0">
-                <a:lnSpc>
-                  <a:spcPts val="1374"/>
-                </a:lnSpc>
-                <a:spcBef>
-                  <a:spcPts val="0"/>
-                </a:spcBef>
-                <a:spcAft>
-                  <a:spcPts val="0"/>
-                </a:spcAft>
-              </a:pPr>
-              <a:r>
-                <a:rPr sz="1374">
-                  <a:solidFill>
-                    <a:srgbClr val="C77CFF">
-                      <a:alpha val="100000"/>
-                    </a:srgbClr>
-                  </a:solidFill>
-                  <a:latin typeface="DejaVu Sans"/>
-                  <a:cs typeface="DejaVu Sans"/>
-                </a:rPr>
-                <a:t>+</a:t>
-              </a:r>
-            </a:p>
-          </p:txBody>
-        </p:sp>
-        <p:sp>
-          <p:nvSpPr>
-            <p:cNvPr id="158" name="pl157"/>
-            <p:cNvSpPr/>
-            <p:nvPr/>
-          </p:nvSpPr>
-          <p:spPr>
-            <a:xfrm>
-              <a:off x="5708407" y="3513440"/>
-              <a:ext cx="129600" cy="0"/>
+            <p:cNvPr id="147" name="pl146"/>
+            <p:cNvSpPr/>
+            <p:nvPr/>
+          </p:nvSpPr>
+          <p:spPr>
+            <a:xfrm>
+              <a:off x="5551310" y="3875716"/>
+              <a:ext cx="201599" cy="0"/>
             </a:xfrm>
             <a:custGeom>
               <a:avLst/>
               <a:pathLst>
-                <a:path w="129600" h="0">
+                <a:path w="201599" h="0">
                   <a:moveTo>
                     <a:pt x="0" y="0"/>
                   </a:moveTo>
                   <a:lnTo>
-                    <a:pt x="129600" y="0"/>
+                    <a:pt x="201599" y="0"/>
                   </a:lnTo>
                 </a:path>
               </a:pathLst>
@@ -9946,70 +9248,24 @@
         </p:sp>
         <p:sp>
           <p:nvSpPr>
-            <p:cNvPr id="159" name="tx158"/>
-            <p:cNvSpPr/>
-            <p:nvPr/>
-          </p:nvSpPr>
-          <p:spPr>
-            <a:xfrm>
-              <a:off x="5700056" y="3458705"/>
-              <a:ext cx="146301" cy="109470"/>
-            </a:xfrm>
-            <a:prstGeom prst="rect">
-              <a:avLst/>
-            </a:prstGeom>
-            <a:noFill/>
-          </p:spPr>
-          <p:txBody>
-            <a:bodyPr lIns="0" rIns="0" tIns="0" bIns="0" anchorCtr="1" anchor="ctr" wrap="none"/>
-            <a:lstStyle/>
-            <a:p>
-              <a:pPr algn="l" marL="0" marR="0" indent="0">
-                <a:lnSpc>
-                  <a:spcPts val="1374"/>
-                </a:lnSpc>
-                <a:spcBef>
-                  <a:spcPts val="0"/>
-                </a:spcBef>
-                <a:spcAft>
-                  <a:spcPts val="0"/>
-                </a:spcAft>
-              </a:pPr>
-              <a:r>
-                <a:rPr sz="1374">
-                  <a:solidFill>
-                    <a:srgbClr val="F564E3">
-                      <a:alpha val="100000"/>
-                    </a:srgbClr>
-                  </a:solidFill>
-                  <a:latin typeface="DejaVu Sans"/>
-                  <a:cs typeface="DejaVu Sans"/>
-                </a:rPr>
-                <a:t>+</a:t>
-              </a:r>
-            </a:p>
-          </p:txBody>
-        </p:sp>
-        <p:sp>
-          <p:nvSpPr>
-            <p:cNvPr id="160" name="pl159"/>
-            <p:cNvSpPr/>
-            <p:nvPr/>
-          </p:nvSpPr>
-          <p:spPr>
-            <a:xfrm>
-              <a:off x="5708407" y="3675440"/>
-              <a:ext cx="129600" cy="0"/>
+            <p:cNvPr id="148" name="pl147"/>
+            <p:cNvSpPr/>
+            <p:nvPr/>
+          </p:nvSpPr>
+          <p:spPr>
+            <a:xfrm>
+              <a:off x="5551310" y="4082573"/>
+              <a:ext cx="201599" cy="0"/>
             </a:xfrm>
             <a:custGeom>
               <a:avLst/>
               <a:pathLst>
-                <a:path w="129600" h="0">
+                <a:path w="201599" h="0">
                   <a:moveTo>
                     <a:pt x="0" y="0"/>
                   </a:moveTo>
                   <a:lnTo>
-                    <a:pt x="129600" y="0"/>
+                    <a:pt x="201599" y="0"/>
                   </a:lnTo>
                 </a:path>
               </a:pathLst>
@@ -10032,14 +9288,14 @@
         </p:sp>
         <p:sp>
           <p:nvSpPr>
-            <p:cNvPr id="161" name="tx160"/>
-            <p:cNvSpPr/>
-            <p:nvPr/>
-          </p:nvSpPr>
-          <p:spPr>
-            <a:xfrm>
-              <a:off x="5700056" y="3620705"/>
-              <a:ext cx="146301" cy="109470"/>
+            <p:cNvPr id="149" name="tx148"/>
+            <p:cNvSpPr/>
+            <p:nvPr/>
+          </p:nvSpPr>
+          <p:spPr>
+            <a:xfrm>
+              <a:off x="5816068" y="1756210"/>
+              <a:ext cx="186446" cy="101864"/>
             </a:xfrm>
             <a:prstGeom prst="rect">
               <a:avLst/>
@@ -10051,9 +9307,6 @@
             <a:lstStyle/>
             <a:p>
               <a:pPr algn="l" marL="0" marR="0" indent="0">
-                <a:lnSpc>
-                  <a:spcPts val="1374"/>
-                </a:lnSpc>
                 <a:spcBef>
                   <a:spcPts val="0"/>
                 </a:spcBef>
@@ -10062,53 +9315,7 @@
                 </a:spcAft>
               </a:pPr>
               <a:r>
-                <a:rPr sz="1374">
-                  <a:solidFill>
-                    <a:srgbClr val="FF64B0">
-                      <a:alpha val="100000"/>
-                    </a:srgbClr>
-                  </a:solidFill>
-                  <a:latin typeface="DejaVu Sans"/>
-                  <a:cs typeface="DejaVu Sans"/>
-                </a:rPr>
-                <a:t>+</a:t>
-              </a:r>
-            </a:p>
-          </p:txBody>
-        </p:sp>
-        <p:sp>
-          <p:nvSpPr>
-            <p:cNvPr id="162" name="tx161"/>
-            <p:cNvSpPr/>
-            <p:nvPr/>
-          </p:nvSpPr>
-          <p:spPr>
-            <a:xfrm>
-              <a:off x="5942775" y="1837704"/>
-              <a:ext cx="189815" cy="107582"/>
-            </a:xfrm>
-            <a:prstGeom prst="rect">
-              <a:avLst/>
-            </a:prstGeom>
-            <a:noFill/>
-          </p:spPr>
-          <p:txBody>
-            <a:bodyPr lIns="0" rIns="0" tIns="0" bIns="0" anchorCtr="1" anchor="ctr" wrap="none"/>
-            <a:lstStyle/>
-            <a:p>
-              <a:pPr algn="l" marL="0" marR="0" indent="0">
-                <a:lnSpc>
-                  <a:spcPts val="1120"/>
-                </a:lnSpc>
-                <a:spcBef>
-                  <a:spcPts val="0"/>
-                </a:spcBef>
-                <a:spcAft>
-                  <a:spcPts val="0"/>
-                </a:spcAft>
-              </a:pPr>
-              <a:r>
-                <a:rPr sz="1120">
+                <a:rPr sz="1100" i="0" b="0">
                   <a:solidFill>
                     <a:srgbClr val="000000">
                       <a:alpha val="100000"/>
@@ -10124,14 +9331,14 @@
         </p:sp>
         <p:sp>
           <p:nvSpPr>
-            <p:cNvPr id="163" name="tx162"/>
-            <p:cNvSpPr/>
-            <p:nvPr/>
-          </p:nvSpPr>
-          <p:spPr>
-            <a:xfrm>
-              <a:off x="5942775" y="1999704"/>
-              <a:ext cx="280312" cy="107582"/>
+            <p:cNvPr id="150" name="tx149"/>
+            <p:cNvSpPr/>
+            <p:nvPr/>
+          </p:nvSpPr>
+          <p:spPr>
+            <a:xfrm>
+              <a:off x="5816068" y="1963067"/>
+              <a:ext cx="275325" cy="101864"/>
             </a:xfrm>
             <a:prstGeom prst="rect">
               <a:avLst/>
@@ -10143,9 +9350,6 @@
             <a:lstStyle/>
             <a:p>
               <a:pPr algn="l" marL="0" marR="0" indent="0">
-                <a:lnSpc>
-                  <a:spcPts val="1120"/>
-                </a:lnSpc>
                 <a:spcBef>
                   <a:spcPts val="0"/>
                 </a:spcBef>
@@ -10154,7 +9358,7 @@
                 </a:spcAft>
               </a:pPr>
               <a:r>
-                <a:rPr sz="1120">
+                <a:rPr sz="1100" i="0" b="0">
                   <a:solidFill>
                     <a:srgbClr val="000000">
                       <a:alpha val="100000"/>
@@ -10170,14 +9374,14 @@
         </p:sp>
         <p:sp>
           <p:nvSpPr>
-            <p:cNvPr id="164" name="tx163"/>
-            <p:cNvSpPr/>
-            <p:nvPr/>
-          </p:nvSpPr>
-          <p:spPr>
-            <a:xfrm>
-              <a:off x="5942775" y="2161704"/>
-              <a:ext cx="280312" cy="107582"/>
+            <p:cNvPr id="151" name="tx150"/>
+            <p:cNvSpPr/>
+            <p:nvPr/>
+          </p:nvSpPr>
+          <p:spPr>
+            <a:xfrm>
+              <a:off x="5816068" y="2169925"/>
+              <a:ext cx="275325" cy="101864"/>
             </a:xfrm>
             <a:prstGeom prst="rect">
               <a:avLst/>
@@ -10189,9 +9393,6 @@
             <a:lstStyle/>
             <a:p>
               <a:pPr algn="l" marL="0" marR="0" indent="0">
-                <a:lnSpc>
-                  <a:spcPts val="1120"/>
-                </a:lnSpc>
                 <a:spcBef>
                   <a:spcPts val="0"/>
                 </a:spcBef>
@@ -10200,7 +9401,7 @@
                 </a:spcAft>
               </a:pPr>
               <a:r>
-                <a:rPr sz="1120">
+                <a:rPr sz="1100" i="0" b="0">
                   <a:solidFill>
                     <a:srgbClr val="000000">
                       <a:alpha val="100000"/>
@@ -10216,14 +9417,14 @@
         </p:sp>
         <p:sp>
           <p:nvSpPr>
-            <p:cNvPr id="165" name="tx164"/>
-            <p:cNvSpPr/>
-            <p:nvPr/>
-          </p:nvSpPr>
-          <p:spPr>
-            <a:xfrm>
-              <a:off x="5942775" y="2323704"/>
-              <a:ext cx="280312" cy="107582"/>
+            <p:cNvPr id="152" name="tx151"/>
+            <p:cNvSpPr/>
+            <p:nvPr/>
+          </p:nvSpPr>
+          <p:spPr>
+            <a:xfrm>
+              <a:off x="5816068" y="2376782"/>
+              <a:ext cx="275325" cy="101864"/>
             </a:xfrm>
             <a:prstGeom prst="rect">
               <a:avLst/>
@@ -10235,9 +9436,6 @@
             <a:lstStyle/>
             <a:p>
               <a:pPr algn="l" marL="0" marR="0" indent="0">
-                <a:lnSpc>
-                  <a:spcPts val="1120"/>
-                </a:lnSpc>
                 <a:spcBef>
                   <a:spcPts val="0"/>
                 </a:spcBef>
@@ -10246,7 +9444,7 @@
                 </a:spcAft>
               </a:pPr>
               <a:r>
-                <a:rPr sz="1120">
+                <a:rPr sz="1100" i="0" b="0">
                   <a:solidFill>
                     <a:srgbClr val="000000">
                       <a:alpha val="100000"/>
@@ -10262,14 +9460,14 @@
         </p:sp>
         <p:sp>
           <p:nvSpPr>
-            <p:cNvPr id="166" name="tx165"/>
-            <p:cNvSpPr/>
-            <p:nvPr/>
-          </p:nvSpPr>
-          <p:spPr>
-            <a:xfrm>
-              <a:off x="5942775" y="2485704"/>
-              <a:ext cx="280312" cy="107582"/>
+            <p:cNvPr id="153" name="tx152"/>
+            <p:cNvSpPr/>
+            <p:nvPr/>
+          </p:nvSpPr>
+          <p:spPr>
+            <a:xfrm>
+              <a:off x="5816068" y="2583639"/>
+              <a:ext cx="275325" cy="101864"/>
             </a:xfrm>
             <a:prstGeom prst="rect">
               <a:avLst/>
@@ -10281,9 +9479,6 @@
             <a:lstStyle/>
             <a:p>
               <a:pPr algn="l" marL="0" marR="0" indent="0">
-                <a:lnSpc>
-                  <a:spcPts val="1120"/>
-                </a:lnSpc>
                 <a:spcBef>
                   <a:spcPts val="0"/>
                 </a:spcBef>
@@ -10292,7 +9487,7 @@
                 </a:spcAft>
               </a:pPr>
               <a:r>
-                <a:rPr sz="1120">
+                <a:rPr sz="1100" i="0" b="0">
                   <a:solidFill>
                     <a:srgbClr val="000000">
                       <a:alpha val="100000"/>
@@ -10308,14 +9503,14 @@
         </p:sp>
         <p:sp>
           <p:nvSpPr>
-            <p:cNvPr id="167" name="tx166"/>
-            <p:cNvSpPr/>
-            <p:nvPr/>
-          </p:nvSpPr>
-          <p:spPr>
-            <a:xfrm>
-              <a:off x="5942775" y="2647704"/>
-              <a:ext cx="189815" cy="107582"/>
+            <p:cNvPr id="154" name="tx153"/>
+            <p:cNvSpPr/>
+            <p:nvPr/>
+          </p:nvSpPr>
+          <p:spPr>
+            <a:xfrm>
+              <a:off x="5816068" y="2790497"/>
+              <a:ext cx="186446" cy="101864"/>
             </a:xfrm>
             <a:prstGeom prst="rect">
               <a:avLst/>
@@ -10327,9 +9522,6 @@
             <a:lstStyle/>
             <a:p>
               <a:pPr algn="l" marL="0" marR="0" indent="0">
-                <a:lnSpc>
-                  <a:spcPts val="1120"/>
-                </a:lnSpc>
                 <a:spcBef>
                   <a:spcPts val="0"/>
                 </a:spcBef>
@@ -10338,7 +9530,7 @@
                 </a:spcAft>
               </a:pPr>
               <a:r>
-                <a:rPr sz="1120">
+                <a:rPr sz="1100" i="0" b="0">
                   <a:solidFill>
                     <a:srgbClr val="000000">
                       <a:alpha val="100000"/>
@@ -10354,14 +9546,14 @@
         </p:sp>
         <p:sp>
           <p:nvSpPr>
-            <p:cNvPr id="168" name="tx167"/>
-            <p:cNvSpPr/>
-            <p:nvPr/>
-          </p:nvSpPr>
-          <p:spPr>
-            <a:xfrm>
-              <a:off x="5942775" y="2809704"/>
-              <a:ext cx="189815" cy="107582"/>
+            <p:cNvPr id="155" name="tx154"/>
+            <p:cNvSpPr/>
+            <p:nvPr/>
+          </p:nvSpPr>
+          <p:spPr>
+            <a:xfrm>
+              <a:off x="5816068" y="2997354"/>
+              <a:ext cx="186446" cy="101864"/>
             </a:xfrm>
             <a:prstGeom prst="rect">
               <a:avLst/>
@@ -10373,9 +9565,6 @@
             <a:lstStyle/>
             <a:p>
               <a:pPr algn="l" marL="0" marR="0" indent="0">
-                <a:lnSpc>
-                  <a:spcPts val="1120"/>
-                </a:lnSpc>
                 <a:spcBef>
                   <a:spcPts val="0"/>
                 </a:spcBef>
@@ -10384,7 +9573,7 @@
                 </a:spcAft>
               </a:pPr>
               <a:r>
-                <a:rPr sz="1120">
+                <a:rPr sz="1100" i="0" b="0">
                   <a:solidFill>
                     <a:srgbClr val="000000">
                       <a:alpha val="100000"/>
@@ -10400,14 +9589,14 @@
         </p:sp>
         <p:sp>
           <p:nvSpPr>
-            <p:cNvPr id="169" name="tx168"/>
-            <p:cNvSpPr/>
-            <p:nvPr/>
-          </p:nvSpPr>
-          <p:spPr>
-            <a:xfrm>
-              <a:off x="5942775" y="2971704"/>
-              <a:ext cx="189815" cy="107582"/>
+            <p:cNvPr id="156" name="tx155"/>
+            <p:cNvSpPr/>
+            <p:nvPr/>
+          </p:nvSpPr>
+          <p:spPr>
+            <a:xfrm>
+              <a:off x="5816068" y="3204212"/>
+              <a:ext cx="186446" cy="101864"/>
             </a:xfrm>
             <a:prstGeom prst="rect">
               <a:avLst/>
@@ -10419,9 +9608,6 @@
             <a:lstStyle/>
             <a:p>
               <a:pPr algn="l" marL="0" marR="0" indent="0">
-                <a:lnSpc>
-                  <a:spcPts val="1120"/>
-                </a:lnSpc>
                 <a:spcBef>
                   <a:spcPts val="0"/>
                 </a:spcBef>
@@ -10430,7 +9616,7 @@
                 </a:spcAft>
               </a:pPr>
               <a:r>
-                <a:rPr sz="1120">
+                <a:rPr sz="1100" i="0" b="0">
                   <a:solidFill>
                     <a:srgbClr val="000000">
                       <a:alpha val="100000"/>
@@ -10446,14 +9632,14 @@
         </p:sp>
         <p:sp>
           <p:nvSpPr>
-            <p:cNvPr id="170" name="tx169"/>
-            <p:cNvSpPr/>
-            <p:nvPr/>
-          </p:nvSpPr>
-          <p:spPr>
-            <a:xfrm>
-              <a:off x="5942775" y="3133704"/>
-              <a:ext cx="189815" cy="107582"/>
+            <p:cNvPr id="157" name="tx156"/>
+            <p:cNvSpPr/>
+            <p:nvPr/>
+          </p:nvSpPr>
+          <p:spPr>
+            <a:xfrm>
+              <a:off x="5816068" y="3411069"/>
+              <a:ext cx="186446" cy="101864"/>
             </a:xfrm>
             <a:prstGeom prst="rect">
               <a:avLst/>
@@ -10465,9 +9651,6 @@
             <a:lstStyle/>
             <a:p>
               <a:pPr algn="l" marL="0" marR="0" indent="0">
-                <a:lnSpc>
-                  <a:spcPts val="1120"/>
-                </a:lnSpc>
                 <a:spcBef>
                   <a:spcPts val="0"/>
                 </a:spcBef>
@@ -10476,7 +9659,7 @@
                 </a:spcAft>
               </a:pPr>
               <a:r>
-                <a:rPr sz="1120">
+                <a:rPr sz="1100" i="0" b="0">
                   <a:solidFill>
                     <a:srgbClr val="000000">
                       <a:alpha val="100000"/>
@@ -10492,14 +9675,14 @@
         </p:sp>
         <p:sp>
           <p:nvSpPr>
-            <p:cNvPr id="171" name="tx170"/>
-            <p:cNvSpPr/>
-            <p:nvPr/>
-          </p:nvSpPr>
-          <p:spPr>
-            <a:xfrm>
-              <a:off x="5942775" y="3295704"/>
-              <a:ext cx="189815" cy="107582"/>
+            <p:cNvPr id="158" name="tx157"/>
+            <p:cNvSpPr/>
+            <p:nvPr/>
+          </p:nvSpPr>
+          <p:spPr>
+            <a:xfrm>
+              <a:off x="5816068" y="3617926"/>
+              <a:ext cx="186446" cy="101864"/>
             </a:xfrm>
             <a:prstGeom prst="rect">
               <a:avLst/>
@@ -10511,9 +9694,6 @@
             <a:lstStyle/>
             <a:p>
               <a:pPr algn="l" marL="0" marR="0" indent="0">
-                <a:lnSpc>
-                  <a:spcPts val="1120"/>
-                </a:lnSpc>
                 <a:spcBef>
                   <a:spcPts val="0"/>
                 </a:spcBef>
@@ -10522,7 +9702,7 @@
                 </a:spcAft>
               </a:pPr>
               <a:r>
-                <a:rPr sz="1120">
+                <a:rPr sz="1100" i="0" b="0">
                   <a:solidFill>
                     <a:srgbClr val="000000">
                       <a:alpha val="100000"/>
@@ -10538,14 +9718,14 @@
         </p:sp>
         <p:sp>
           <p:nvSpPr>
-            <p:cNvPr id="172" name="tx171"/>
-            <p:cNvSpPr/>
-            <p:nvPr/>
-          </p:nvSpPr>
-          <p:spPr>
-            <a:xfrm>
-              <a:off x="5942775" y="3457704"/>
-              <a:ext cx="189815" cy="107582"/>
+            <p:cNvPr id="159" name="tx158"/>
+            <p:cNvSpPr/>
+            <p:nvPr/>
+          </p:nvSpPr>
+          <p:spPr>
+            <a:xfrm>
+              <a:off x="5816068" y="3824784"/>
+              <a:ext cx="186446" cy="101864"/>
             </a:xfrm>
             <a:prstGeom prst="rect">
               <a:avLst/>
@@ -10557,9 +9737,6 @@
             <a:lstStyle/>
             <a:p>
               <a:pPr algn="l" marL="0" marR="0" indent="0">
-                <a:lnSpc>
-                  <a:spcPts val="1120"/>
-                </a:lnSpc>
                 <a:spcBef>
                   <a:spcPts val="0"/>
                 </a:spcBef>
@@ -10568,7 +9745,7 @@
                 </a:spcAft>
               </a:pPr>
               <a:r>
-                <a:rPr sz="1120">
+                <a:rPr sz="1100" i="0" b="0">
                   <a:solidFill>
                     <a:srgbClr val="000000">
                       <a:alpha val="100000"/>
@@ -10584,14 +9761,14 @@
         </p:sp>
         <p:sp>
           <p:nvSpPr>
-            <p:cNvPr id="173" name="tx172"/>
-            <p:cNvSpPr/>
-            <p:nvPr/>
-          </p:nvSpPr>
-          <p:spPr>
-            <a:xfrm>
-              <a:off x="5942775" y="3619704"/>
-              <a:ext cx="189815" cy="107582"/>
+            <p:cNvPr id="160" name="tx159"/>
+            <p:cNvSpPr/>
+            <p:nvPr/>
+          </p:nvSpPr>
+          <p:spPr>
+            <a:xfrm>
+              <a:off x="5816068" y="4031641"/>
+              <a:ext cx="186446" cy="101864"/>
             </a:xfrm>
             <a:prstGeom prst="rect">
               <a:avLst/>
@@ -10603,9 +9780,6 @@
             <a:lstStyle/>
             <a:p>
               <a:pPr algn="l" marL="0" marR="0" indent="0">
-                <a:lnSpc>
-                  <a:spcPts val="1120"/>
-                </a:lnSpc>
                 <a:spcBef>
                   <a:spcPts val="0"/>
                 </a:spcBef>
@@ -10614,7 +9788,7 @@
                 </a:spcAft>
               </a:pPr>
               <a:r>
-                <a:rPr sz="1120">
+                <a:rPr sz="1100" i="0" b="0">
                   <a:solidFill>
                     <a:srgbClr val="000000">
                       <a:alpha val="100000"/>
